--- a/AI_Arch.pptx
+++ b/AI_Arch.pptx
@@ -45,7 +45,7 @@
       </p:grpSpPr>
       <p:sp>
         <p:nvSpPr>
-          <p:cNvPr id="35" name="PlaceHolder 1"/>
+          <p:cNvPr id="36" name="PlaceHolder 1"/>
           <p:cNvSpPr>
             <a:spLocks noGrp="1"/>
           </p:cNvSpPr>
@@ -95,7 +95,7 @@
       </p:sp>
       <p:sp>
         <p:nvSpPr>
-          <p:cNvPr id="36" name="PlaceHolder 2"/>
+          <p:cNvPr id="37" name="PlaceHolder 2"/>
           <p:cNvSpPr>
             <a:spLocks noGrp="1"/>
           </p:cNvSpPr>
@@ -148,7 +148,7 @@
       </p:sp>
       <p:sp>
         <p:nvSpPr>
-          <p:cNvPr id="37" name="PlaceHolder 3"/>
+          <p:cNvPr id="38" name="PlaceHolder 3"/>
           <p:cNvSpPr>
             <a:spLocks noGrp="1"/>
           </p:cNvSpPr>
@@ -201,7 +201,7 @@
       </p:sp>
       <p:sp>
         <p:nvSpPr>
-          <p:cNvPr id="38" name="PlaceHolder 4"/>
+          <p:cNvPr id="39" name="PlaceHolder 4"/>
           <p:cNvSpPr>
             <a:spLocks noGrp="1"/>
           </p:cNvSpPr>
@@ -267,7 +267,7 @@
       </p:sp>
       <p:sp>
         <p:nvSpPr>
-          <p:cNvPr id="39" name="PlaceHolder 5"/>
+          <p:cNvPr id="40" name="PlaceHolder 5"/>
           <p:cNvSpPr>
             <a:spLocks noGrp="1"/>
           </p:cNvSpPr>
@@ -333,7 +333,7 @@
       </p:sp>
       <p:sp>
         <p:nvSpPr>
-          <p:cNvPr id="40" name="PlaceHolder 6"/>
+          <p:cNvPr id="41" name="PlaceHolder 6"/>
           <p:cNvSpPr>
             <a:spLocks noGrp="1"/>
           </p:cNvSpPr>
@@ -375,7 +375,7 @@
             <a:pPr indent="0" algn="r">
               <a:buNone/>
             </a:pPr>
-            <a:fld id="{6F9B55A7-A30A-4A7C-9D59-53BDF1EB1420}" type="slidenum">
+            <a:fld id="{A9DC5EE9-4C03-49C1-BB95-A46D887802C5}" type="slidenum">
               <a:rPr lang="en-US" sz="1400" b="0" u="none" strike="noStrike">
                 <a:solidFill>
                   <a:srgbClr val="000000"/>
@@ -422,7 +422,7 @@
       </p:grpSpPr>
       <p:sp>
         <p:nvSpPr>
-          <p:cNvPr id="67" name="PlaceHolder 1"/>
+          <p:cNvPr id="68" name="PlaceHolder 1"/>
           <p:cNvSpPr>
             <a:spLocks noGrp="1"/>
           </p:cNvSpPr>
@@ -433,7 +433,7 @@
         <p:spPr>
           <a:xfrm>
             <a:off x="533520" y="764280"/>
-            <a:ext cx="6704280" cy="3771000"/>
+            <a:ext cx="6703920" cy="3770640"/>
           </a:xfrm>
           <a:prstGeom prst="rect">
             <a:avLst/>
@@ -445,7 +445,7 @@
       </p:sp>
       <p:sp>
         <p:nvSpPr>
-          <p:cNvPr id="68" name="PlaceHolder 2"/>
+          <p:cNvPr id="69" name="PlaceHolder 2"/>
           <p:cNvSpPr>
             <a:spLocks noGrp="1"/>
           </p:cNvSpPr>
@@ -456,7 +456,7 @@
         <p:spPr>
           <a:xfrm>
             <a:off x="777240" y="4777560"/>
-            <a:ext cx="6217200" cy="4525560"/>
+            <a:ext cx="6216840" cy="4525200"/>
           </a:xfrm>
           <a:prstGeom prst="rect">
             <a:avLst/>
@@ -549,7 +549,7 @@
       </p:grpSpPr>
       <p:sp>
         <p:nvSpPr>
-          <p:cNvPr id="69" name="PlaceHolder 1"/>
+          <p:cNvPr id="70" name="PlaceHolder 1"/>
           <p:cNvSpPr>
             <a:spLocks noGrp="1"/>
           </p:cNvSpPr>
@@ -560,7 +560,7 @@
         <p:spPr>
           <a:xfrm>
             <a:off x="533520" y="764280"/>
-            <a:ext cx="6704280" cy="3771000"/>
+            <a:ext cx="6703920" cy="3770640"/>
           </a:xfrm>
           <a:prstGeom prst="rect">
             <a:avLst/>
@@ -572,7 +572,7 @@
       </p:sp>
       <p:sp>
         <p:nvSpPr>
-          <p:cNvPr id="70" name="PlaceHolder 2"/>
+          <p:cNvPr id="71" name="PlaceHolder 2"/>
           <p:cNvSpPr>
             <a:spLocks noGrp="1"/>
           </p:cNvSpPr>
@@ -583,7 +583,7 @@
         <p:spPr>
           <a:xfrm>
             <a:off x="777240" y="4777560"/>
-            <a:ext cx="6217200" cy="4525560"/>
+            <a:ext cx="6216840" cy="4525200"/>
           </a:xfrm>
           <a:prstGeom prst="rect">
             <a:avLst/>
@@ -665,7 +665,7 @@
       </p:grpSpPr>
       <p:sp>
         <p:nvSpPr>
-          <p:cNvPr id="59" name="PlaceHolder 1"/>
+          <p:cNvPr id="60" name="PlaceHolder 1"/>
           <p:cNvSpPr>
             <a:spLocks noGrp="1"/>
           </p:cNvSpPr>
@@ -676,7 +676,7 @@
         <p:spPr>
           <a:xfrm>
             <a:off x="533520" y="764280"/>
-            <a:ext cx="6704280" cy="3771000"/>
+            <a:ext cx="6703920" cy="3770640"/>
           </a:xfrm>
           <a:prstGeom prst="rect">
             <a:avLst/>
@@ -688,7 +688,7 @@
       </p:sp>
       <p:sp>
         <p:nvSpPr>
-          <p:cNvPr id="60" name="PlaceHolder 2"/>
+          <p:cNvPr id="61" name="PlaceHolder 2"/>
           <p:cNvSpPr>
             <a:spLocks noGrp="1"/>
           </p:cNvSpPr>
@@ -699,7 +699,7 @@
         <p:spPr>
           <a:xfrm>
             <a:off x="777240" y="4777560"/>
-            <a:ext cx="6217200" cy="4525560"/>
+            <a:ext cx="6216840" cy="4525200"/>
           </a:xfrm>
           <a:prstGeom prst="rect">
             <a:avLst/>
@@ -781,7 +781,7 @@
       </p:grpSpPr>
       <p:sp>
         <p:nvSpPr>
-          <p:cNvPr id="61" name="PlaceHolder 1"/>
+          <p:cNvPr id="62" name="PlaceHolder 1"/>
           <p:cNvSpPr>
             <a:spLocks noGrp="1"/>
           </p:cNvSpPr>
@@ -792,7 +792,7 @@
         <p:spPr>
           <a:xfrm>
             <a:off x="1440" y="0"/>
-            <a:ext cx="0" cy="360"/>
+            <a:ext cx="0" cy="0"/>
           </a:xfrm>
           <a:prstGeom prst="rect">
             <a:avLst/>
@@ -804,7 +804,7 @@
       </p:sp>
       <p:sp>
         <p:nvSpPr>
-          <p:cNvPr id="62" name="PlaceHolder 2"/>
+          <p:cNvPr id="63" name="PlaceHolder 2"/>
           <p:cNvSpPr>
             <a:spLocks noGrp="1"/>
           </p:cNvSpPr>
@@ -815,7 +815,7 @@
         <p:spPr>
           <a:xfrm>
             <a:off x="777240" y="4777560"/>
-            <a:ext cx="6217200" cy="4525560"/>
+            <a:ext cx="6216840" cy="4525200"/>
           </a:xfrm>
           <a:prstGeom prst="rect">
             <a:avLst/>
@@ -897,7 +897,7 @@
       </p:grpSpPr>
       <p:sp>
         <p:nvSpPr>
-          <p:cNvPr id="63" name="PlaceHolder 1"/>
+          <p:cNvPr id="64" name="PlaceHolder 1"/>
           <p:cNvSpPr>
             <a:spLocks noGrp="1"/>
           </p:cNvSpPr>
@@ -907,8 +907,8 @@
         </p:nvSpPr>
         <p:spPr>
           <a:xfrm>
-            <a:off x="1440" y="0"/>
-            <a:ext cx="0" cy="360"/>
+            <a:off x="1080" y="-360"/>
+            <a:ext cx="720" cy="720"/>
           </a:xfrm>
           <a:prstGeom prst="rect">
             <a:avLst/>
@@ -920,7 +920,7 @@
       </p:sp>
       <p:sp>
         <p:nvSpPr>
-          <p:cNvPr id="64" name="PlaceHolder 2"/>
+          <p:cNvPr id="65" name="PlaceHolder 2"/>
           <p:cNvSpPr>
             <a:spLocks noGrp="1"/>
           </p:cNvSpPr>
@@ -931,7 +931,7 @@
         <p:spPr>
           <a:xfrm>
             <a:off x="777240" y="4777560"/>
-            <a:ext cx="6217200" cy="4525560"/>
+            <a:ext cx="6216840" cy="4525200"/>
           </a:xfrm>
           <a:prstGeom prst="rect">
             <a:avLst/>
@@ -1013,7 +1013,7 @@
       </p:grpSpPr>
       <p:sp>
         <p:nvSpPr>
-          <p:cNvPr id="65" name="PlaceHolder 1"/>
+          <p:cNvPr id="66" name="PlaceHolder 1"/>
           <p:cNvSpPr>
             <a:spLocks noGrp="1"/>
           </p:cNvSpPr>
@@ -1024,7 +1024,7 @@
         <p:spPr>
           <a:xfrm>
             <a:off x="1440" y="0"/>
-            <a:ext cx="0" cy="360"/>
+            <a:ext cx="0" cy="0"/>
           </a:xfrm>
           <a:prstGeom prst="rect">
             <a:avLst/>
@@ -1036,7 +1036,7 @@
       </p:sp>
       <p:sp>
         <p:nvSpPr>
-          <p:cNvPr id="66" name="PlaceHolder 2"/>
+          <p:cNvPr id="67" name="PlaceHolder 2"/>
           <p:cNvSpPr>
             <a:spLocks noGrp="1"/>
           </p:cNvSpPr>
@@ -1047,7 +1047,7 @@
         <p:spPr>
           <a:xfrm>
             <a:off x="777240" y="4777560"/>
-            <a:ext cx="6217200" cy="4525560"/>
+            <a:ext cx="6216840" cy="4525200"/>
           </a:xfrm>
           <a:prstGeom prst="rect">
             <a:avLst/>
@@ -1140,7 +1140,7 @@
         <p:spPr>
           <a:xfrm>
             <a:off x="504000" y="363600"/>
-            <a:ext cx="9070920" cy="670680"/>
+            <a:ext cx="9070560" cy="670680"/>
           </a:xfrm>
           <a:prstGeom prst="rect">
             <a:avLst/>
@@ -1218,7 +1218,7 @@
         <p:spPr>
           <a:xfrm>
             <a:off x="3447360" y="5165280"/>
-            <a:ext cx="3194280" cy="389880"/>
+            <a:ext cx="3193920" cy="389520"/>
           </a:xfrm>
           <a:prstGeom prst="rect">
             <a:avLst/>
@@ -1296,7 +1296,7 @@
         <p:spPr>
           <a:xfrm>
             <a:off x="7227360" y="5165280"/>
-            <a:ext cx="2347560" cy="389880"/>
+            <a:ext cx="2347200" cy="389520"/>
           </a:xfrm>
           <a:prstGeom prst="rect">
             <a:avLst/>
@@ -1339,7 +1339,7 @@
                 <a:tab pos="0" algn="l"/>
               </a:tabLst>
             </a:pPr>
-            <a:fld id="{A83DF1E2-8919-43A2-B0E6-7C7055457AF7}" type="slidenum">
+            <a:fld id="{09EDB798-F729-414A-84CA-99191690887C}" type="slidenum">
               <a:rPr lang="en-US" sz="1400" b="0" u="none" strike="noStrike">
                 <a:solidFill>
                   <a:srgbClr val="000000"/>
@@ -1348,7 +1348,7 @@
                 <a:uFillTx/>
                 <a:latin typeface="Times New Roman"/>
               </a:rPr>
-              <a:t>9</a:t>
+              <a:t>4</a:t>
             </a:fld>
             <a:endParaRPr lang="en-US" sz="1400" b="0" u="none" strike="noStrike">
               <a:solidFill>
@@ -1374,7 +1374,7 @@
         <p:spPr>
           <a:xfrm>
             <a:off x="504000" y="5165280"/>
-            <a:ext cx="2347560" cy="389880"/>
+            <a:ext cx="2347200" cy="389520"/>
           </a:xfrm>
           <a:prstGeom prst="rect">
             <a:avLst/>
@@ -1474,7 +1474,7 @@
         <p:spPr>
           <a:xfrm>
             <a:off x="504000" y="363600"/>
-            <a:ext cx="9070920" cy="670680"/>
+            <a:ext cx="9070560" cy="670680"/>
           </a:xfrm>
           <a:prstGeom prst="rect">
             <a:avLst/>
@@ -1552,7 +1552,7 @@
         <p:spPr>
           <a:xfrm>
             <a:off x="3447360" y="5165280"/>
-            <a:ext cx="3194280" cy="389880"/>
+            <a:ext cx="3193920" cy="389520"/>
           </a:xfrm>
           <a:prstGeom prst="rect">
             <a:avLst/>
@@ -1630,7 +1630,7 @@
         <p:spPr>
           <a:xfrm>
             <a:off x="7227360" y="5165280"/>
-            <a:ext cx="2347560" cy="389880"/>
+            <a:ext cx="2347200" cy="389520"/>
           </a:xfrm>
           <a:prstGeom prst="rect">
             <a:avLst/>
@@ -1673,7 +1673,7 @@
                 <a:tab pos="0" algn="l"/>
               </a:tabLst>
             </a:pPr>
-            <a:fld id="{A97D7B57-019E-4E25-B7A3-8AEB6DFA5286}" type="slidenum">
+            <a:fld id="{4DD505D0-338F-47E2-9641-22A9D9EBC6B7}" type="slidenum">
               <a:rPr lang="en-US" sz="1400" b="0" u="none" strike="noStrike">
                 <a:solidFill>
                   <a:srgbClr val="000000"/>
@@ -1682,7 +1682,7 @@
                 <a:uFillTx/>
                 <a:latin typeface="Times New Roman"/>
               </a:rPr>
-              <a:t>9</a:t>
+              <a:t>4</a:t>
             </a:fld>
             <a:endParaRPr lang="en-US" sz="1400" b="0" u="none" strike="noStrike">
               <a:solidFill>
@@ -1708,7 +1708,7 @@
         <p:spPr>
           <a:xfrm>
             <a:off x="504000" y="5165280"/>
-            <a:ext cx="2347560" cy="389880"/>
+            <a:ext cx="2347200" cy="389520"/>
           </a:xfrm>
           <a:prstGeom prst="rect">
             <a:avLst/>
@@ -1769,6 +1769,394 @@
               <a:effectLst/>
               <a:uFillTx/>
               <a:latin typeface="Times New Roman"/>
+            </a:endParaRPr>
+          </a:p>
+        </p:txBody>
+      </p:sp>
+      <p:sp>
+        <p:nvSpPr>
+          <p:cNvPr id="10" name="PlaceHolder 5"/>
+          <p:cNvSpPr>
+            <a:spLocks noGrp="1"/>
+          </p:cNvSpPr>
+          <p:nvPr>
+            <p:ph type="body"/>
+          </p:nvPr>
+        </p:nvSpPr>
+        <p:spPr>
+          <a:xfrm>
+            <a:off x="504000" y="1326600"/>
+            <a:ext cx="9072000" cy="3288600"/>
+          </a:xfrm>
+          <a:prstGeom prst="rect">
+            <a:avLst/>
+          </a:prstGeom>
+          <a:noFill/>
+          <a:ln w="0">
+            <a:noFill/>
+          </a:ln>
+        </p:spPr>
+        <p:txBody>
+          <a:bodyPr lIns="0" tIns="0" rIns="0" bIns="0" anchor="t">
+            <a:normAutofit/>
+          </a:bodyPr>
+          <a:lstStyle>
+            <a:lvl1pPr algn="l">
+              <a:spcBef>
+                <a:spcPts val="1417"/>
+              </a:spcBef>
+              <a:buClr>
+                <a:srgbClr val="000000"/>
+              </a:buClr>
+              <a:buSzPct val="45000"/>
+              <a:buFont typeface="Wingdings" charset="2"/>
+              <a:buChar char=""/>
+              <a:defRPr lang="en-US" sz="3200" b="0" u="none" strike="noStrike">
+                <a:solidFill>
+                  <a:srgbClr val="000000"/>
+                </a:solidFill>
+                <a:effectLst/>
+                <a:uFillTx/>
+                <a:latin typeface="Arial"/>
+              </a:defRPr>
+            </a:lvl1pPr>
+            <a:lvl2pPr lvl="1" algn="l">
+              <a:spcBef>
+                <a:spcPts val="1134"/>
+              </a:spcBef>
+              <a:buClr>
+                <a:srgbClr val="000000"/>
+              </a:buClr>
+              <a:buSzPct val="75000"/>
+              <a:buFont typeface="Symbol" charset="2"/>
+              <a:buChar char=""/>
+              <a:defRPr lang="en-US" sz="2800" b="0" u="none" strike="noStrike">
+                <a:solidFill>
+                  <a:srgbClr val="000000"/>
+                </a:solidFill>
+                <a:effectLst/>
+                <a:uFillTx/>
+                <a:latin typeface="Arial"/>
+              </a:defRPr>
+            </a:lvl2pPr>
+            <a:lvl3pPr lvl="2" algn="l">
+              <a:spcBef>
+                <a:spcPts val="850"/>
+              </a:spcBef>
+              <a:buClr>
+                <a:srgbClr val="000000"/>
+              </a:buClr>
+              <a:buSzPct val="45000"/>
+              <a:buFont typeface="Wingdings" charset="2"/>
+              <a:buChar char=""/>
+              <a:defRPr lang="en-US" sz="2400" b="0" u="none" strike="noStrike">
+                <a:solidFill>
+                  <a:srgbClr val="000000"/>
+                </a:solidFill>
+                <a:effectLst/>
+                <a:uFillTx/>
+                <a:latin typeface="Arial"/>
+              </a:defRPr>
+            </a:lvl3pPr>
+            <a:lvl4pPr lvl="3" algn="l">
+              <a:spcBef>
+                <a:spcPts val="567"/>
+              </a:spcBef>
+              <a:buClr>
+                <a:srgbClr val="000000"/>
+              </a:buClr>
+              <a:buSzPct val="75000"/>
+              <a:buFont typeface="Symbol" charset="2"/>
+              <a:buChar char=""/>
+              <a:defRPr lang="en-US" sz="2000" b="0" u="none" strike="noStrike">
+                <a:solidFill>
+                  <a:srgbClr val="000000"/>
+                </a:solidFill>
+                <a:effectLst/>
+                <a:uFillTx/>
+                <a:latin typeface="Arial"/>
+              </a:defRPr>
+            </a:lvl4pPr>
+            <a:lvl5pPr lvl="4" algn="l">
+              <a:spcBef>
+                <a:spcPts val="283"/>
+              </a:spcBef>
+              <a:buClr>
+                <a:srgbClr val="000000"/>
+              </a:buClr>
+              <a:buSzPct val="45000"/>
+              <a:buFont typeface="Wingdings" charset="2"/>
+              <a:buChar char=""/>
+              <a:defRPr lang="en-US" sz="2000" b="0" u="none" strike="noStrike">
+                <a:solidFill>
+                  <a:srgbClr val="000000"/>
+                </a:solidFill>
+                <a:effectLst/>
+                <a:uFillTx/>
+                <a:latin typeface="Arial"/>
+              </a:defRPr>
+            </a:lvl5pPr>
+            <a:lvl6pPr lvl="5" algn="l">
+              <a:spcBef>
+                <a:spcPts val="283"/>
+              </a:spcBef>
+              <a:buClr>
+                <a:srgbClr val="000000"/>
+              </a:buClr>
+              <a:buSzPct val="45000"/>
+              <a:buFont typeface="Wingdings" charset="2"/>
+              <a:buChar char=""/>
+              <a:defRPr lang="en-US" sz="2000" b="0" u="none" strike="noStrike">
+                <a:solidFill>
+                  <a:srgbClr val="000000"/>
+                </a:solidFill>
+                <a:effectLst/>
+                <a:uFillTx/>
+                <a:latin typeface="Arial"/>
+              </a:defRPr>
+            </a:lvl6pPr>
+            <a:lvl7pPr lvl="6" algn="l">
+              <a:spcBef>
+                <a:spcPts val="283"/>
+              </a:spcBef>
+              <a:buClr>
+                <a:srgbClr val="000000"/>
+              </a:buClr>
+              <a:buSzPct val="45000"/>
+              <a:buFont typeface="Wingdings" charset="2"/>
+              <a:buChar char=""/>
+              <a:defRPr lang="en-US" sz="2000" b="0" u="none" strike="noStrike">
+                <a:solidFill>
+                  <a:srgbClr val="000000"/>
+                </a:solidFill>
+                <a:effectLst/>
+                <a:uFillTx/>
+                <a:latin typeface="Arial"/>
+              </a:defRPr>
+            </a:lvl7pPr>
+          </a:lstStyle>
+          <a:p>
+            <a:pPr marL="432000" indent="-324000" algn="l">
+              <a:spcBef>
+                <a:spcPts val="1417"/>
+              </a:spcBef>
+              <a:buClr>
+                <a:srgbClr val="000000"/>
+              </a:buClr>
+              <a:buSzPct val="45000"/>
+              <a:buFont typeface="Wingdings" charset="2"/>
+              <a:buChar char=""/>
+            </a:pPr>
+            <a:r>
+              <a:rPr lang="en-US" sz="3200" b="0" u="none" strike="noStrike">
+                <a:solidFill>
+                  <a:srgbClr val="000000"/>
+                </a:solidFill>
+                <a:effectLst/>
+                <a:uFillTx/>
+                <a:latin typeface="Arial"/>
+              </a:rPr>
+              <a:t>Click to edit the outline text format</a:t>
+            </a:r>
+            <a:endParaRPr lang="en-US" sz="3200" b="0" u="none" strike="noStrike">
+              <a:solidFill>
+                <a:srgbClr val="000000"/>
+              </a:solidFill>
+              <a:effectLst/>
+              <a:uFillTx/>
+              <a:latin typeface="Arial"/>
+            </a:endParaRPr>
+          </a:p>
+          <a:p>
+            <a:pPr marL="864000" lvl="1" indent="-324000" algn="l">
+              <a:spcBef>
+                <a:spcPts val="1134"/>
+              </a:spcBef>
+              <a:buClr>
+                <a:srgbClr val="000000"/>
+              </a:buClr>
+              <a:buSzPct val="75000"/>
+              <a:buFont typeface="Symbol" charset="2"/>
+              <a:buChar char=""/>
+            </a:pPr>
+            <a:r>
+              <a:rPr lang="en-US" sz="2800" b="0" u="none" strike="noStrike">
+                <a:solidFill>
+                  <a:srgbClr val="000000"/>
+                </a:solidFill>
+                <a:effectLst/>
+                <a:uFillTx/>
+                <a:latin typeface="Arial"/>
+              </a:rPr>
+              <a:t>Second Outline Level</a:t>
+            </a:r>
+            <a:endParaRPr lang="en-US" sz="2800" b="0" u="none" strike="noStrike">
+              <a:solidFill>
+                <a:srgbClr val="000000"/>
+              </a:solidFill>
+              <a:effectLst/>
+              <a:uFillTx/>
+              <a:latin typeface="Arial"/>
+            </a:endParaRPr>
+          </a:p>
+          <a:p>
+            <a:pPr marL="1296000" lvl="2" indent="-288000" algn="l">
+              <a:spcBef>
+                <a:spcPts val="850"/>
+              </a:spcBef>
+              <a:buClr>
+                <a:srgbClr val="000000"/>
+              </a:buClr>
+              <a:buSzPct val="45000"/>
+              <a:buFont typeface="Wingdings" charset="2"/>
+              <a:buChar char=""/>
+            </a:pPr>
+            <a:r>
+              <a:rPr lang="en-US" sz="2400" b="0" u="none" strike="noStrike">
+                <a:solidFill>
+                  <a:srgbClr val="000000"/>
+                </a:solidFill>
+                <a:effectLst/>
+                <a:uFillTx/>
+                <a:latin typeface="Arial"/>
+              </a:rPr>
+              <a:t>Third Outline Level</a:t>
+            </a:r>
+            <a:endParaRPr lang="en-US" sz="2400" b="0" u="none" strike="noStrike">
+              <a:solidFill>
+                <a:srgbClr val="000000"/>
+              </a:solidFill>
+              <a:effectLst/>
+              <a:uFillTx/>
+              <a:latin typeface="Arial"/>
+            </a:endParaRPr>
+          </a:p>
+          <a:p>
+            <a:pPr marL="1728000" lvl="3" indent="-216000" algn="l">
+              <a:spcBef>
+                <a:spcPts val="567"/>
+              </a:spcBef>
+              <a:buClr>
+                <a:srgbClr val="000000"/>
+              </a:buClr>
+              <a:buSzPct val="75000"/>
+              <a:buFont typeface="Symbol" charset="2"/>
+              <a:buChar char=""/>
+            </a:pPr>
+            <a:r>
+              <a:rPr lang="en-US" sz="2000" b="0" u="none" strike="noStrike">
+                <a:solidFill>
+                  <a:srgbClr val="000000"/>
+                </a:solidFill>
+                <a:effectLst/>
+                <a:uFillTx/>
+                <a:latin typeface="Arial"/>
+              </a:rPr>
+              <a:t>Fourth Outline Level</a:t>
+            </a:r>
+            <a:endParaRPr lang="en-US" sz="2000" b="0" u="none" strike="noStrike">
+              <a:solidFill>
+                <a:srgbClr val="000000"/>
+              </a:solidFill>
+              <a:effectLst/>
+              <a:uFillTx/>
+              <a:latin typeface="Arial"/>
+            </a:endParaRPr>
+          </a:p>
+          <a:p>
+            <a:pPr marL="2160000" lvl="4" indent="-216000" algn="l">
+              <a:spcBef>
+                <a:spcPts val="283"/>
+              </a:spcBef>
+              <a:buClr>
+                <a:srgbClr val="000000"/>
+              </a:buClr>
+              <a:buSzPct val="45000"/>
+              <a:buFont typeface="Wingdings" charset="2"/>
+              <a:buChar char=""/>
+            </a:pPr>
+            <a:r>
+              <a:rPr lang="en-US" sz="2000" b="0" u="none" strike="noStrike">
+                <a:solidFill>
+                  <a:srgbClr val="000000"/>
+                </a:solidFill>
+                <a:effectLst/>
+                <a:uFillTx/>
+                <a:latin typeface="Arial"/>
+              </a:rPr>
+              <a:t>Fifth Outline Level</a:t>
+            </a:r>
+            <a:endParaRPr lang="en-US" sz="2000" b="0" u="none" strike="noStrike">
+              <a:solidFill>
+                <a:srgbClr val="000000"/>
+              </a:solidFill>
+              <a:effectLst/>
+              <a:uFillTx/>
+              <a:latin typeface="Arial"/>
+            </a:endParaRPr>
+          </a:p>
+          <a:p>
+            <a:pPr marL="2592000" lvl="5" indent="-216000" algn="l">
+              <a:spcBef>
+                <a:spcPts val="283"/>
+              </a:spcBef>
+              <a:buClr>
+                <a:srgbClr val="000000"/>
+              </a:buClr>
+              <a:buSzPct val="45000"/>
+              <a:buFont typeface="Wingdings" charset="2"/>
+              <a:buChar char=""/>
+            </a:pPr>
+            <a:r>
+              <a:rPr lang="en-US" sz="2000" b="0" u="none" strike="noStrike">
+                <a:solidFill>
+                  <a:srgbClr val="000000"/>
+                </a:solidFill>
+                <a:effectLst/>
+                <a:uFillTx/>
+                <a:latin typeface="Arial"/>
+              </a:rPr>
+              <a:t>Sixth Outline Level</a:t>
+            </a:r>
+            <a:endParaRPr lang="en-US" sz="2000" b="0" u="none" strike="noStrike">
+              <a:solidFill>
+                <a:srgbClr val="000000"/>
+              </a:solidFill>
+              <a:effectLst/>
+              <a:uFillTx/>
+              <a:latin typeface="Arial"/>
+            </a:endParaRPr>
+          </a:p>
+          <a:p>
+            <a:pPr marL="3024000" lvl="6" indent="-216000" algn="l">
+              <a:spcBef>
+                <a:spcPts val="283"/>
+              </a:spcBef>
+              <a:buClr>
+                <a:srgbClr val="000000"/>
+              </a:buClr>
+              <a:buSzPct val="45000"/>
+              <a:buFont typeface="Wingdings" charset="2"/>
+              <a:buChar char=""/>
+            </a:pPr>
+            <a:r>
+              <a:rPr lang="en-US" sz="2000" b="0" u="none" strike="noStrike">
+                <a:solidFill>
+                  <a:srgbClr val="000000"/>
+                </a:solidFill>
+                <a:effectLst/>
+                <a:uFillTx/>
+                <a:latin typeface="Arial"/>
+              </a:rPr>
+              <a:t>Seventh Outline Level</a:t>
+            </a:r>
+            <a:endParaRPr lang="en-US" sz="2000" b="0" u="none" strike="noStrike">
+              <a:solidFill>
+                <a:srgbClr val="000000"/>
+              </a:solidFill>
+              <a:effectLst/>
+              <a:uFillTx/>
+              <a:latin typeface="Arial"/>
             </a:endParaRPr>
           </a:p>
         </p:txBody>
@@ -1797,7 +2185,7 @@
       </p:grpSpPr>
       <p:sp>
         <p:nvSpPr>
-          <p:cNvPr id="10" name="PlaceHolder 1"/>
+          <p:cNvPr id="11" name="PlaceHolder 1"/>
           <p:cNvSpPr>
             <a:spLocks noGrp="1"/>
           </p:cNvSpPr>
@@ -1808,7 +2196,7 @@
         <p:spPr>
           <a:xfrm>
             <a:off x="504000" y="363600"/>
-            <a:ext cx="9070920" cy="670680"/>
+            <a:ext cx="9070560" cy="670680"/>
           </a:xfrm>
           <a:prstGeom prst="rect">
             <a:avLst/>
@@ -1875,7 +2263,7 @@
       </p:sp>
       <p:sp>
         <p:nvSpPr>
-          <p:cNvPr id="11" name="PlaceHolder 2"/>
+          <p:cNvPr id="12" name="PlaceHolder 2"/>
           <p:cNvSpPr>
             <a:spLocks noGrp="1"/>
           </p:cNvSpPr>
@@ -1886,7 +2274,7 @@
         <p:spPr>
           <a:xfrm>
             <a:off x="504000" y="1326600"/>
-            <a:ext cx="9070920" cy="3287520"/>
+            <a:ext cx="9070560" cy="3287160"/>
           </a:xfrm>
           <a:prstGeom prst="rect">
             <a:avLst/>
@@ -2305,7 +2693,7 @@
       </p:sp>
       <p:sp>
         <p:nvSpPr>
-          <p:cNvPr id="12" name="PlaceHolder 3"/>
+          <p:cNvPr id="13" name="PlaceHolder 3"/>
           <p:cNvSpPr>
             <a:spLocks noGrp="1"/>
           </p:cNvSpPr>
@@ -2316,7 +2704,7 @@
         <p:spPr>
           <a:xfrm>
             <a:off x="3447360" y="5165280"/>
-            <a:ext cx="3194280" cy="389880"/>
+            <a:ext cx="3193920" cy="389520"/>
           </a:xfrm>
           <a:prstGeom prst="rect">
             <a:avLst/>
@@ -2383,7 +2771,7 @@
       </p:sp>
       <p:sp>
         <p:nvSpPr>
-          <p:cNvPr id="13" name="PlaceHolder 4"/>
+          <p:cNvPr id="14" name="PlaceHolder 4"/>
           <p:cNvSpPr>
             <a:spLocks noGrp="1"/>
           </p:cNvSpPr>
@@ -2394,7 +2782,7 @@
         <p:spPr>
           <a:xfrm>
             <a:off x="7227360" y="5165280"/>
-            <a:ext cx="2347560" cy="389880"/>
+            <a:ext cx="2347200" cy="389520"/>
           </a:xfrm>
           <a:prstGeom prst="rect">
             <a:avLst/>
@@ -2437,7 +2825,7 @@
                 <a:tab pos="0" algn="l"/>
               </a:tabLst>
             </a:pPr>
-            <a:fld id="{AB04D1C3-D0CB-439B-82F7-E69F2F221701}" type="slidenum">
+            <a:fld id="{38492CA7-CFF8-42D3-AA70-9EFEC8C5F13D}" type="slidenum">
               <a:rPr lang="en-US" sz="1400" b="0" u="none" strike="noStrike">
                 <a:solidFill>
                   <a:srgbClr val="000000"/>
@@ -2461,7 +2849,7 @@
       </p:sp>
       <p:sp>
         <p:nvSpPr>
-          <p:cNvPr id="14" name="PlaceHolder 5"/>
+          <p:cNvPr id="15" name="PlaceHolder 5"/>
           <p:cNvSpPr>
             <a:spLocks noGrp="1"/>
           </p:cNvSpPr>
@@ -2472,7 +2860,7 @@
         <p:spPr>
           <a:xfrm>
             <a:off x="504000" y="5165280"/>
-            <a:ext cx="2347560" cy="389880"/>
+            <a:ext cx="2347200" cy="389520"/>
           </a:xfrm>
           <a:prstGeom prst="rect">
             <a:avLst/>
@@ -2561,7 +2949,7 @@
       </p:grpSpPr>
       <p:sp>
         <p:nvSpPr>
-          <p:cNvPr id="15" name="PlaceHolder 1"/>
+          <p:cNvPr id="16" name="PlaceHolder 1"/>
           <p:cNvSpPr>
             <a:spLocks noGrp="1"/>
           </p:cNvSpPr>
@@ -2572,7 +2960,7 @@
         <p:spPr>
           <a:xfrm>
             <a:off x="504000" y="363600"/>
-            <a:ext cx="9070920" cy="670680"/>
+            <a:ext cx="9070560" cy="670680"/>
           </a:xfrm>
           <a:prstGeom prst="rect">
             <a:avLst/>
@@ -2639,7 +3027,7 @@
       </p:sp>
       <p:sp>
         <p:nvSpPr>
-          <p:cNvPr id="16" name="PlaceHolder 2"/>
+          <p:cNvPr id="17" name="PlaceHolder 2"/>
           <p:cNvSpPr>
             <a:spLocks noGrp="1"/>
           </p:cNvSpPr>
@@ -2650,7 +3038,7 @@
         <p:spPr>
           <a:xfrm>
             <a:off x="3447360" y="5165280"/>
-            <a:ext cx="3194280" cy="389880"/>
+            <a:ext cx="3193920" cy="389520"/>
           </a:xfrm>
           <a:prstGeom prst="rect">
             <a:avLst/>
@@ -2717,7 +3105,7 @@
       </p:sp>
       <p:sp>
         <p:nvSpPr>
-          <p:cNvPr id="17" name="PlaceHolder 3"/>
+          <p:cNvPr id="18" name="PlaceHolder 3"/>
           <p:cNvSpPr>
             <a:spLocks noGrp="1"/>
           </p:cNvSpPr>
@@ -2728,7 +3116,7 @@
         <p:spPr>
           <a:xfrm>
             <a:off x="7227360" y="5165280"/>
-            <a:ext cx="2347560" cy="389880"/>
+            <a:ext cx="2347200" cy="389520"/>
           </a:xfrm>
           <a:prstGeom prst="rect">
             <a:avLst/>
@@ -2771,7 +3159,7 @@
                 <a:tab pos="0" algn="l"/>
               </a:tabLst>
             </a:pPr>
-            <a:fld id="{5DC227F2-E278-49C2-92FD-A960C63B9901}" type="slidenum">
+            <a:fld id="{ADA58BED-3A25-4E61-848B-7085ADE4C18B}" type="slidenum">
               <a:rPr lang="en-US" sz="1400" b="0" u="none" strike="noStrike">
                 <a:solidFill>
                   <a:srgbClr val="000000"/>
@@ -2795,7 +3183,7 @@
       </p:sp>
       <p:sp>
         <p:nvSpPr>
-          <p:cNvPr id="18" name="PlaceHolder 4"/>
+          <p:cNvPr id="19" name="PlaceHolder 4"/>
           <p:cNvSpPr>
             <a:spLocks noGrp="1"/>
           </p:cNvSpPr>
@@ -2806,7 +3194,7 @@
         <p:spPr>
           <a:xfrm>
             <a:off x="504000" y="5165280"/>
-            <a:ext cx="2347560" cy="389880"/>
+            <a:ext cx="2347200" cy="389520"/>
           </a:xfrm>
           <a:prstGeom prst="rect">
             <a:avLst/>
@@ -2873,7 +3261,7 @@
       </p:sp>
       <p:sp>
         <p:nvSpPr>
-          <p:cNvPr id="19" name="PlaceHolder 5"/>
+          <p:cNvPr id="20" name="PlaceHolder 5"/>
           <p:cNvSpPr>
             <a:spLocks noGrp="1"/>
           </p:cNvSpPr>
@@ -2884,7 +3272,7 @@
         <p:spPr>
           <a:xfrm>
             <a:off x="504000" y="1326600"/>
-            <a:ext cx="9071640" cy="3288240"/>
+            <a:ext cx="9071280" cy="3287880"/>
           </a:xfrm>
           <a:prstGeom prst="rect">
             <a:avLst/>
@@ -3325,7 +3713,7 @@
       </p:grpSpPr>
       <p:sp>
         <p:nvSpPr>
-          <p:cNvPr id="20" name="PlaceHolder 1"/>
+          <p:cNvPr id="21" name="PlaceHolder 1"/>
           <p:cNvSpPr>
             <a:spLocks noGrp="1"/>
           </p:cNvSpPr>
@@ -3336,7 +3724,7 @@
         <p:spPr>
           <a:xfrm>
             <a:off x="504000" y="363600"/>
-            <a:ext cx="9070920" cy="670680"/>
+            <a:ext cx="9070560" cy="670680"/>
           </a:xfrm>
           <a:prstGeom prst="rect">
             <a:avLst/>
@@ -3403,7 +3791,7 @@
       </p:sp>
       <p:sp>
         <p:nvSpPr>
-          <p:cNvPr id="21" name="PlaceHolder 2"/>
+          <p:cNvPr id="22" name="PlaceHolder 2"/>
           <p:cNvSpPr>
             <a:spLocks noGrp="1"/>
           </p:cNvSpPr>
@@ -3414,7 +3802,7 @@
         <p:spPr>
           <a:xfrm>
             <a:off x="3447360" y="5165280"/>
-            <a:ext cx="3194280" cy="389880"/>
+            <a:ext cx="3193920" cy="389520"/>
           </a:xfrm>
           <a:prstGeom prst="rect">
             <a:avLst/>
@@ -3481,7 +3869,7 @@
       </p:sp>
       <p:sp>
         <p:nvSpPr>
-          <p:cNvPr id="22" name="PlaceHolder 3"/>
+          <p:cNvPr id="23" name="PlaceHolder 3"/>
           <p:cNvSpPr>
             <a:spLocks noGrp="1"/>
           </p:cNvSpPr>
@@ -3492,7 +3880,7 @@
         <p:spPr>
           <a:xfrm>
             <a:off x="7227360" y="5165280"/>
-            <a:ext cx="2347560" cy="389880"/>
+            <a:ext cx="2347200" cy="389520"/>
           </a:xfrm>
           <a:prstGeom prst="rect">
             <a:avLst/>
@@ -3535,7 +3923,7 @@
                 <a:tab pos="0" algn="l"/>
               </a:tabLst>
             </a:pPr>
-            <a:fld id="{4B4F8AD4-3B4C-4651-967A-8113D4F3848C}" type="slidenum">
+            <a:fld id="{8BA798A0-5038-447C-9F3C-11CBD2006A98}" type="slidenum">
               <a:rPr lang="en-US" sz="1400" b="0" u="none" strike="noStrike">
                 <a:solidFill>
                   <a:srgbClr val="000000"/>
@@ -3559,7 +3947,7 @@
       </p:sp>
       <p:sp>
         <p:nvSpPr>
-          <p:cNvPr id="23" name="PlaceHolder 4"/>
+          <p:cNvPr id="24" name="PlaceHolder 4"/>
           <p:cNvSpPr>
             <a:spLocks noGrp="1"/>
           </p:cNvSpPr>
@@ -3570,7 +3958,7 @@
         <p:spPr>
           <a:xfrm>
             <a:off x="504000" y="5165280"/>
-            <a:ext cx="2347560" cy="389880"/>
+            <a:ext cx="2347200" cy="389520"/>
           </a:xfrm>
           <a:prstGeom prst="rect">
             <a:avLst/>
@@ -3637,7 +4025,7 @@
       </p:sp>
       <p:sp>
         <p:nvSpPr>
-          <p:cNvPr id="24" name="PlaceHolder 5"/>
+          <p:cNvPr id="25" name="PlaceHolder 5"/>
           <p:cNvSpPr>
             <a:spLocks noGrp="1"/>
           </p:cNvSpPr>
@@ -3648,7 +4036,7 @@
         <p:spPr>
           <a:xfrm>
             <a:off x="504000" y="1326600"/>
-            <a:ext cx="9071640" cy="3288240"/>
+            <a:ext cx="9071280" cy="3287880"/>
           </a:xfrm>
           <a:prstGeom prst="rect">
             <a:avLst/>
@@ -4089,7 +4477,7 @@
       </p:grpSpPr>
       <p:sp>
         <p:nvSpPr>
-          <p:cNvPr id="30" name="PlaceHolder 1"/>
+          <p:cNvPr id="26" name="PlaceHolder 1"/>
           <p:cNvSpPr>
             <a:spLocks noGrp="1"/>
           </p:cNvSpPr>
@@ -4100,7 +4488,7 @@
         <p:spPr>
           <a:xfrm>
             <a:off x="504000" y="363600"/>
-            <a:ext cx="9070920" cy="670680"/>
+            <a:ext cx="9070560" cy="670680"/>
           </a:xfrm>
           <a:prstGeom prst="rect">
             <a:avLst/>
@@ -4167,18 +4555,18 @@
       </p:sp>
       <p:sp>
         <p:nvSpPr>
-          <p:cNvPr id="31" name="PlaceHolder 2"/>
+          <p:cNvPr id="27" name="PlaceHolder 2"/>
           <p:cNvSpPr>
             <a:spLocks noGrp="1"/>
           </p:cNvSpPr>
           <p:nvPr>
-            <p:ph type="ftr" idx="19"/>
+            <p:ph type="ftr" idx="16"/>
           </p:nvPr>
         </p:nvSpPr>
         <p:spPr>
           <a:xfrm>
             <a:off x="3447360" y="5165280"/>
-            <a:ext cx="3194280" cy="389880"/>
+            <a:ext cx="3193920" cy="389520"/>
           </a:xfrm>
           <a:prstGeom prst="rect">
             <a:avLst/>
@@ -4245,18 +4633,18 @@
       </p:sp>
       <p:sp>
         <p:nvSpPr>
-          <p:cNvPr id="32" name="PlaceHolder 3"/>
+          <p:cNvPr id="28" name="PlaceHolder 3"/>
           <p:cNvSpPr>
             <a:spLocks noGrp="1"/>
           </p:cNvSpPr>
           <p:nvPr>
-            <p:ph type="sldNum" idx="20"/>
+            <p:ph type="sldNum" idx="17"/>
           </p:nvPr>
         </p:nvSpPr>
         <p:spPr>
           <a:xfrm>
             <a:off x="7227360" y="5165280"/>
-            <a:ext cx="2347560" cy="389880"/>
+            <a:ext cx="2347200" cy="389520"/>
           </a:xfrm>
           <a:prstGeom prst="rect">
             <a:avLst/>
@@ -4299,7 +4687,7 @@
                 <a:tab pos="0" algn="l"/>
               </a:tabLst>
             </a:pPr>
-            <a:fld id="{36A70A99-1481-4BDD-A767-83B1E7457997}" type="slidenum">
+            <a:fld id="{1374AB70-D094-4909-93AB-46FE30C54923}" type="slidenum">
               <a:rPr lang="en-US" sz="1400" b="0" u="none" strike="noStrike">
                 <a:solidFill>
                   <a:srgbClr val="000000"/>
@@ -4323,18 +4711,18 @@
       </p:sp>
       <p:sp>
         <p:nvSpPr>
-          <p:cNvPr id="33" name="PlaceHolder 4"/>
+          <p:cNvPr id="29" name="PlaceHolder 4"/>
           <p:cNvSpPr>
             <a:spLocks noGrp="1"/>
           </p:cNvSpPr>
           <p:nvPr>
-            <p:ph type="dt" idx="21"/>
+            <p:ph type="dt" idx="18"/>
           </p:nvPr>
         </p:nvSpPr>
         <p:spPr>
           <a:xfrm>
             <a:off x="504000" y="5165280"/>
-            <a:ext cx="2347560" cy="389880"/>
+            <a:ext cx="2347200" cy="389520"/>
           </a:xfrm>
           <a:prstGeom prst="rect">
             <a:avLst/>
@@ -4401,7 +4789,7 @@
       </p:sp>
       <p:sp>
         <p:nvSpPr>
-          <p:cNvPr id="34" name="PlaceHolder 5"/>
+          <p:cNvPr id="30" name="PlaceHolder 5"/>
           <p:cNvSpPr>
             <a:spLocks noGrp="1"/>
           </p:cNvSpPr>
@@ -4412,7 +4800,7 @@
         <p:spPr>
           <a:xfrm>
             <a:off x="504000" y="1326600"/>
-            <a:ext cx="9071640" cy="3288240"/>
+            <a:ext cx="9071280" cy="3287880"/>
           </a:xfrm>
           <a:prstGeom prst="rect">
             <a:avLst/>
@@ -4836,7 +5224,7 @@
 
 <file path=ppt/slideLayouts/slideLayout7.xml><?xml version="1.0" encoding="utf-8"?>
 <p:sldLayout xmlns:a="http://schemas.openxmlformats.org/drawingml/2006/main" xmlns:p="http://schemas.openxmlformats.org/presentationml/2006/main" xmlns:r="http://schemas.openxmlformats.org/officeDocument/2006/relationships" xmlns:p14="http://schemas.microsoft.com/office/powerpoint/2010/main" xmlns:p15="http://schemas.microsoft.com/office/powerpoint/2012/main" xmlns:mc="http://schemas.openxmlformats.org/markup-compatibility/2006" type="title" preserve="1">
-  <p:cSld name="Default 5">
+  <p:cSld name="Default 6">
     <p:spTree>
       <p:nvGrpSpPr>
         <p:cNvPr id="1" name=""/>
@@ -4853,7 +5241,7 @@
       </p:grpSpPr>
       <p:sp>
         <p:nvSpPr>
-          <p:cNvPr id="25" name="PlaceHolder 1"/>
+          <p:cNvPr id="31" name="PlaceHolder 1"/>
           <p:cNvSpPr>
             <a:spLocks noGrp="1"/>
           </p:cNvSpPr>
@@ -4864,7 +5252,7 @@
         <p:spPr>
           <a:xfrm>
             <a:off x="504000" y="363600"/>
-            <a:ext cx="9070920" cy="670680"/>
+            <a:ext cx="9070560" cy="670680"/>
           </a:xfrm>
           <a:prstGeom prst="rect">
             <a:avLst/>
@@ -4931,18 +5319,18 @@
       </p:sp>
       <p:sp>
         <p:nvSpPr>
-          <p:cNvPr id="26" name="PlaceHolder 2"/>
+          <p:cNvPr id="32" name="PlaceHolder 2"/>
           <p:cNvSpPr>
             <a:spLocks noGrp="1"/>
           </p:cNvSpPr>
           <p:nvPr>
-            <p:ph type="ftr" idx="16"/>
+            <p:ph type="ftr" idx="19"/>
           </p:nvPr>
         </p:nvSpPr>
         <p:spPr>
           <a:xfrm>
             <a:off x="3447360" y="5165280"/>
-            <a:ext cx="3194280" cy="389880"/>
+            <a:ext cx="3193920" cy="389520"/>
           </a:xfrm>
           <a:prstGeom prst="rect">
             <a:avLst/>
@@ -5009,18 +5397,18 @@
       </p:sp>
       <p:sp>
         <p:nvSpPr>
-          <p:cNvPr id="27" name="PlaceHolder 3"/>
+          <p:cNvPr id="33" name="PlaceHolder 3"/>
           <p:cNvSpPr>
             <a:spLocks noGrp="1"/>
           </p:cNvSpPr>
           <p:nvPr>
-            <p:ph type="sldNum" idx="17"/>
+            <p:ph type="sldNum" idx="20"/>
           </p:nvPr>
         </p:nvSpPr>
         <p:spPr>
           <a:xfrm>
             <a:off x="7227360" y="5165280"/>
-            <a:ext cx="2347560" cy="389880"/>
+            <a:ext cx="2347200" cy="389520"/>
           </a:xfrm>
           <a:prstGeom prst="rect">
             <a:avLst/>
@@ -5063,7 +5451,7 @@
                 <a:tab pos="0" algn="l"/>
               </a:tabLst>
             </a:pPr>
-            <a:fld id="{5DC9601B-56E8-406A-98B5-7A84A9BB8FE9}" type="slidenum">
+            <a:fld id="{924EFB07-071F-4CB2-A12B-5D580664B0E1}" type="slidenum">
               <a:rPr lang="en-US" sz="1400" b="0" u="none" strike="noStrike">
                 <a:solidFill>
                   <a:srgbClr val="000000"/>
@@ -5087,18 +5475,18 @@
       </p:sp>
       <p:sp>
         <p:nvSpPr>
-          <p:cNvPr id="28" name="PlaceHolder 4"/>
+          <p:cNvPr id="34" name="PlaceHolder 4"/>
           <p:cNvSpPr>
             <a:spLocks noGrp="1"/>
           </p:cNvSpPr>
           <p:nvPr>
-            <p:ph type="dt" idx="18"/>
+            <p:ph type="dt" idx="21"/>
           </p:nvPr>
         </p:nvSpPr>
         <p:spPr>
           <a:xfrm>
             <a:off x="504000" y="5165280"/>
-            <a:ext cx="2347560" cy="389880"/>
+            <a:ext cx="2347200" cy="389520"/>
           </a:xfrm>
           <a:prstGeom prst="rect">
             <a:avLst/>
@@ -5165,7 +5553,7 @@
       </p:sp>
       <p:sp>
         <p:nvSpPr>
-          <p:cNvPr id="29" name="PlaceHolder 5"/>
+          <p:cNvPr id="35" name="PlaceHolder 5"/>
           <p:cNvSpPr>
             <a:spLocks noGrp="1"/>
           </p:cNvSpPr>
@@ -5176,7 +5564,7 @@
         <p:spPr>
           <a:xfrm>
             <a:off x="504000" y="1326600"/>
-            <a:ext cx="9071640" cy="3288240"/>
+            <a:ext cx="9071280" cy="3287880"/>
           </a:xfrm>
           <a:prstGeom prst="rect">
             <a:avLst/>
@@ -5649,7 +6037,7 @@
       </p:grpSpPr>
       <p:sp>
         <p:nvSpPr>
-          <p:cNvPr id="41" name="PlaceHolder 1"/>
+          <p:cNvPr id="42" name="PlaceHolder 1"/>
           <p:cNvSpPr>
             <a:spLocks noGrp="1"/>
           </p:cNvSpPr>
@@ -5659,8 +6047,8 @@
         </p:nvSpPr>
         <p:spPr>
           <a:xfrm>
-            <a:off x="504000" y="1325880"/>
-            <a:ext cx="9070920" cy="3288960"/>
+            <a:off x="504000" y="1325520"/>
+            <a:ext cx="9070560" cy="3289320"/>
           </a:xfrm>
           <a:prstGeom prst="rect">
             <a:avLst/>
@@ -5769,7 +6157,7 @@
       </p:grpSpPr>
       <p:sp>
         <p:nvSpPr>
-          <p:cNvPr id="56" name="PlaceHolder 1"/>
+          <p:cNvPr id="57" name="PlaceHolder 1"/>
           <p:cNvSpPr>
             <a:spLocks noGrp="1"/>
           </p:cNvSpPr>
@@ -5779,8 +6167,8 @@
         </p:nvSpPr>
         <p:spPr>
           <a:xfrm>
-            <a:off x="504000" y="1325880"/>
-            <a:ext cx="9070920" cy="3288960"/>
+            <a:off x="504000" y="1325520"/>
+            <a:ext cx="9070560" cy="3289320"/>
           </a:xfrm>
           <a:prstGeom prst="rect">
             <a:avLst/>
@@ -5861,7 +6249,7 @@
       </p:grpSpPr>
       <p:pic>
         <p:nvPicPr>
-          <p:cNvPr id="57" name=""/>
+          <p:cNvPr id="58" name=""/>
           <p:cNvPicPr/>
           <p:nvPr/>
         </p:nvPicPr>
@@ -5872,7 +6260,7 @@
         <p:spPr>
           <a:xfrm>
             <a:off x="1770120" y="441000"/>
-            <a:ext cx="6991200" cy="4889520"/>
+            <a:ext cx="6990840" cy="4889160"/>
           </a:xfrm>
           <a:prstGeom prst="rect">
             <a:avLst/>
@@ -5915,7 +6303,7 @@
       </p:grpSpPr>
       <p:sp>
         <p:nvSpPr>
-          <p:cNvPr id="58" name="PlaceHolder 1"/>
+          <p:cNvPr id="59" name="PlaceHolder 1"/>
           <p:cNvSpPr>
             <a:spLocks noGrp="1"/>
           </p:cNvSpPr>
@@ -5925,8 +6313,8 @@
         </p:nvSpPr>
         <p:spPr>
           <a:xfrm>
-            <a:off x="504000" y="1325880"/>
-            <a:ext cx="9070920" cy="3288960"/>
+            <a:off x="504000" y="1325520"/>
+            <a:ext cx="9070560" cy="3289320"/>
           </a:xfrm>
           <a:prstGeom prst="rect">
             <a:avLst/>
@@ -6007,7 +6395,7 @@
       </p:grpSpPr>
       <p:sp>
         <p:nvSpPr>
-          <p:cNvPr id="42" name="PlaceHolder 1"/>
+          <p:cNvPr id="43" name="PlaceHolder 1"/>
           <p:cNvSpPr>
             <a:spLocks noGrp="1"/>
           </p:cNvSpPr>
@@ -6017,8 +6405,8 @@
         </p:nvSpPr>
         <p:spPr>
           <a:xfrm>
-            <a:off x="504000" y="1325880"/>
-            <a:ext cx="9070920" cy="3288960"/>
+            <a:off x="504000" y="1325520"/>
+            <a:ext cx="9070560" cy="3289320"/>
           </a:xfrm>
           <a:prstGeom prst="rect">
             <a:avLst/>
@@ -6099,7 +6487,7 @@
       </p:grpSpPr>
       <p:sp>
         <p:nvSpPr>
-          <p:cNvPr id="43" name="PlaceHolder 1"/>
+          <p:cNvPr id="44" name="PlaceHolder 1"/>
           <p:cNvSpPr>
             <a:spLocks noGrp="1"/>
           </p:cNvSpPr>
@@ -6109,8 +6497,8 @@
         </p:nvSpPr>
         <p:spPr>
           <a:xfrm>
-            <a:off x="504000" y="363240"/>
-            <a:ext cx="9070920" cy="671040"/>
+            <a:off x="504000" y="362880"/>
+            <a:ext cx="9070560" cy="671400"/>
           </a:xfrm>
           <a:prstGeom prst="rect">
             <a:avLst/>
@@ -6164,7 +6552,7 @@
       </p:sp>
       <p:pic>
         <p:nvPicPr>
-          <p:cNvPr id="44" name=""/>
+          <p:cNvPr id="45" name=""/>
           <p:cNvPicPr/>
           <p:nvPr/>
         </p:nvPicPr>
@@ -6175,7 +6563,7 @@
         <p:spPr>
           <a:xfrm>
             <a:off x="1935360" y="1257120"/>
-            <a:ext cx="6223320" cy="4056120"/>
+            <a:ext cx="6222960" cy="4055760"/>
           </a:xfrm>
           <a:prstGeom prst="rect">
             <a:avLst/>
@@ -6218,7 +6606,7 @@
       </p:grpSpPr>
       <p:sp>
         <p:nvSpPr>
-          <p:cNvPr id="45" name="PlaceHolder 1"/>
+          <p:cNvPr id="46" name="PlaceHolder 1"/>
           <p:cNvSpPr>
             <a:spLocks noGrp="1"/>
           </p:cNvSpPr>
@@ -6228,8 +6616,8 @@
         </p:nvSpPr>
         <p:spPr>
           <a:xfrm>
-            <a:off x="504000" y="363240"/>
-            <a:ext cx="9070920" cy="671040"/>
+            <a:off x="504000" y="362880"/>
+            <a:ext cx="9070560" cy="671400"/>
           </a:xfrm>
           <a:prstGeom prst="rect">
             <a:avLst/>
@@ -6283,7 +6671,7 @@
       </p:sp>
       <p:pic>
         <p:nvPicPr>
-          <p:cNvPr id="46" name=""/>
+          <p:cNvPr id="47" name=""/>
           <p:cNvPicPr/>
           <p:nvPr/>
         </p:nvPicPr>
@@ -6294,7 +6682,7 @@
         <p:spPr>
           <a:xfrm>
             <a:off x="1868760" y="1172160"/>
-            <a:ext cx="6418080" cy="4320360"/>
+            <a:ext cx="6417720" cy="4320000"/>
           </a:xfrm>
           <a:prstGeom prst="rect">
             <a:avLst/>
@@ -6337,7 +6725,7 @@
       </p:grpSpPr>
       <p:sp>
         <p:nvSpPr>
-          <p:cNvPr id="47" name="PlaceHolder 1"/>
+          <p:cNvPr id="48" name="PlaceHolder 1"/>
           <p:cNvSpPr>
             <a:spLocks noGrp="1"/>
           </p:cNvSpPr>
@@ -6347,8 +6735,8 @@
         </p:nvSpPr>
         <p:spPr>
           <a:xfrm>
-            <a:off x="504000" y="363240"/>
-            <a:ext cx="9070920" cy="671040"/>
+            <a:off x="504000" y="362880"/>
+            <a:ext cx="9070560" cy="671400"/>
           </a:xfrm>
           <a:prstGeom prst="rect">
             <a:avLst/>
@@ -6396,7 +6784,7 @@
       </p:sp>
       <p:pic>
         <p:nvPicPr>
-          <p:cNvPr id="48" name=""/>
+          <p:cNvPr id="49" name=""/>
           <p:cNvPicPr/>
           <p:nvPr/>
         </p:nvPicPr>
@@ -6407,7 +6795,7 @@
         <p:spPr>
           <a:xfrm>
             <a:off x="561600" y="1791720"/>
-            <a:ext cx="9007560" cy="3014280"/>
+            <a:ext cx="9007200" cy="3013920"/>
           </a:xfrm>
           <a:prstGeom prst="rect">
             <a:avLst/>
@@ -6450,7 +6838,7 @@
       </p:grpSpPr>
       <p:sp>
         <p:nvSpPr>
-          <p:cNvPr id="49" name="PlaceHolder 1"/>
+          <p:cNvPr id="50" name="PlaceHolder 1"/>
           <p:cNvSpPr>
             <a:spLocks noGrp="1"/>
           </p:cNvSpPr>
@@ -6460,8 +6848,8 @@
         </p:nvSpPr>
         <p:spPr>
           <a:xfrm>
-            <a:off x="504000" y="363240"/>
-            <a:ext cx="9070920" cy="671040"/>
+            <a:off x="504000" y="362880"/>
+            <a:ext cx="9070560" cy="671400"/>
           </a:xfrm>
           <a:prstGeom prst="rect">
             <a:avLst/>
@@ -6515,7 +6903,7 @@
       </p:sp>
       <p:pic>
         <p:nvPicPr>
-          <p:cNvPr id="50" name=""/>
+          <p:cNvPr id="51" name=""/>
           <p:cNvPicPr/>
           <p:nvPr/>
         </p:nvPicPr>
@@ -6526,7 +6914,7 @@
         <p:spPr>
           <a:xfrm>
             <a:off x="1816920" y="1213920"/>
-            <a:ext cx="6465600" cy="4208040"/>
+            <a:ext cx="6465240" cy="4207680"/>
           </a:xfrm>
           <a:prstGeom prst="rect">
             <a:avLst/>
@@ -6569,7 +6957,7 @@
       </p:grpSpPr>
       <p:sp>
         <p:nvSpPr>
-          <p:cNvPr id="51" name="PlaceHolder 1"/>
+          <p:cNvPr id="52" name="PlaceHolder 1"/>
           <p:cNvSpPr>
             <a:spLocks noGrp="1"/>
           </p:cNvSpPr>
@@ -6579,8 +6967,8 @@
         </p:nvSpPr>
         <p:spPr>
           <a:xfrm>
-            <a:off x="504000" y="363240"/>
-            <a:ext cx="9070920" cy="671040"/>
+            <a:off x="504000" y="362880"/>
+            <a:ext cx="9070560" cy="671400"/>
           </a:xfrm>
           <a:prstGeom prst="rect">
             <a:avLst/>
@@ -6628,7 +7016,7 @@
       </p:sp>
       <p:pic>
         <p:nvPicPr>
-          <p:cNvPr id="52" name=""/>
+          <p:cNvPr id="53" name=""/>
           <p:cNvPicPr/>
           <p:nvPr/>
         </p:nvPicPr>
@@ -6639,7 +7027,7 @@
         <p:spPr>
           <a:xfrm>
             <a:off x="974880" y="1502640"/>
-            <a:ext cx="7923960" cy="3521520"/>
+            <a:ext cx="7923600" cy="3521160"/>
           </a:xfrm>
           <a:prstGeom prst="rect">
             <a:avLst/>
@@ -6682,7 +7070,7 @@
       </p:grpSpPr>
       <p:sp>
         <p:nvSpPr>
-          <p:cNvPr id="53" name="PlaceHolder 1"/>
+          <p:cNvPr id="54" name="PlaceHolder 1"/>
           <p:cNvSpPr>
             <a:spLocks noGrp="1"/>
           </p:cNvSpPr>
@@ -6692,8 +7080,8 @@
         </p:nvSpPr>
         <p:spPr>
           <a:xfrm>
-            <a:off x="504000" y="1325880"/>
-            <a:ext cx="9070920" cy="3288960"/>
+            <a:off x="504000" y="1325520"/>
+            <a:ext cx="9070560" cy="3289320"/>
           </a:xfrm>
           <a:prstGeom prst="rect">
             <a:avLst/>
@@ -6774,7 +7162,7 @@
       </p:grpSpPr>
       <p:sp>
         <p:nvSpPr>
-          <p:cNvPr id="54" name="PlaceHolder 1"/>
+          <p:cNvPr id="55" name="PlaceHolder 1"/>
           <p:cNvSpPr>
             <a:spLocks noGrp="1"/>
           </p:cNvSpPr>
@@ -6784,8 +7172,8 @@
         </p:nvSpPr>
         <p:spPr>
           <a:xfrm>
-            <a:off x="504000" y="225360"/>
-            <a:ext cx="9071640" cy="947160"/>
+            <a:off x="504000" y="225000"/>
+            <a:ext cx="9071280" cy="947520"/>
           </a:xfrm>
           <a:prstGeom prst="rect">
             <a:avLst/>
@@ -6833,7 +7221,7 @@
       </p:sp>
       <p:pic>
         <p:nvPicPr>
-          <p:cNvPr id="55" name=""/>
+          <p:cNvPr id="56" name=""/>
           <p:cNvPicPr/>
           <p:nvPr/>
         </p:nvPicPr>
@@ -6844,7 +7232,7 @@
         <p:spPr>
           <a:xfrm>
             <a:off x="363960" y="1513080"/>
-            <a:ext cx="9431640" cy="3716280"/>
+            <a:ext cx="9431280" cy="3715920"/>
           </a:xfrm>
           <a:prstGeom prst="rect">
             <a:avLst/>
@@ -6974,7 +7362,7 @@
 </a:theme>
 </file>
 
-<file path=ppt/theme/theme7.xml><?xml version="1.0" encoding="utf-8"?>
+<file path=ppt/theme/theme8.xml><?xml version="1.0" encoding="utf-8"?>
 <a:theme xmlns:a="http://schemas.openxmlformats.org/drawingml/2006/main" xmlns:r="http://schemas.openxmlformats.org/officeDocument/2006/relationships" name="Office Theme">
   <a:themeElements>
     <a:clrScheme name="LibreOffice">

--- a/AI_Arch.pptx
+++ b/AI_Arch.pptx
@@ -19,7 +19,6 @@
     <p:sldId id="264" r:id="rId12"/>
     <p:sldId id="265" r:id="rId13"/>
     <p:sldId id="266" r:id="rId14"/>
-    <p:sldId id="267" r:id="rId15"/>
   </p:sldIdLst>
   <p:sldSz cx="10080625" cy="5670550"/>
   <p:notesSz cx="7772400" cy="10058400"/>
@@ -375,7 +374,7 @@
             <a:pPr indent="0" algn="r">
               <a:buNone/>
             </a:pPr>
-            <a:fld id="{A9DC5EE9-4C03-49C1-BB95-A46D887802C5}" type="slidenum">
+            <a:fld id="{FD4AB6ED-504C-4254-AE64-278CE60FB186}" type="slidenum">
               <a:rPr lang="en-US" sz="1400" b="0" u="none" strike="noStrike">
                 <a:solidFill>
                   <a:srgbClr val="000000"/>
@@ -422,7 +421,7 @@
       </p:grpSpPr>
       <p:sp>
         <p:nvSpPr>
-          <p:cNvPr id="68" name="PlaceHolder 1"/>
+          <p:cNvPr id="67" name="PlaceHolder 1"/>
           <p:cNvSpPr>
             <a:spLocks noGrp="1"/>
           </p:cNvSpPr>
@@ -433,7 +432,7 @@
         <p:spPr>
           <a:xfrm>
             <a:off x="533520" y="764280"/>
-            <a:ext cx="6703920" cy="3770640"/>
+            <a:ext cx="6703560" cy="3770280"/>
           </a:xfrm>
           <a:prstGeom prst="rect">
             <a:avLst/>
@@ -445,7 +444,7 @@
       </p:sp>
       <p:sp>
         <p:nvSpPr>
-          <p:cNvPr id="69" name="PlaceHolder 2"/>
+          <p:cNvPr id="68" name="PlaceHolder 2"/>
           <p:cNvSpPr>
             <a:spLocks noGrp="1"/>
           </p:cNvSpPr>
@@ -456,7 +455,7 @@
         <p:spPr>
           <a:xfrm>
             <a:off x="777240" y="4777560"/>
-            <a:ext cx="6216840" cy="4525200"/>
+            <a:ext cx="6216480" cy="4524840"/>
           </a:xfrm>
           <a:prstGeom prst="rect">
             <a:avLst/>
@@ -502,122 +501,6 @@
                 <a:hlinkClick r:id="rId1"/>
               </a:rPr>
               <a:t>https://builder.aws.com/content/2f2d59922DQNz3iH1pCTeudpmhv/aws-bedrock-generative-ai-application-architecture</a:t>
-            </a:r>
-            <a:r>
-              <a:rPr lang="en-US" sz="2000" b="0" u="none" strike="noStrike">
-                <a:solidFill>
-                  <a:srgbClr val="000000"/>
-                </a:solidFill>
-                <a:effectLst/>
-                <a:uFillTx/>
-                <a:latin typeface="Arial"/>
-              </a:rPr>
-              <a:t> </a:t>
-            </a:r>
-            <a:endParaRPr lang="en-US" sz="2000" b="0" u="none" strike="noStrike">
-              <a:solidFill>
-                <a:srgbClr val="000000"/>
-              </a:solidFill>
-              <a:effectLst/>
-              <a:uFillTx/>
-              <a:latin typeface="Arial"/>
-            </a:endParaRPr>
-          </a:p>
-        </p:txBody>
-      </p:sp>
-    </p:spTree>
-  </p:cSld>
-</p:notes>
-</file>
-
-<file path=ppt/notesSlides/notesSlide12.xml><?xml version="1.0" encoding="utf-8"?>
-<p:notes xmlns:a="http://schemas.openxmlformats.org/drawingml/2006/main" xmlns:p="http://schemas.openxmlformats.org/presentationml/2006/main" xmlns:r="http://schemas.openxmlformats.org/officeDocument/2006/relationships" xmlns:p14="http://schemas.microsoft.com/office/powerpoint/2010/main" xmlns:p15="http://schemas.microsoft.com/office/powerpoint/2012/main" xmlns:mc="http://schemas.openxmlformats.org/markup-compatibility/2006">
-  <p:cSld>
-    <p:spTree>
-      <p:nvGrpSpPr>
-        <p:cNvPr id="1" name=""/>
-        <p:cNvGrpSpPr/>
-        <p:nvPr/>
-      </p:nvGrpSpPr>
-      <p:grpSpPr>
-        <a:xfrm>
-          <a:off x="0" y="0"/>
-          <a:ext cx="0" cy="0"/>
-          <a:chOff x="0" y="0"/>
-          <a:chExt cx="0" cy="0"/>
-        </a:xfrm>
-      </p:grpSpPr>
-      <p:sp>
-        <p:nvSpPr>
-          <p:cNvPr id="70" name="PlaceHolder 1"/>
-          <p:cNvSpPr>
-            <a:spLocks noGrp="1"/>
-          </p:cNvSpPr>
-          <p:nvPr>
-            <p:ph type="sldImg"/>
-          </p:nvPr>
-        </p:nvSpPr>
-        <p:spPr>
-          <a:xfrm>
-            <a:off x="533520" y="764280"/>
-            <a:ext cx="6703920" cy="3770640"/>
-          </a:xfrm>
-          <a:prstGeom prst="rect">
-            <a:avLst/>
-          </a:prstGeom>
-          <a:ln w="0">
-            <a:noFill/>
-          </a:ln>
-        </p:spPr>
-      </p:sp>
-      <p:sp>
-        <p:nvSpPr>
-          <p:cNvPr id="71" name="PlaceHolder 2"/>
-          <p:cNvSpPr>
-            <a:spLocks noGrp="1"/>
-          </p:cNvSpPr>
-          <p:nvPr>
-            <p:ph type="body"/>
-          </p:nvPr>
-        </p:nvSpPr>
-        <p:spPr>
-          <a:xfrm>
-            <a:off x="777240" y="4777560"/>
-            <a:ext cx="6216840" cy="4525200"/>
-          </a:xfrm>
-          <a:prstGeom prst="rect">
-            <a:avLst/>
-          </a:prstGeom>
-          <a:noFill/>
-          <a:ln w="0">
-            <a:noFill/>
-          </a:ln>
-        </p:spPr>
-        <p:txBody>
-          <a:bodyPr lIns="0" tIns="0" rIns="0" bIns="0" anchor="t">
-            <a:noAutofit/>
-          </a:bodyPr>
-          <a:p>
-            <a:pPr indent="0" algn="l">
-              <a:lnSpc>
-                <a:spcPct val="100000"/>
-              </a:lnSpc>
-              <a:buNone/>
-              <a:tabLst>
-                <a:tab pos="0" algn="l"/>
-              </a:tabLst>
-            </a:pPr>
-            <a:r>
-              <a:rPr lang="en-US" sz="2000" b="0" u="none" strike="noStrike">
-                <a:solidFill>
-                  <a:srgbClr val="000000"/>
-                </a:solidFill>
-                <a:effectLst/>
-                <a:uFillTx/>
-                <a:latin typeface="Arial"/>
-                <a:hlinkClick r:id="rId1"/>
-              </a:rPr>
-              <a:t>https://medium.com/@vi.ha.engr/bridging-natural-language-and-databases-best-practices-for-llm-generated-sql-fcba0449d4e5</a:t>
             </a:r>
             <a:r>
               <a:rPr lang="en-US" sz="2000" b="0" u="none" strike="noStrike">
@@ -665,7 +548,7 @@
       </p:grpSpPr>
       <p:sp>
         <p:nvSpPr>
-          <p:cNvPr id="60" name="PlaceHolder 1"/>
+          <p:cNvPr id="59" name="PlaceHolder 1"/>
           <p:cNvSpPr>
             <a:spLocks noGrp="1"/>
           </p:cNvSpPr>
@@ -676,7 +559,7 @@
         <p:spPr>
           <a:xfrm>
             <a:off x="533520" y="764280"/>
-            <a:ext cx="6703920" cy="3770640"/>
+            <a:ext cx="6703560" cy="3770280"/>
           </a:xfrm>
           <a:prstGeom prst="rect">
             <a:avLst/>
@@ -688,7 +571,7 @@
       </p:sp>
       <p:sp>
         <p:nvSpPr>
-          <p:cNvPr id="61" name="PlaceHolder 2"/>
+          <p:cNvPr id="60" name="PlaceHolder 2"/>
           <p:cNvSpPr>
             <a:spLocks noGrp="1"/>
           </p:cNvSpPr>
@@ -699,7 +582,7 @@
         <p:spPr>
           <a:xfrm>
             <a:off x="777240" y="4777560"/>
-            <a:ext cx="6216840" cy="4525200"/>
+            <a:ext cx="6216480" cy="4524840"/>
           </a:xfrm>
           <a:prstGeom prst="rect">
             <a:avLst/>
@@ -781,7 +664,7 @@
       </p:grpSpPr>
       <p:sp>
         <p:nvSpPr>
-          <p:cNvPr id="62" name="PlaceHolder 1"/>
+          <p:cNvPr id="61" name="PlaceHolder 1"/>
           <p:cNvSpPr>
             <a:spLocks noGrp="1"/>
           </p:cNvSpPr>
@@ -804,7 +687,7 @@
       </p:sp>
       <p:sp>
         <p:nvSpPr>
-          <p:cNvPr id="63" name="PlaceHolder 2"/>
+          <p:cNvPr id="62" name="PlaceHolder 2"/>
           <p:cNvSpPr>
             <a:spLocks noGrp="1"/>
           </p:cNvSpPr>
@@ -815,7 +698,7 @@
         <p:spPr>
           <a:xfrm>
             <a:off x="777240" y="4777560"/>
-            <a:ext cx="6216840" cy="4525200"/>
+            <a:ext cx="6216480" cy="4524840"/>
           </a:xfrm>
           <a:prstGeom prst="rect">
             <a:avLst/>
@@ -897,7 +780,7 @@
       </p:grpSpPr>
       <p:sp>
         <p:nvSpPr>
-          <p:cNvPr id="64" name="PlaceHolder 1"/>
+          <p:cNvPr id="63" name="PlaceHolder 1"/>
           <p:cNvSpPr>
             <a:spLocks noGrp="1"/>
           </p:cNvSpPr>
@@ -908,7 +791,7 @@
         <p:spPr>
           <a:xfrm>
             <a:off x="1080" y="-360"/>
-            <a:ext cx="720" cy="720"/>
+            <a:ext cx="360" cy="360"/>
           </a:xfrm>
           <a:prstGeom prst="rect">
             <a:avLst/>
@@ -920,7 +803,7 @@
       </p:sp>
       <p:sp>
         <p:nvSpPr>
-          <p:cNvPr id="65" name="PlaceHolder 2"/>
+          <p:cNvPr id="64" name="PlaceHolder 2"/>
           <p:cNvSpPr>
             <a:spLocks noGrp="1"/>
           </p:cNvSpPr>
@@ -931,7 +814,7 @@
         <p:spPr>
           <a:xfrm>
             <a:off x="777240" y="4777560"/>
-            <a:ext cx="6216840" cy="4525200"/>
+            <a:ext cx="6216480" cy="4524840"/>
           </a:xfrm>
           <a:prstGeom prst="rect">
             <a:avLst/>
@@ -1013,7 +896,7 @@
       </p:grpSpPr>
       <p:sp>
         <p:nvSpPr>
-          <p:cNvPr id="66" name="PlaceHolder 1"/>
+          <p:cNvPr id="65" name="PlaceHolder 1"/>
           <p:cNvSpPr>
             <a:spLocks noGrp="1"/>
           </p:cNvSpPr>
@@ -1036,7 +919,7 @@
       </p:sp>
       <p:sp>
         <p:nvSpPr>
-          <p:cNvPr id="67" name="PlaceHolder 2"/>
+          <p:cNvPr id="66" name="PlaceHolder 2"/>
           <p:cNvSpPr>
             <a:spLocks noGrp="1"/>
           </p:cNvSpPr>
@@ -1047,7 +930,7 @@
         <p:spPr>
           <a:xfrm>
             <a:off x="777240" y="4777560"/>
-            <a:ext cx="6216840" cy="4525200"/>
+            <a:ext cx="6216480" cy="4524840"/>
           </a:xfrm>
           <a:prstGeom prst="rect">
             <a:avLst/>
@@ -1140,7 +1023,7 @@
         <p:spPr>
           <a:xfrm>
             <a:off x="504000" y="363600"/>
-            <a:ext cx="9070560" cy="670680"/>
+            <a:ext cx="9070200" cy="670680"/>
           </a:xfrm>
           <a:prstGeom prst="rect">
             <a:avLst/>
@@ -1218,7 +1101,7 @@
         <p:spPr>
           <a:xfrm>
             <a:off x="3447360" y="5165280"/>
-            <a:ext cx="3193920" cy="389520"/>
+            <a:ext cx="3193560" cy="389160"/>
           </a:xfrm>
           <a:prstGeom prst="rect">
             <a:avLst/>
@@ -1270,7 +1153,7 @@
                 <a:uFillTx/>
                 <a:latin typeface="Times New Roman"/>
               </a:rPr>
-              <a:t> </a:t>
+              <a:t>&lt;footer&gt;</a:t>
             </a:r>
             <a:endParaRPr lang="en-US" sz="1400" b="0" u="none" strike="noStrike">
               <a:solidFill>
@@ -1296,7 +1179,7 @@
         <p:spPr>
           <a:xfrm>
             <a:off x="7227360" y="5165280"/>
-            <a:ext cx="2347200" cy="389520"/>
+            <a:ext cx="2346840" cy="389160"/>
           </a:xfrm>
           <a:prstGeom prst="rect">
             <a:avLst/>
@@ -1339,7 +1222,7 @@
                 <a:tab pos="0" algn="l"/>
               </a:tabLst>
             </a:pPr>
-            <a:fld id="{09EDB798-F729-414A-84CA-99191690887C}" type="slidenum">
+            <a:fld id="{849D6F15-3063-4D01-AD4F-817C5F007BFC}" type="slidenum">
               <a:rPr lang="en-US" sz="1400" b="0" u="none" strike="noStrike">
                 <a:solidFill>
                   <a:srgbClr val="000000"/>
@@ -1348,7 +1231,7 @@
                 <a:uFillTx/>
                 <a:latin typeface="Times New Roman"/>
               </a:rPr>
-              <a:t>4</a:t>
+              <a:t>&lt;number&gt;</a:t>
             </a:fld>
             <a:endParaRPr lang="en-US" sz="1400" b="0" u="none" strike="noStrike">
               <a:solidFill>
@@ -1374,7 +1257,7 @@
         <p:spPr>
           <a:xfrm>
             <a:off x="504000" y="5165280"/>
-            <a:ext cx="2347200" cy="389520"/>
+            <a:ext cx="2346840" cy="389160"/>
           </a:xfrm>
           <a:prstGeom prst="rect">
             <a:avLst/>
@@ -1426,7 +1309,7 @@
                 <a:uFillTx/>
                 <a:latin typeface="Times New Roman"/>
               </a:rPr>
-              <a:t> </a:t>
+              <a:t>&lt;date/time&gt;</a:t>
             </a:r>
             <a:endParaRPr lang="en-US" sz="1400" b="0" u="none" strike="noStrike">
               <a:solidFill>
@@ -1474,7 +1357,7 @@
         <p:spPr>
           <a:xfrm>
             <a:off x="504000" y="363600"/>
-            <a:ext cx="9070560" cy="670680"/>
+            <a:ext cx="9070200" cy="670680"/>
           </a:xfrm>
           <a:prstGeom prst="rect">
             <a:avLst/>
@@ -1552,7 +1435,7 @@
         <p:spPr>
           <a:xfrm>
             <a:off x="3447360" y="5165280"/>
-            <a:ext cx="3193920" cy="389520"/>
+            <a:ext cx="3193560" cy="389160"/>
           </a:xfrm>
           <a:prstGeom prst="rect">
             <a:avLst/>
@@ -1604,7 +1487,7 @@
                 <a:uFillTx/>
                 <a:latin typeface="Times New Roman"/>
               </a:rPr>
-              <a:t> </a:t>
+              <a:t>&lt;footer&gt;</a:t>
             </a:r>
             <a:endParaRPr lang="en-US" sz="1400" b="0" u="none" strike="noStrike">
               <a:solidFill>
@@ -1630,7 +1513,7 @@
         <p:spPr>
           <a:xfrm>
             <a:off x="7227360" y="5165280"/>
-            <a:ext cx="2347200" cy="389520"/>
+            <a:ext cx="2346840" cy="389160"/>
           </a:xfrm>
           <a:prstGeom prst="rect">
             <a:avLst/>
@@ -1673,7 +1556,7 @@
                 <a:tab pos="0" algn="l"/>
               </a:tabLst>
             </a:pPr>
-            <a:fld id="{4DD505D0-338F-47E2-9641-22A9D9EBC6B7}" type="slidenum">
+            <a:fld id="{37B23713-1888-4725-AF29-DA5C144E2C08}" type="slidenum">
               <a:rPr lang="en-US" sz="1400" b="0" u="none" strike="noStrike">
                 <a:solidFill>
                   <a:srgbClr val="000000"/>
@@ -1682,7 +1565,7 @@
                 <a:uFillTx/>
                 <a:latin typeface="Times New Roman"/>
               </a:rPr>
-              <a:t>4</a:t>
+              <a:t>&lt;number&gt;</a:t>
             </a:fld>
             <a:endParaRPr lang="en-US" sz="1400" b="0" u="none" strike="noStrike">
               <a:solidFill>
@@ -1708,7 +1591,7 @@
         <p:spPr>
           <a:xfrm>
             <a:off x="504000" y="5165280"/>
-            <a:ext cx="2347200" cy="389520"/>
+            <a:ext cx="2346840" cy="389160"/>
           </a:xfrm>
           <a:prstGeom prst="rect">
             <a:avLst/>
@@ -1760,7 +1643,7 @@
                 <a:uFillTx/>
                 <a:latin typeface="Times New Roman"/>
               </a:rPr>
-              <a:t> </a:t>
+              <a:t>&lt;date/time&gt;</a:t>
             </a:r>
             <a:endParaRPr lang="en-US" sz="1400" b="0" u="none" strike="noStrike">
               <a:solidFill>
@@ -1786,7 +1669,7 @@
         <p:spPr>
           <a:xfrm>
             <a:off x="504000" y="1326600"/>
-            <a:ext cx="9072000" cy="3288600"/>
+            <a:ext cx="9071640" cy="3288240"/>
           </a:xfrm>
           <a:prstGeom prst="rect">
             <a:avLst/>
@@ -1802,6 +1685,9 @@
           </a:bodyPr>
           <a:lstStyle>
             <a:lvl1pPr algn="l">
+              <a:lnSpc>
+                <a:spcPct val="100000"/>
+              </a:lnSpc>
               <a:spcBef>
                 <a:spcPts val="1417"/>
               </a:spcBef>
@@ -1821,6 +1707,9 @@
               </a:defRPr>
             </a:lvl1pPr>
             <a:lvl2pPr lvl="1" algn="l">
+              <a:lnSpc>
+                <a:spcPct val="100000"/>
+              </a:lnSpc>
               <a:spcBef>
                 <a:spcPts val="1134"/>
               </a:spcBef>
@@ -1840,6 +1729,9 @@
               </a:defRPr>
             </a:lvl2pPr>
             <a:lvl3pPr lvl="2" algn="l">
+              <a:lnSpc>
+                <a:spcPct val="100000"/>
+              </a:lnSpc>
               <a:spcBef>
                 <a:spcPts val="850"/>
               </a:spcBef>
@@ -1859,6 +1751,9 @@
               </a:defRPr>
             </a:lvl3pPr>
             <a:lvl4pPr lvl="3" algn="l">
+              <a:lnSpc>
+                <a:spcPct val="100000"/>
+              </a:lnSpc>
               <a:spcBef>
                 <a:spcPts val="567"/>
               </a:spcBef>
@@ -1878,6 +1773,9 @@
               </a:defRPr>
             </a:lvl4pPr>
             <a:lvl5pPr lvl="4" algn="l">
+              <a:lnSpc>
+                <a:spcPct val="100000"/>
+              </a:lnSpc>
               <a:spcBef>
                 <a:spcPts val="283"/>
               </a:spcBef>
@@ -1897,6 +1795,9 @@
               </a:defRPr>
             </a:lvl5pPr>
             <a:lvl6pPr lvl="5" algn="l">
+              <a:lnSpc>
+                <a:spcPct val="100000"/>
+              </a:lnSpc>
               <a:spcBef>
                 <a:spcPts val="283"/>
               </a:spcBef>
@@ -1916,6 +1817,9 @@
               </a:defRPr>
             </a:lvl6pPr>
             <a:lvl7pPr lvl="6" algn="l">
+              <a:lnSpc>
+                <a:spcPct val="100000"/>
+              </a:lnSpc>
               <a:spcBef>
                 <a:spcPts val="283"/>
               </a:spcBef>
@@ -1937,6 +1841,9 @@
           </a:lstStyle>
           <a:p>
             <a:pPr marL="432000" indent="-324000" algn="l">
+              <a:lnSpc>
+                <a:spcPct val="100000"/>
+              </a:lnSpc>
               <a:spcBef>
                 <a:spcPts val="1417"/>
               </a:spcBef>
@@ -1969,6 +1876,9 @@
           </a:p>
           <a:p>
             <a:pPr marL="864000" lvl="1" indent="-324000" algn="l">
+              <a:lnSpc>
+                <a:spcPct val="100000"/>
+              </a:lnSpc>
               <a:spcBef>
                 <a:spcPts val="1134"/>
               </a:spcBef>
@@ -2001,6 +1911,9 @@
           </a:p>
           <a:p>
             <a:pPr marL="1296000" lvl="2" indent="-288000" algn="l">
+              <a:lnSpc>
+                <a:spcPct val="100000"/>
+              </a:lnSpc>
               <a:spcBef>
                 <a:spcPts val="850"/>
               </a:spcBef>
@@ -2033,6 +1946,9 @@
           </a:p>
           <a:p>
             <a:pPr marL="1728000" lvl="3" indent="-216000" algn="l">
+              <a:lnSpc>
+                <a:spcPct val="100000"/>
+              </a:lnSpc>
               <a:spcBef>
                 <a:spcPts val="567"/>
               </a:spcBef>
@@ -2065,6 +1981,9 @@
           </a:p>
           <a:p>
             <a:pPr marL="2160000" lvl="4" indent="-216000" algn="l">
+              <a:lnSpc>
+                <a:spcPct val="100000"/>
+              </a:lnSpc>
               <a:spcBef>
                 <a:spcPts val="283"/>
               </a:spcBef>
@@ -2097,6 +2016,9 @@
           </a:p>
           <a:p>
             <a:pPr marL="2592000" lvl="5" indent="-216000" algn="l">
+              <a:lnSpc>
+                <a:spcPct val="100000"/>
+              </a:lnSpc>
               <a:spcBef>
                 <a:spcPts val="283"/>
               </a:spcBef>
@@ -2129,6 +2051,9 @@
           </a:p>
           <a:p>
             <a:pPr marL="3024000" lvl="6" indent="-216000" algn="l">
+              <a:lnSpc>
+                <a:spcPct val="100000"/>
+              </a:lnSpc>
               <a:spcBef>
                 <a:spcPts val="283"/>
               </a:spcBef>
@@ -2196,7 +2121,7 @@
         <p:spPr>
           <a:xfrm>
             <a:off x="504000" y="363600"/>
-            <a:ext cx="9070560" cy="670680"/>
+            <a:ext cx="9070200" cy="670680"/>
           </a:xfrm>
           <a:prstGeom prst="rect">
             <a:avLst/>
@@ -2274,7 +2199,7 @@
         <p:spPr>
           <a:xfrm>
             <a:off x="504000" y="1326600"/>
-            <a:ext cx="9070560" cy="3287160"/>
+            <a:ext cx="9070200" cy="3286800"/>
           </a:xfrm>
           <a:prstGeom prst="rect">
             <a:avLst/>
@@ -2704,7 +2629,7 @@
         <p:spPr>
           <a:xfrm>
             <a:off x="3447360" y="5165280"/>
-            <a:ext cx="3193920" cy="389520"/>
+            <a:ext cx="3193560" cy="389160"/>
           </a:xfrm>
           <a:prstGeom prst="rect">
             <a:avLst/>
@@ -2782,7 +2707,7 @@
         <p:spPr>
           <a:xfrm>
             <a:off x="7227360" y="5165280"/>
-            <a:ext cx="2347200" cy="389520"/>
+            <a:ext cx="2346840" cy="389160"/>
           </a:xfrm>
           <a:prstGeom prst="rect">
             <a:avLst/>
@@ -2825,7 +2750,7 @@
                 <a:tab pos="0" algn="l"/>
               </a:tabLst>
             </a:pPr>
-            <a:fld id="{38492CA7-CFF8-42D3-AA70-9EFEC8C5F13D}" type="slidenum">
+            <a:fld id="{9C316E66-EB4A-4B53-8F17-E83D6E010F6E}" type="slidenum">
               <a:rPr lang="en-US" sz="1400" b="0" u="none" strike="noStrike">
                 <a:solidFill>
                   <a:srgbClr val="000000"/>
@@ -2860,7 +2785,7 @@
         <p:spPr>
           <a:xfrm>
             <a:off x="504000" y="5165280"/>
-            <a:ext cx="2347200" cy="389520"/>
+            <a:ext cx="2346840" cy="389160"/>
           </a:xfrm>
           <a:prstGeom prst="rect">
             <a:avLst/>
@@ -2960,7 +2885,7 @@
         <p:spPr>
           <a:xfrm>
             <a:off x="504000" y="363600"/>
-            <a:ext cx="9070560" cy="670680"/>
+            <a:ext cx="9070200" cy="670680"/>
           </a:xfrm>
           <a:prstGeom prst="rect">
             <a:avLst/>
@@ -3038,7 +2963,7 @@
         <p:spPr>
           <a:xfrm>
             <a:off x="3447360" y="5165280"/>
-            <a:ext cx="3193920" cy="389520"/>
+            <a:ext cx="3193560" cy="389160"/>
           </a:xfrm>
           <a:prstGeom prst="rect">
             <a:avLst/>
@@ -3116,7 +3041,7 @@
         <p:spPr>
           <a:xfrm>
             <a:off x="7227360" y="5165280"/>
-            <a:ext cx="2347200" cy="389520"/>
+            <a:ext cx="2346840" cy="389160"/>
           </a:xfrm>
           <a:prstGeom prst="rect">
             <a:avLst/>
@@ -3159,7 +3084,7 @@
                 <a:tab pos="0" algn="l"/>
               </a:tabLst>
             </a:pPr>
-            <a:fld id="{ADA58BED-3A25-4E61-848B-7085ADE4C18B}" type="slidenum">
+            <a:fld id="{0CE0BC24-BE9A-464C-A330-C9C001300DD4}" type="slidenum">
               <a:rPr lang="en-US" sz="1400" b="0" u="none" strike="noStrike">
                 <a:solidFill>
                   <a:srgbClr val="000000"/>
@@ -3194,7 +3119,7 @@
         <p:spPr>
           <a:xfrm>
             <a:off x="504000" y="5165280"/>
-            <a:ext cx="2347200" cy="389520"/>
+            <a:ext cx="2346840" cy="389160"/>
           </a:xfrm>
           <a:prstGeom prst="rect">
             <a:avLst/>
@@ -3272,7 +3197,7 @@
         <p:spPr>
           <a:xfrm>
             <a:off x="504000" y="1326600"/>
-            <a:ext cx="9071280" cy="3287880"/>
+            <a:ext cx="9070920" cy="3287520"/>
           </a:xfrm>
           <a:prstGeom prst="rect">
             <a:avLst/>
@@ -3724,7 +3649,7 @@
         <p:spPr>
           <a:xfrm>
             <a:off x="504000" y="363600"/>
-            <a:ext cx="9070560" cy="670680"/>
+            <a:ext cx="9070200" cy="670680"/>
           </a:xfrm>
           <a:prstGeom prst="rect">
             <a:avLst/>
@@ -3802,7 +3727,7 @@
         <p:spPr>
           <a:xfrm>
             <a:off x="3447360" y="5165280"/>
-            <a:ext cx="3193920" cy="389520"/>
+            <a:ext cx="3193560" cy="389160"/>
           </a:xfrm>
           <a:prstGeom prst="rect">
             <a:avLst/>
@@ -3880,7 +3805,7 @@
         <p:spPr>
           <a:xfrm>
             <a:off x="7227360" y="5165280"/>
-            <a:ext cx="2347200" cy="389520"/>
+            <a:ext cx="2346840" cy="389160"/>
           </a:xfrm>
           <a:prstGeom prst="rect">
             <a:avLst/>
@@ -3923,7 +3848,7 @@
                 <a:tab pos="0" algn="l"/>
               </a:tabLst>
             </a:pPr>
-            <a:fld id="{8BA798A0-5038-447C-9F3C-11CBD2006A98}" type="slidenum">
+            <a:fld id="{1BEC5948-5AB5-4C47-9F3C-CBD9BC429B30}" type="slidenum">
               <a:rPr lang="en-US" sz="1400" b="0" u="none" strike="noStrike">
                 <a:solidFill>
                   <a:srgbClr val="000000"/>
@@ -3958,7 +3883,7 @@
         <p:spPr>
           <a:xfrm>
             <a:off x="504000" y="5165280"/>
-            <a:ext cx="2347200" cy="389520"/>
+            <a:ext cx="2346840" cy="389160"/>
           </a:xfrm>
           <a:prstGeom prst="rect">
             <a:avLst/>
@@ -4036,7 +3961,7 @@
         <p:spPr>
           <a:xfrm>
             <a:off x="504000" y="1326600"/>
-            <a:ext cx="9071280" cy="3287880"/>
+            <a:ext cx="9070920" cy="3287520"/>
           </a:xfrm>
           <a:prstGeom prst="rect">
             <a:avLst/>
@@ -4488,7 +4413,7 @@
         <p:spPr>
           <a:xfrm>
             <a:off x="504000" y="363600"/>
-            <a:ext cx="9070560" cy="670680"/>
+            <a:ext cx="9070200" cy="670680"/>
           </a:xfrm>
           <a:prstGeom prst="rect">
             <a:avLst/>
@@ -4566,7 +4491,7 @@
         <p:spPr>
           <a:xfrm>
             <a:off x="3447360" y="5165280"/>
-            <a:ext cx="3193920" cy="389520"/>
+            <a:ext cx="3193560" cy="389160"/>
           </a:xfrm>
           <a:prstGeom prst="rect">
             <a:avLst/>
@@ -4644,7 +4569,7 @@
         <p:spPr>
           <a:xfrm>
             <a:off x="7227360" y="5165280"/>
-            <a:ext cx="2347200" cy="389520"/>
+            <a:ext cx="2346840" cy="389160"/>
           </a:xfrm>
           <a:prstGeom prst="rect">
             <a:avLst/>
@@ -4687,7 +4612,7 @@
                 <a:tab pos="0" algn="l"/>
               </a:tabLst>
             </a:pPr>
-            <a:fld id="{1374AB70-D094-4909-93AB-46FE30C54923}" type="slidenum">
+            <a:fld id="{8FC95C93-4287-4C1F-998F-D3C06D579CBB}" type="slidenum">
               <a:rPr lang="en-US" sz="1400" b="0" u="none" strike="noStrike">
                 <a:solidFill>
                   <a:srgbClr val="000000"/>
@@ -4722,7 +4647,7 @@
         <p:spPr>
           <a:xfrm>
             <a:off x="504000" y="5165280"/>
-            <a:ext cx="2347200" cy="389520"/>
+            <a:ext cx="2346840" cy="389160"/>
           </a:xfrm>
           <a:prstGeom prst="rect">
             <a:avLst/>
@@ -4800,7 +4725,7 @@
         <p:spPr>
           <a:xfrm>
             <a:off x="504000" y="1326600"/>
-            <a:ext cx="9071280" cy="3287880"/>
+            <a:ext cx="9070920" cy="3287520"/>
           </a:xfrm>
           <a:prstGeom prst="rect">
             <a:avLst/>
@@ -5252,7 +5177,7 @@
         <p:spPr>
           <a:xfrm>
             <a:off x="504000" y="363600"/>
-            <a:ext cx="9070560" cy="670680"/>
+            <a:ext cx="9070200" cy="670680"/>
           </a:xfrm>
           <a:prstGeom prst="rect">
             <a:avLst/>
@@ -5330,7 +5255,7 @@
         <p:spPr>
           <a:xfrm>
             <a:off x="3447360" y="5165280"/>
-            <a:ext cx="3193920" cy="389520"/>
+            <a:ext cx="3193560" cy="389160"/>
           </a:xfrm>
           <a:prstGeom prst="rect">
             <a:avLst/>
@@ -5408,7 +5333,7 @@
         <p:spPr>
           <a:xfrm>
             <a:off x="7227360" y="5165280"/>
-            <a:ext cx="2347200" cy="389520"/>
+            <a:ext cx="2346840" cy="389160"/>
           </a:xfrm>
           <a:prstGeom prst="rect">
             <a:avLst/>
@@ -5451,7 +5376,7 @@
                 <a:tab pos="0" algn="l"/>
               </a:tabLst>
             </a:pPr>
-            <a:fld id="{924EFB07-071F-4CB2-A12B-5D580664B0E1}" type="slidenum">
+            <a:fld id="{A9E0C999-BC72-44DF-8805-5C9A599DDE71}" type="slidenum">
               <a:rPr lang="en-US" sz="1400" b="0" u="none" strike="noStrike">
                 <a:solidFill>
                   <a:srgbClr val="000000"/>
@@ -5486,7 +5411,7 @@
         <p:spPr>
           <a:xfrm>
             <a:off x="504000" y="5165280"/>
-            <a:ext cx="2347200" cy="389520"/>
+            <a:ext cx="2346840" cy="389160"/>
           </a:xfrm>
           <a:prstGeom prst="rect">
             <a:avLst/>
@@ -5564,7 +5489,7 @@
         <p:spPr>
           <a:xfrm>
             <a:off x="504000" y="1326600"/>
-            <a:ext cx="9071280" cy="3287880"/>
+            <a:ext cx="9070920" cy="3287520"/>
           </a:xfrm>
           <a:prstGeom prst="rect">
             <a:avLst/>
@@ -6047,8 +5972,8 @@
         </p:nvSpPr>
         <p:spPr>
           <a:xfrm>
-            <a:off x="504000" y="1325520"/>
-            <a:ext cx="9070560" cy="3289320"/>
+            <a:off x="504000" y="1325160"/>
+            <a:ext cx="9070200" cy="3289680"/>
           </a:xfrm>
           <a:prstGeom prst="rect">
             <a:avLst/>
@@ -6167,8 +6092,8 @@
         </p:nvSpPr>
         <p:spPr>
           <a:xfrm>
-            <a:off x="504000" y="1325520"/>
-            <a:ext cx="9070560" cy="3289320"/>
+            <a:off x="504000" y="1325160"/>
+            <a:ext cx="9070200" cy="3289680"/>
           </a:xfrm>
           <a:prstGeom prst="rect">
             <a:avLst/>
@@ -6260,7 +6185,7 @@
         <p:spPr>
           <a:xfrm>
             <a:off x="1770120" y="441000"/>
-            <a:ext cx="6990840" cy="4889160"/>
+            <a:ext cx="6990480" cy="4888800"/>
           </a:xfrm>
           <a:prstGeom prst="rect">
             <a:avLst/>
@@ -6271,98 +6196,6 @@
           </a:ln>
         </p:spPr>
       </p:pic>
-    </p:spTree>
-  </p:cSld>
-  <mc:AlternateContent>
-    <mc:Choice Requires="p14">
-      <p:transition spd="slow" p14:dur="2000"/>
-    </mc:Choice>
-    <mc:Fallback>
-      <p:transition spd="slow"/>
-    </mc:Fallback>
-  </mc:AlternateContent>
-</p:sld>
-</file>
-
-<file path=ppt/slides/slide12.xml><?xml version="1.0" encoding="utf-8"?>
-<p:sld xmlns:a="http://schemas.openxmlformats.org/drawingml/2006/main" xmlns:p="http://schemas.openxmlformats.org/presentationml/2006/main" xmlns:r="http://schemas.openxmlformats.org/officeDocument/2006/relationships" xmlns:p14="http://schemas.microsoft.com/office/powerpoint/2010/main" xmlns:p15="http://schemas.microsoft.com/office/powerpoint/2012/main" xmlns:mc="http://schemas.openxmlformats.org/markup-compatibility/2006">
-  <p:cSld>
-    <p:spTree>
-      <p:nvGrpSpPr>
-        <p:cNvPr id="1" name=""/>
-        <p:cNvGrpSpPr/>
-        <p:nvPr/>
-      </p:nvGrpSpPr>
-      <p:grpSpPr>
-        <a:xfrm>
-          <a:off x="0" y="0"/>
-          <a:ext cx="0" cy="0"/>
-          <a:chOff x="0" y="0"/>
-          <a:chExt cx="0" cy="0"/>
-        </a:xfrm>
-      </p:grpSpPr>
-      <p:sp>
-        <p:nvSpPr>
-          <p:cNvPr id="59" name="PlaceHolder 1"/>
-          <p:cNvSpPr>
-            <a:spLocks noGrp="1"/>
-          </p:cNvSpPr>
-          <p:nvPr>
-            <p:ph type="subTitle"/>
-          </p:nvPr>
-        </p:nvSpPr>
-        <p:spPr>
-          <a:xfrm>
-            <a:off x="504000" y="1325520"/>
-            <a:ext cx="9070560" cy="3289320"/>
-          </a:xfrm>
-          <a:prstGeom prst="rect">
-            <a:avLst/>
-          </a:prstGeom>
-          <a:noFill/>
-          <a:ln w="0">
-            <a:noFill/>
-          </a:ln>
-        </p:spPr>
-        <p:txBody>
-          <a:bodyPr lIns="0" tIns="0" rIns="0" bIns="0" anchor="ctr">
-            <a:spAutoFit/>
-          </a:bodyPr>
-          <a:p>
-            <a:pPr indent="0" algn="ctr">
-              <a:lnSpc>
-                <a:spcPct val="100000"/>
-              </a:lnSpc>
-              <a:spcBef>
-                <a:spcPts val="1417"/>
-              </a:spcBef>
-              <a:buNone/>
-              <a:tabLst>
-                <a:tab pos="0" algn="l"/>
-              </a:tabLst>
-            </a:pPr>
-            <a:r>
-              <a:rPr lang="en-US" sz="4400" b="0" u="none" strike="noStrike">
-                <a:solidFill>
-                  <a:srgbClr val="000000"/>
-                </a:solidFill>
-                <a:effectLst/>
-                <a:uFillTx/>
-                <a:latin typeface="Arial"/>
-              </a:rPr>
-              <a:t>Text-to-SQL</a:t>
-            </a:r>
-            <a:endParaRPr lang="en-US" sz="4400" b="0" u="none" strike="noStrike">
-              <a:solidFill>
-                <a:srgbClr val="000000"/>
-              </a:solidFill>
-              <a:effectLst/>
-              <a:uFillTx/>
-              <a:latin typeface="Arial"/>
-            </a:endParaRPr>
-          </a:p>
-        </p:txBody>
-      </p:sp>
     </p:spTree>
   </p:cSld>
   <mc:AlternateContent>
@@ -6405,8 +6238,8 @@
         </p:nvSpPr>
         <p:spPr>
           <a:xfrm>
-            <a:off x="504000" y="1325520"/>
-            <a:ext cx="9070560" cy="3289320"/>
+            <a:off x="504000" y="1325160"/>
+            <a:ext cx="9070200" cy="3289680"/>
           </a:xfrm>
           <a:prstGeom prst="rect">
             <a:avLst/>
@@ -6497,8 +6330,8 @@
         </p:nvSpPr>
         <p:spPr>
           <a:xfrm>
-            <a:off x="504000" y="362880"/>
-            <a:ext cx="9070560" cy="671400"/>
+            <a:off x="504000" y="362520"/>
+            <a:ext cx="9070200" cy="671760"/>
           </a:xfrm>
           <a:prstGeom prst="rect">
             <a:avLst/>
@@ -6563,7 +6396,7 @@
         <p:spPr>
           <a:xfrm>
             <a:off x="1935360" y="1257120"/>
-            <a:ext cx="6222960" cy="4055760"/>
+            <a:ext cx="6222600" cy="4055400"/>
           </a:xfrm>
           <a:prstGeom prst="rect">
             <a:avLst/>
@@ -6616,8 +6449,8 @@
         </p:nvSpPr>
         <p:spPr>
           <a:xfrm>
-            <a:off x="504000" y="362880"/>
-            <a:ext cx="9070560" cy="671400"/>
+            <a:off x="504000" y="362520"/>
+            <a:ext cx="9070200" cy="671760"/>
           </a:xfrm>
           <a:prstGeom prst="rect">
             <a:avLst/>
@@ -6682,7 +6515,7 @@
         <p:spPr>
           <a:xfrm>
             <a:off x="1868760" y="1172160"/>
-            <a:ext cx="6417720" cy="4320000"/>
+            <a:ext cx="6417360" cy="4319640"/>
           </a:xfrm>
           <a:prstGeom prst="rect">
             <a:avLst/>
@@ -6735,8 +6568,8 @@
         </p:nvSpPr>
         <p:spPr>
           <a:xfrm>
-            <a:off x="504000" y="362880"/>
-            <a:ext cx="9070560" cy="671400"/>
+            <a:off x="504000" y="362520"/>
+            <a:ext cx="9070200" cy="671760"/>
           </a:xfrm>
           <a:prstGeom prst="rect">
             <a:avLst/>
@@ -6795,7 +6628,7 @@
         <p:spPr>
           <a:xfrm>
             <a:off x="561600" y="1791720"/>
-            <a:ext cx="9007200" cy="3013920"/>
+            <a:ext cx="9006840" cy="3013560"/>
           </a:xfrm>
           <a:prstGeom prst="rect">
             <a:avLst/>
@@ -6848,8 +6681,8 @@
         </p:nvSpPr>
         <p:spPr>
           <a:xfrm>
-            <a:off x="504000" y="362880"/>
-            <a:ext cx="9070560" cy="671400"/>
+            <a:off x="504000" y="362520"/>
+            <a:ext cx="9070200" cy="671760"/>
           </a:xfrm>
           <a:prstGeom prst="rect">
             <a:avLst/>
@@ -6914,7 +6747,7 @@
         <p:spPr>
           <a:xfrm>
             <a:off x="1816920" y="1213920"/>
-            <a:ext cx="6465240" cy="4207680"/>
+            <a:ext cx="6464880" cy="4207320"/>
           </a:xfrm>
           <a:prstGeom prst="rect">
             <a:avLst/>
@@ -6967,8 +6800,8 @@
         </p:nvSpPr>
         <p:spPr>
           <a:xfrm>
-            <a:off x="504000" y="362880"/>
-            <a:ext cx="9070560" cy="671400"/>
+            <a:off x="504000" y="362520"/>
+            <a:ext cx="9070200" cy="671760"/>
           </a:xfrm>
           <a:prstGeom prst="rect">
             <a:avLst/>
@@ -7027,7 +6860,7 @@
         <p:spPr>
           <a:xfrm>
             <a:off x="974880" y="1502640"/>
-            <a:ext cx="7923600" cy="3521160"/>
+            <a:ext cx="7923240" cy="3520800"/>
           </a:xfrm>
           <a:prstGeom prst="rect">
             <a:avLst/>
@@ -7080,8 +6913,8 @@
         </p:nvSpPr>
         <p:spPr>
           <a:xfrm>
-            <a:off x="504000" y="1325520"/>
-            <a:ext cx="9070560" cy="3289320"/>
+            <a:off x="504000" y="1325160"/>
+            <a:ext cx="9070200" cy="3289680"/>
           </a:xfrm>
           <a:prstGeom prst="rect">
             <a:avLst/>
@@ -7172,8 +7005,8 @@
         </p:nvSpPr>
         <p:spPr>
           <a:xfrm>
-            <a:off x="504000" y="225000"/>
-            <a:ext cx="9071280" cy="947520"/>
+            <a:off x="504000" y="224640"/>
+            <a:ext cx="9070920" cy="947880"/>
           </a:xfrm>
           <a:prstGeom prst="rect">
             <a:avLst/>
@@ -7232,7 +7065,7 @@
         <p:spPr>
           <a:xfrm>
             <a:off x="363960" y="1513080"/>
-            <a:ext cx="9431280" cy="3715920"/>
+            <a:ext cx="9430920" cy="3715560"/>
           </a:xfrm>
           <a:prstGeom prst="rect">
             <a:avLst/>

--- a/AI_Arch.pptx
+++ b/AI_Arch.pptx
@@ -19,6 +19,15 @@
     <p:sldId id="264" r:id="rId12"/>
     <p:sldId id="265" r:id="rId13"/>
     <p:sldId id="266" r:id="rId14"/>
+    <p:sldId id="267" r:id="rId15"/>
+    <p:sldId id="268" r:id="rId16"/>
+    <p:sldId id="269" r:id="rId17"/>
+    <p:sldId id="270" r:id="rId18"/>
+    <p:sldId id="271" r:id="rId19"/>
+    <p:sldId id="272" r:id="rId20"/>
+    <p:sldId id="273" r:id="rId21"/>
+    <p:sldId id="274" r:id="rId22"/>
+    <p:sldId id="275" r:id="rId23"/>
   </p:sldIdLst>
   <p:sldSz cx="10080625" cy="5670550"/>
   <p:notesSz cx="7772400" cy="10058400"/>
@@ -44,7 +53,7 @@
       </p:grpSpPr>
       <p:sp>
         <p:nvSpPr>
-          <p:cNvPr id="36" name="PlaceHolder 1"/>
+          <p:cNvPr id="41" name="PlaceHolder 1"/>
           <p:cNvSpPr>
             <a:spLocks noGrp="1"/>
           </p:cNvSpPr>
@@ -94,7 +103,7 @@
       </p:sp>
       <p:sp>
         <p:nvSpPr>
-          <p:cNvPr id="37" name="PlaceHolder 2"/>
+          <p:cNvPr id="42" name="PlaceHolder 2"/>
           <p:cNvSpPr>
             <a:spLocks noGrp="1"/>
           </p:cNvSpPr>
@@ -147,7 +156,7 @@
       </p:sp>
       <p:sp>
         <p:nvSpPr>
-          <p:cNvPr id="38" name="PlaceHolder 3"/>
+          <p:cNvPr id="43" name="PlaceHolder 3"/>
           <p:cNvSpPr>
             <a:spLocks noGrp="1"/>
           </p:cNvSpPr>
@@ -200,12 +209,12 @@
       </p:sp>
       <p:sp>
         <p:nvSpPr>
-          <p:cNvPr id="39" name="PlaceHolder 4"/>
+          <p:cNvPr id="44" name="PlaceHolder 4"/>
           <p:cNvSpPr>
             <a:spLocks noGrp="1"/>
           </p:cNvSpPr>
           <p:nvPr>
-            <p:ph type="dt" idx="22"/>
+            <p:ph type="dt" idx="25"/>
           </p:nvPr>
         </p:nvSpPr>
         <p:spPr>
@@ -266,12 +275,12 @@
       </p:sp>
       <p:sp>
         <p:nvSpPr>
-          <p:cNvPr id="40" name="PlaceHolder 5"/>
+          <p:cNvPr id="45" name="PlaceHolder 5"/>
           <p:cNvSpPr>
             <a:spLocks noGrp="1"/>
           </p:cNvSpPr>
           <p:nvPr>
-            <p:ph type="ftr" idx="23"/>
+            <p:ph type="ftr" idx="26"/>
           </p:nvPr>
         </p:nvSpPr>
         <p:spPr>
@@ -332,12 +341,12 @@
       </p:sp>
       <p:sp>
         <p:nvSpPr>
-          <p:cNvPr id="41" name="PlaceHolder 6"/>
+          <p:cNvPr id="46" name="PlaceHolder 6"/>
           <p:cNvSpPr>
             <a:spLocks noGrp="1"/>
           </p:cNvSpPr>
           <p:nvPr>
-            <p:ph type="sldNum" idx="24"/>
+            <p:ph type="sldNum" idx="27"/>
           </p:nvPr>
         </p:nvSpPr>
         <p:spPr>
@@ -374,7 +383,7 @@
             <a:pPr indent="0" algn="r">
               <a:buNone/>
             </a:pPr>
-            <a:fld id="{FD4AB6ED-504C-4254-AE64-278CE60FB186}" type="slidenum">
+            <a:fld id="{9650BAA3-CF61-4A59-9F9C-41A7C0934852}" type="slidenum">
               <a:rPr lang="en-US" sz="1400" b="0" u="none" strike="noStrike">
                 <a:solidFill>
                   <a:srgbClr val="000000"/>
@@ -402,7 +411,7 @@
 </p:notesMaster>
 </file>
 
-<file path=ppt/notesSlides/notesSlide10.xml><?xml version="1.0" encoding="utf-8"?>
+<file path=ppt/notesSlides/notesSlide11.xml><?xml version="1.0" encoding="utf-8"?>
 <p:notes xmlns:a="http://schemas.openxmlformats.org/drawingml/2006/main" xmlns:p="http://schemas.openxmlformats.org/presentationml/2006/main" xmlns:r="http://schemas.openxmlformats.org/officeDocument/2006/relationships" xmlns:p14="http://schemas.microsoft.com/office/powerpoint/2010/main" xmlns:p15="http://schemas.microsoft.com/office/powerpoint/2012/main" xmlns:mc="http://schemas.openxmlformats.org/markup-compatibility/2006">
   <p:cSld>
     <p:spTree>
@@ -421,7 +430,7 @@
       </p:grpSpPr>
       <p:sp>
         <p:nvSpPr>
-          <p:cNvPr id="67" name="PlaceHolder 1"/>
+          <p:cNvPr id="89" name="PlaceHolder 1"/>
           <p:cNvSpPr>
             <a:spLocks noGrp="1"/>
           </p:cNvSpPr>
@@ -444,7 +453,7 @@
       </p:sp>
       <p:sp>
         <p:nvSpPr>
-          <p:cNvPr id="68" name="PlaceHolder 2"/>
+          <p:cNvPr id="90" name="PlaceHolder 2"/>
           <p:cNvSpPr>
             <a:spLocks noGrp="1"/>
           </p:cNvSpPr>
@@ -512,6 +521,758 @@
                 <a:latin typeface="Arial"/>
               </a:rPr>
               <a:t> </a:t>
+            </a:r>
+            <a:endParaRPr lang="en-US" sz="2000" b="0" u="none" strike="noStrike">
+              <a:solidFill>
+                <a:srgbClr val="000000"/>
+              </a:solidFill>
+              <a:effectLst/>
+              <a:uFillTx/>
+              <a:latin typeface="Arial"/>
+            </a:endParaRPr>
+          </a:p>
+        </p:txBody>
+      </p:sp>
+    </p:spTree>
+  </p:cSld>
+</p:notes>
+</file>
+
+<file path=ppt/notesSlides/notesSlide13.xml><?xml version="1.0" encoding="utf-8"?>
+<p:notes xmlns:a="http://schemas.openxmlformats.org/drawingml/2006/main" xmlns:p="http://schemas.openxmlformats.org/presentationml/2006/main" xmlns:r="http://schemas.openxmlformats.org/officeDocument/2006/relationships" xmlns:p14="http://schemas.microsoft.com/office/powerpoint/2010/main" xmlns:p15="http://schemas.microsoft.com/office/powerpoint/2012/main" xmlns:mc="http://schemas.openxmlformats.org/markup-compatibility/2006">
+  <p:cSld>
+    <p:spTree>
+      <p:nvGrpSpPr>
+        <p:cNvPr id="1" name=""/>
+        <p:cNvGrpSpPr/>
+        <p:nvPr/>
+      </p:nvGrpSpPr>
+      <p:grpSpPr>
+        <a:xfrm>
+          <a:off x="0" y="0"/>
+          <a:ext cx="0" cy="0"/>
+          <a:chOff x="0" y="0"/>
+          <a:chExt cx="0" cy="0"/>
+        </a:xfrm>
+      </p:grpSpPr>
+      <p:sp>
+        <p:nvSpPr>
+          <p:cNvPr id="91" name="PlaceHolder 1"/>
+          <p:cNvSpPr>
+            <a:spLocks noGrp="1"/>
+          </p:cNvSpPr>
+          <p:nvPr>
+            <p:ph type="sldImg"/>
+          </p:nvPr>
+        </p:nvSpPr>
+        <p:spPr>
+          <a:xfrm>
+            <a:off x="1440" y="0"/>
+            <a:ext cx="360" cy="720"/>
+          </a:xfrm>
+          <a:prstGeom prst="rect">
+            <a:avLst/>
+          </a:prstGeom>
+          <a:ln w="0">
+            <a:noFill/>
+          </a:ln>
+        </p:spPr>
+      </p:sp>
+      <p:sp>
+        <p:nvSpPr>
+          <p:cNvPr id="92" name="PlaceHolder 2"/>
+          <p:cNvSpPr>
+            <a:spLocks noGrp="1"/>
+          </p:cNvSpPr>
+          <p:nvPr>
+            <p:ph type="body"/>
+          </p:nvPr>
+        </p:nvSpPr>
+        <p:spPr>
+          <a:xfrm>
+            <a:off x="777240" y="4777560"/>
+            <a:ext cx="6217560" cy="4525920"/>
+          </a:xfrm>
+          <a:prstGeom prst="rect">
+            <a:avLst/>
+          </a:prstGeom>
+          <a:noFill/>
+          <a:ln w="0">
+            <a:noFill/>
+          </a:ln>
+        </p:spPr>
+        <p:txBody>
+          <a:bodyPr lIns="0" tIns="0" rIns="0" bIns="0" anchor="t">
+            <a:noAutofit/>
+          </a:bodyPr>
+          <a:p>
+            <a:pPr indent="0" algn="l">
+              <a:buNone/>
+            </a:pPr>
+            <a:r>
+              <a:rPr lang="en-US" sz="2000" b="0" u="none" strike="noStrike">
+                <a:solidFill>
+                  <a:srgbClr val="000000"/>
+                </a:solidFill>
+                <a:effectLst/>
+                <a:uFillTx/>
+                <a:latin typeface="Arial"/>
+                <a:hlinkClick r:id="rId1"/>
+              </a:rPr>
+              <a:t>https://docs.aws.amazon.com/prescriptive-guidance/latest/govern-architect-agentic-ai/enterprise-architecture.html</a:t>
+            </a:r>
+            <a:r>
+              <a:rPr lang="en-US" sz="2000" b="0" u="none" strike="noStrike">
+                <a:solidFill>
+                  <a:srgbClr val="000000"/>
+                </a:solidFill>
+                <a:effectLst/>
+                <a:uFillTx/>
+                <a:latin typeface="Arial"/>
+              </a:rPr>
+              <a:t> </a:t>
+            </a:r>
+            <a:endParaRPr lang="en-US" sz="2000" b="0" u="none" strike="noStrike">
+              <a:solidFill>
+                <a:srgbClr val="000000"/>
+              </a:solidFill>
+              <a:effectLst/>
+              <a:uFillTx/>
+              <a:latin typeface="Arial"/>
+            </a:endParaRPr>
+          </a:p>
+        </p:txBody>
+      </p:sp>
+    </p:spTree>
+  </p:cSld>
+</p:notes>
+</file>
+
+<file path=ppt/notesSlides/notesSlide14.xml><?xml version="1.0" encoding="utf-8"?>
+<p:notes xmlns:a="http://schemas.openxmlformats.org/drawingml/2006/main" xmlns:p="http://schemas.openxmlformats.org/presentationml/2006/main" xmlns:r="http://schemas.openxmlformats.org/officeDocument/2006/relationships" xmlns:p14="http://schemas.microsoft.com/office/powerpoint/2010/main" xmlns:p15="http://schemas.microsoft.com/office/powerpoint/2012/main" xmlns:mc="http://schemas.openxmlformats.org/markup-compatibility/2006">
+  <p:cSld>
+    <p:spTree>
+      <p:nvGrpSpPr>
+        <p:cNvPr id="1" name=""/>
+        <p:cNvGrpSpPr/>
+        <p:nvPr/>
+      </p:nvGrpSpPr>
+      <p:grpSpPr>
+        <a:xfrm>
+          <a:off x="0" y="0"/>
+          <a:ext cx="0" cy="0"/>
+          <a:chOff x="0" y="0"/>
+          <a:chExt cx="0" cy="0"/>
+        </a:xfrm>
+      </p:grpSpPr>
+      <p:sp>
+        <p:nvSpPr>
+          <p:cNvPr id="93" name="PlaceHolder 1"/>
+          <p:cNvSpPr>
+            <a:spLocks noGrp="1"/>
+          </p:cNvSpPr>
+          <p:nvPr>
+            <p:ph type="sldImg"/>
+          </p:nvPr>
+        </p:nvSpPr>
+        <p:spPr>
+          <a:xfrm>
+            <a:off x="533520" y="764280"/>
+            <a:ext cx="6703560" cy="3770280"/>
+          </a:xfrm>
+          <a:prstGeom prst="rect">
+            <a:avLst/>
+          </a:prstGeom>
+          <a:ln w="0">
+            <a:noFill/>
+          </a:ln>
+        </p:spPr>
+      </p:sp>
+      <p:sp>
+        <p:nvSpPr>
+          <p:cNvPr id="94" name="PlaceHolder 2"/>
+          <p:cNvSpPr>
+            <a:spLocks noGrp="1"/>
+          </p:cNvSpPr>
+          <p:nvPr>
+            <p:ph type="body"/>
+          </p:nvPr>
+        </p:nvSpPr>
+        <p:spPr>
+          <a:xfrm>
+            <a:off x="777240" y="4777560"/>
+            <a:ext cx="6216480" cy="4524840"/>
+          </a:xfrm>
+          <a:prstGeom prst="rect">
+            <a:avLst/>
+          </a:prstGeom>
+          <a:noFill/>
+          <a:ln w="0">
+            <a:noFill/>
+          </a:ln>
+        </p:spPr>
+        <p:txBody>
+          <a:bodyPr lIns="0" tIns="0" rIns="0" bIns="0" anchor="t">
+            <a:noAutofit/>
+          </a:bodyPr>
+          <a:p>
+            <a:pPr indent="0" algn="l">
+              <a:lnSpc>
+                <a:spcPct val="100000"/>
+              </a:lnSpc>
+              <a:buNone/>
+              <a:tabLst>
+                <a:tab pos="0" algn="l"/>
+              </a:tabLst>
+            </a:pPr>
+            <a:r>
+              <a:rPr lang="en-US" sz="2000" b="0" u="none" strike="noStrike">
+                <a:solidFill>
+                  <a:srgbClr val="000000"/>
+                </a:solidFill>
+                <a:effectLst/>
+                <a:uFillTx/>
+                <a:latin typeface="Arial"/>
+              </a:rPr>
+              <a:t>  </a:t>
+            </a:r>
+            <a:endParaRPr lang="en-US" sz="2000" b="0" u="none" strike="noStrike">
+              <a:solidFill>
+                <a:srgbClr val="000000"/>
+              </a:solidFill>
+              <a:effectLst/>
+              <a:uFillTx/>
+              <a:latin typeface="Arial"/>
+            </a:endParaRPr>
+          </a:p>
+        </p:txBody>
+      </p:sp>
+    </p:spTree>
+  </p:cSld>
+</p:notes>
+</file>
+
+<file path=ppt/notesSlides/notesSlide15.xml><?xml version="1.0" encoding="utf-8"?>
+<p:notes xmlns:a="http://schemas.openxmlformats.org/drawingml/2006/main" xmlns:p="http://schemas.openxmlformats.org/presentationml/2006/main" xmlns:r="http://schemas.openxmlformats.org/officeDocument/2006/relationships" xmlns:p14="http://schemas.microsoft.com/office/powerpoint/2010/main" xmlns:p15="http://schemas.microsoft.com/office/powerpoint/2012/main" xmlns:mc="http://schemas.openxmlformats.org/markup-compatibility/2006">
+  <p:cSld>
+    <p:spTree>
+      <p:nvGrpSpPr>
+        <p:cNvPr id="1" name=""/>
+        <p:cNvGrpSpPr/>
+        <p:nvPr/>
+      </p:nvGrpSpPr>
+      <p:grpSpPr>
+        <a:xfrm>
+          <a:off x="0" y="0"/>
+          <a:ext cx="0" cy="0"/>
+          <a:chOff x="0" y="0"/>
+          <a:chExt cx="0" cy="0"/>
+        </a:xfrm>
+      </p:grpSpPr>
+      <p:sp>
+        <p:nvSpPr>
+          <p:cNvPr id="95" name="PlaceHolder 1"/>
+          <p:cNvSpPr>
+            <a:spLocks noGrp="1"/>
+          </p:cNvSpPr>
+          <p:nvPr>
+            <p:ph type="sldImg"/>
+          </p:nvPr>
+        </p:nvSpPr>
+        <p:spPr>
+          <a:xfrm>
+            <a:off x="1440" y="0"/>
+            <a:ext cx="360" cy="720"/>
+          </a:xfrm>
+          <a:prstGeom prst="rect">
+            <a:avLst/>
+          </a:prstGeom>
+          <a:ln w="0">
+            <a:noFill/>
+          </a:ln>
+        </p:spPr>
+      </p:sp>
+      <p:sp>
+        <p:nvSpPr>
+          <p:cNvPr id="96" name="PlaceHolder 2"/>
+          <p:cNvSpPr>
+            <a:spLocks noGrp="1"/>
+          </p:cNvSpPr>
+          <p:nvPr>
+            <p:ph type="body"/>
+          </p:nvPr>
+        </p:nvSpPr>
+        <p:spPr>
+          <a:xfrm>
+            <a:off x="777240" y="4777560"/>
+            <a:ext cx="6217560" cy="4525920"/>
+          </a:xfrm>
+          <a:prstGeom prst="rect">
+            <a:avLst/>
+          </a:prstGeom>
+          <a:noFill/>
+          <a:ln w="0">
+            <a:noFill/>
+          </a:ln>
+        </p:spPr>
+        <p:txBody>
+          <a:bodyPr lIns="0" tIns="0" rIns="0" bIns="0" anchor="t">
+            <a:noAutofit/>
+          </a:bodyPr>
+          <a:p>
+            <a:pPr indent="0" algn="l">
+              <a:buNone/>
+            </a:pPr>
+            <a:r>
+              <a:rPr lang="en-US" sz="2000" b="0" u="none" strike="noStrike">
+                <a:solidFill>
+                  <a:srgbClr val="000000"/>
+                </a:solidFill>
+                <a:effectLst/>
+                <a:uFillTx/>
+                <a:latin typeface="Arial"/>
+                <a:hlinkClick r:id="rId1"/>
+              </a:rPr>
+              <a:t>https://d1.awsstatic.com/architecture-diagrams/ArchitectureDiagrams/aws_redis_realtime_fraud_detection_ra.pdf?did=wp_card&amp;trk=wp_card</a:t>
+            </a:r>
+            <a:r>
+              <a:rPr lang="en-US" sz="2000" b="0" u="none" strike="noStrike">
+                <a:solidFill>
+                  <a:srgbClr val="000000"/>
+                </a:solidFill>
+                <a:effectLst/>
+                <a:uFillTx/>
+                <a:latin typeface="Arial"/>
+              </a:rPr>
+              <a:t> </a:t>
+            </a:r>
+            <a:endParaRPr lang="en-US" sz="2000" b="0" u="none" strike="noStrike">
+              <a:solidFill>
+                <a:srgbClr val="000000"/>
+              </a:solidFill>
+              <a:effectLst/>
+              <a:uFillTx/>
+              <a:latin typeface="Arial"/>
+            </a:endParaRPr>
+          </a:p>
+        </p:txBody>
+      </p:sp>
+    </p:spTree>
+  </p:cSld>
+</p:notes>
+</file>
+
+<file path=ppt/notesSlides/notesSlide16.xml><?xml version="1.0" encoding="utf-8"?>
+<p:notes xmlns:a="http://schemas.openxmlformats.org/drawingml/2006/main" xmlns:p="http://schemas.openxmlformats.org/presentationml/2006/main" xmlns:r="http://schemas.openxmlformats.org/officeDocument/2006/relationships" xmlns:p14="http://schemas.microsoft.com/office/powerpoint/2010/main" xmlns:p15="http://schemas.microsoft.com/office/powerpoint/2012/main" xmlns:mc="http://schemas.openxmlformats.org/markup-compatibility/2006">
+  <p:cSld>
+    <p:spTree>
+      <p:nvGrpSpPr>
+        <p:cNvPr id="1" name=""/>
+        <p:cNvGrpSpPr/>
+        <p:nvPr/>
+      </p:nvGrpSpPr>
+      <p:grpSpPr>
+        <a:xfrm>
+          <a:off x="0" y="0"/>
+          <a:ext cx="0" cy="0"/>
+          <a:chOff x="0" y="0"/>
+          <a:chExt cx="0" cy="0"/>
+        </a:xfrm>
+      </p:grpSpPr>
+      <p:sp>
+        <p:nvSpPr>
+          <p:cNvPr id="97" name="PlaceHolder 1"/>
+          <p:cNvSpPr>
+            <a:spLocks noGrp="1"/>
+          </p:cNvSpPr>
+          <p:nvPr>
+            <p:ph type="sldImg"/>
+          </p:nvPr>
+        </p:nvSpPr>
+        <p:spPr>
+          <a:xfrm>
+            <a:off x="1440" y="0"/>
+            <a:ext cx="360" cy="720"/>
+          </a:xfrm>
+          <a:prstGeom prst="rect">
+            <a:avLst/>
+          </a:prstGeom>
+          <a:ln w="0">
+            <a:noFill/>
+          </a:ln>
+        </p:spPr>
+      </p:sp>
+      <p:sp>
+        <p:nvSpPr>
+          <p:cNvPr id="98" name="PlaceHolder 2"/>
+          <p:cNvSpPr>
+            <a:spLocks noGrp="1"/>
+          </p:cNvSpPr>
+          <p:nvPr>
+            <p:ph type="body"/>
+          </p:nvPr>
+        </p:nvSpPr>
+        <p:spPr>
+          <a:xfrm>
+            <a:off x="777240" y="4777560"/>
+            <a:ext cx="6217560" cy="4525920"/>
+          </a:xfrm>
+          <a:prstGeom prst="rect">
+            <a:avLst/>
+          </a:prstGeom>
+          <a:noFill/>
+          <a:ln w="0">
+            <a:noFill/>
+          </a:ln>
+        </p:spPr>
+        <p:txBody>
+          <a:bodyPr lIns="0" tIns="0" rIns="0" bIns="0" anchor="t">
+            <a:noAutofit/>
+          </a:bodyPr>
+          <a:p>
+            <a:pPr indent="0" algn="l">
+              <a:buNone/>
+            </a:pPr>
+            <a:r>
+              <a:rPr lang="en-US" sz="2000" b="0" u="none" strike="noStrike">
+                <a:solidFill>
+                  <a:srgbClr val="000000"/>
+                </a:solidFill>
+                <a:effectLst/>
+                <a:uFillTx/>
+                <a:latin typeface="Arial"/>
+                <a:hlinkClick r:id="rId1"/>
+              </a:rPr>
+              <a:t>https://d1.awsstatic.com/architecture-diagrams/ArchitectureDiagrams/multi-model-inference-workflow-orchestration-ra.pdf?did=wp_card&amp;trk=wp_card</a:t>
+            </a:r>
+            <a:r>
+              <a:rPr lang="en-US" sz="2000" b="0" u="none" strike="noStrike">
+                <a:solidFill>
+                  <a:srgbClr val="000000"/>
+                </a:solidFill>
+                <a:effectLst/>
+                <a:uFillTx/>
+                <a:latin typeface="Arial"/>
+              </a:rPr>
+              <a:t> </a:t>
+            </a:r>
+            <a:endParaRPr lang="en-US" sz="2000" b="0" u="none" strike="noStrike">
+              <a:solidFill>
+                <a:srgbClr val="000000"/>
+              </a:solidFill>
+              <a:effectLst/>
+              <a:uFillTx/>
+              <a:latin typeface="Arial"/>
+            </a:endParaRPr>
+          </a:p>
+        </p:txBody>
+      </p:sp>
+    </p:spTree>
+  </p:cSld>
+</p:notes>
+</file>
+
+<file path=ppt/notesSlides/notesSlide17.xml><?xml version="1.0" encoding="utf-8"?>
+<p:notes xmlns:a="http://schemas.openxmlformats.org/drawingml/2006/main" xmlns:p="http://schemas.openxmlformats.org/presentationml/2006/main" xmlns:r="http://schemas.openxmlformats.org/officeDocument/2006/relationships" xmlns:p14="http://schemas.microsoft.com/office/powerpoint/2010/main" xmlns:p15="http://schemas.microsoft.com/office/powerpoint/2012/main" xmlns:mc="http://schemas.openxmlformats.org/markup-compatibility/2006">
+  <p:cSld>
+    <p:spTree>
+      <p:nvGrpSpPr>
+        <p:cNvPr id="1" name=""/>
+        <p:cNvGrpSpPr/>
+        <p:nvPr/>
+      </p:nvGrpSpPr>
+      <p:grpSpPr>
+        <a:xfrm>
+          <a:off x="0" y="0"/>
+          <a:ext cx="0" cy="0"/>
+          <a:chOff x="0" y="0"/>
+          <a:chExt cx="0" cy="0"/>
+        </a:xfrm>
+      </p:grpSpPr>
+      <p:sp>
+        <p:nvSpPr>
+          <p:cNvPr id="99" name="PlaceHolder 1"/>
+          <p:cNvSpPr>
+            <a:spLocks noGrp="1"/>
+          </p:cNvSpPr>
+          <p:nvPr>
+            <p:ph type="sldImg"/>
+          </p:nvPr>
+        </p:nvSpPr>
+        <p:spPr>
+          <a:xfrm>
+            <a:off x="533520" y="764280"/>
+            <a:ext cx="6703560" cy="3770280"/>
+          </a:xfrm>
+          <a:prstGeom prst="rect">
+            <a:avLst/>
+          </a:prstGeom>
+          <a:ln w="0">
+            <a:noFill/>
+          </a:ln>
+        </p:spPr>
+      </p:sp>
+      <p:sp>
+        <p:nvSpPr>
+          <p:cNvPr id="100" name="PlaceHolder 2"/>
+          <p:cNvSpPr>
+            <a:spLocks noGrp="1"/>
+          </p:cNvSpPr>
+          <p:nvPr>
+            <p:ph type="body"/>
+          </p:nvPr>
+        </p:nvSpPr>
+        <p:spPr>
+          <a:xfrm>
+            <a:off x="777240" y="4777560"/>
+            <a:ext cx="6216480" cy="4524840"/>
+          </a:xfrm>
+          <a:prstGeom prst="rect">
+            <a:avLst/>
+          </a:prstGeom>
+          <a:noFill/>
+          <a:ln w="0">
+            <a:noFill/>
+          </a:ln>
+        </p:spPr>
+        <p:txBody>
+          <a:bodyPr lIns="0" tIns="0" rIns="0" bIns="0" anchor="t">
+            <a:noAutofit/>
+          </a:bodyPr>
+          <a:p>
+            <a:pPr indent="0" algn="l">
+              <a:lnSpc>
+                <a:spcPct val="100000"/>
+              </a:lnSpc>
+              <a:buNone/>
+              <a:tabLst>
+                <a:tab pos="0" algn="l"/>
+              </a:tabLst>
+            </a:pPr>
+            <a:r>
+              <a:rPr lang="en-US" sz="2000" b="0" u="none" strike="noStrike">
+                <a:solidFill>
+                  <a:srgbClr val="000000"/>
+                </a:solidFill>
+                <a:effectLst/>
+                <a:uFillTx/>
+                <a:latin typeface="Arial"/>
+              </a:rPr>
+              <a:t>  </a:t>
+            </a:r>
+            <a:endParaRPr lang="en-US" sz="2000" b="0" u="none" strike="noStrike">
+              <a:solidFill>
+                <a:srgbClr val="000000"/>
+              </a:solidFill>
+              <a:effectLst/>
+              <a:uFillTx/>
+              <a:latin typeface="Arial"/>
+            </a:endParaRPr>
+          </a:p>
+        </p:txBody>
+      </p:sp>
+    </p:spTree>
+  </p:cSld>
+</p:notes>
+</file>
+
+<file path=ppt/notesSlides/notesSlide18.xml><?xml version="1.0" encoding="utf-8"?>
+<p:notes xmlns:a="http://schemas.openxmlformats.org/drawingml/2006/main" xmlns:p="http://schemas.openxmlformats.org/presentationml/2006/main" xmlns:r="http://schemas.openxmlformats.org/officeDocument/2006/relationships" xmlns:p14="http://schemas.microsoft.com/office/powerpoint/2010/main" xmlns:p15="http://schemas.microsoft.com/office/powerpoint/2012/main" xmlns:mc="http://schemas.openxmlformats.org/markup-compatibility/2006">
+  <p:cSld>
+    <p:spTree>
+      <p:nvGrpSpPr>
+        <p:cNvPr id="1" name=""/>
+        <p:cNvGrpSpPr/>
+        <p:nvPr/>
+      </p:nvGrpSpPr>
+      <p:grpSpPr>
+        <a:xfrm>
+          <a:off x="0" y="0"/>
+          <a:ext cx="0" cy="0"/>
+          <a:chOff x="0" y="0"/>
+          <a:chExt cx="0" cy="0"/>
+        </a:xfrm>
+      </p:grpSpPr>
+      <p:sp>
+        <p:nvSpPr>
+          <p:cNvPr id="101" name="PlaceHolder 1"/>
+          <p:cNvSpPr>
+            <a:spLocks noGrp="1"/>
+          </p:cNvSpPr>
+          <p:nvPr>
+            <p:ph type="sldImg"/>
+          </p:nvPr>
+        </p:nvSpPr>
+        <p:spPr>
+          <a:xfrm>
+            <a:off x="1440" y="0"/>
+            <a:ext cx="360" cy="720"/>
+          </a:xfrm>
+          <a:prstGeom prst="rect">
+            <a:avLst/>
+          </a:prstGeom>
+          <a:ln w="0">
+            <a:noFill/>
+          </a:ln>
+        </p:spPr>
+      </p:sp>
+      <p:sp>
+        <p:nvSpPr>
+          <p:cNvPr id="102" name="PlaceHolder 2"/>
+          <p:cNvSpPr>
+            <a:spLocks noGrp="1"/>
+          </p:cNvSpPr>
+          <p:nvPr>
+            <p:ph type="body"/>
+          </p:nvPr>
+        </p:nvSpPr>
+        <p:spPr>
+          <a:xfrm>
+            <a:off x="777240" y="4777560"/>
+            <a:ext cx="6217560" cy="4525920"/>
+          </a:xfrm>
+          <a:prstGeom prst="rect">
+            <a:avLst/>
+          </a:prstGeom>
+          <a:noFill/>
+          <a:ln w="0">
+            <a:noFill/>
+          </a:ln>
+        </p:spPr>
+        <p:txBody>
+          <a:bodyPr lIns="0" tIns="0" rIns="0" bIns="0" anchor="t">
+            <a:noAutofit/>
+          </a:bodyPr>
+          <a:p>
+            <a:pPr indent="0" algn="l">
+              <a:buNone/>
+            </a:pPr>
+            <a:r>
+              <a:rPr lang="en-US" sz="2000" b="0" u="none" strike="noStrike">
+                <a:solidFill>
+                  <a:srgbClr val="000000"/>
+                </a:solidFill>
+                <a:effectLst/>
+                <a:uFillTx/>
+                <a:latin typeface="Arial"/>
+                <a:hlinkClick r:id="rId1"/>
+              </a:rPr>
+              <a:t>https://aws.amazon.com/blogs/apn/taming-machine-learning-on-aws-with-mlops-a-reference-architecture/</a:t>
+            </a:r>
+            <a:r>
+              <a:rPr lang="en-US" sz="2000" b="0" u="none" strike="noStrike">
+                <a:solidFill>
+                  <a:srgbClr val="000000"/>
+                </a:solidFill>
+                <a:effectLst/>
+                <a:uFillTx/>
+                <a:latin typeface="Arial"/>
+              </a:rPr>
+              <a:t> </a:t>
+            </a:r>
+            <a:endParaRPr lang="en-US" sz="2000" b="0" u="none" strike="noStrike">
+              <a:solidFill>
+                <a:srgbClr val="000000"/>
+              </a:solidFill>
+              <a:effectLst/>
+              <a:uFillTx/>
+              <a:latin typeface="Arial"/>
+            </a:endParaRPr>
+          </a:p>
+        </p:txBody>
+      </p:sp>
+    </p:spTree>
+  </p:cSld>
+</p:notes>
+</file>
+
+<file path=ppt/notesSlides/notesSlide19.xml><?xml version="1.0" encoding="utf-8"?>
+<p:notes xmlns:a="http://schemas.openxmlformats.org/drawingml/2006/main" xmlns:p="http://schemas.openxmlformats.org/presentationml/2006/main" xmlns:r="http://schemas.openxmlformats.org/officeDocument/2006/relationships" xmlns:p14="http://schemas.microsoft.com/office/powerpoint/2010/main" xmlns:p15="http://schemas.microsoft.com/office/powerpoint/2012/main" xmlns:mc="http://schemas.openxmlformats.org/markup-compatibility/2006">
+  <p:cSld>
+    <p:spTree>
+      <p:nvGrpSpPr>
+        <p:cNvPr id="1" name=""/>
+        <p:cNvGrpSpPr/>
+        <p:nvPr/>
+      </p:nvGrpSpPr>
+      <p:grpSpPr>
+        <a:xfrm>
+          <a:off x="0" y="0"/>
+          <a:ext cx="0" cy="0"/>
+          <a:chOff x="0" y="0"/>
+          <a:chExt cx="0" cy="0"/>
+        </a:xfrm>
+      </p:grpSpPr>
+      <p:sp>
+        <p:nvSpPr>
+          <p:cNvPr id="103" name="PlaceHolder 1"/>
+          <p:cNvSpPr>
+            <a:spLocks noGrp="1"/>
+          </p:cNvSpPr>
+          <p:nvPr>
+            <p:ph type="sldImg"/>
+          </p:nvPr>
+        </p:nvSpPr>
+        <p:spPr>
+          <a:xfrm>
+            <a:off x="533520" y="764280"/>
+            <a:ext cx="6703560" cy="3770280"/>
+          </a:xfrm>
+          <a:prstGeom prst="rect">
+            <a:avLst/>
+          </a:prstGeom>
+          <a:ln w="0">
+            <a:noFill/>
+          </a:ln>
+        </p:spPr>
+      </p:sp>
+      <p:sp>
+        <p:nvSpPr>
+          <p:cNvPr id="104" name="PlaceHolder 2"/>
+          <p:cNvSpPr>
+            <a:spLocks noGrp="1"/>
+          </p:cNvSpPr>
+          <p:nvPr>
+            <p:ph type="body"/>
+          </p:nvPr>
+        </p:nvSpPr>
+        <p:spPr>
+          <a:xfrm>
+            <a:off x="777240" y="4777560"/>
+            <a:ext cx="6216480" cy="4524840"/>
+          </a:xfrm>
+          <a:prstGeom prst="rect">
+            <a:avLst/>
+          </a:prstGeom>
+          <a:noFill/>
+          <a:ln w="0">
+            <a:noFill/>
+          </a:ln>
+        </p:spPr>
+        <p:txBody>
+          <a:bodyPr lIns="0" tIns="0" rIns="0" bIns="0" anchor="t">
+            <a:noAutofit/>
+          </a:bodyPr>
+          <a:p>
+            <a:pPr indent="0" algn="l">
+              <a:lnSpc>
+                <a:spcPct val="100000"/>
+              </a:lnSpc>
+              <a:buNone/>
+              <a:tabLst>
+                <a:tab pos="0" algn="l"/>
+              </a:tabLst>
+            </a:pPr>
+            <a:r>
+              <a:rPr lang="en-US" sz="2000" b="0" u="none" strike="noStrike">
+                <a:solidFill>
+                  <a:srgbClr val="000000"/>
+                </a:solidFill>
+                <a:effectLst/>
+                <a:uFillTx/>
+                <a:latin typeface="Arial"/>
+              </a:rPr>
+              <a:t>  </a:t>
             </a:r>
             <a:endParaRPr lang="en-US" sz="2000" b="0" u="none" strike="noStrike">
               <a:solidFill>
@@ -548,7 +1309,7 @@
       </p:grpSpPr>
       <p:sp>
         <p:nvSpPr>
-          <p:cNvPr id="59" name="PlaceHolder 1"/>
+          <p:cNvPr id="75" name="PlaceHolder 1"/>
           <p:cNvSpPr>
             <a:spLocks noGrp="1"/>
           </p:cNvSpPr>
@@ -571,7 +1332,7 @@
       </p:sp>
       <p:sp>
         <p:nvSpPr>
-          <p:cNvPr id="60" name="PlaceHolder 2"/>
+          <p:cNvPr id="76" name="PlaceHolder 2"/>
           <p:cNvSpPr>
             <a:spLocks noGrp="1"/>
           </p:cNvSpPr>
@@ -617,6 +1378,116 @@
                 <a:hlinkClick r:id="rId1"/>
               </a:rPr>
               <a:t>https://medium.com/@vi.ha.engr/bridging-natural-language-and-databases-best-practices-for-llm-generated-sql-fcba0449d4e5</a:t>
+            </a:r>
+            <a:r>
+              <a:rPr lang="en-US" sz="2000" b="0" u="none" strike="noStrike">
+                <a:solidFill>
+                  <a:srgbClr val="000000"/>
+                </a:solidFill>
+                <a:effectLst/>
+                <a:uFillTx/>
+                <a:latin typeface="Arial"/>
+              </a:rPr>
+              <a:t> </a:t>
+            </a:r>
+            <a:endParaRPr lang="en-US" sz="2000" b="0" u="none" strike="noStrike">
+              <a:solidFill>
+                <a:srgbClr val="000000"/>
+              </a:solidFill>
+              <a:effectLst/>
+              <a:uFillTx/>
+              <a:latin typeface="Arial"/>
+            </a:endParaRPr>
+          </a:p>
+        </p:txBody>
+      </p:sp>
+    </p:spTree>
+  </p:cSld>
+</p:notes>
+</file>
+
+<file path=ppt/notesSlides/notesSlide20.xml><?xml version="1.0" encoding="utf-8"?>
+<p:notes xmlns:a="http://schemas.openxmlformats.org/drawingml/2006/main" xmlns:p="http://schemas.openxmlformats.org/presentationml/2006/main" xmlns:r="http://schemas.openxmlformats.org/officeDocument/2006/relationships" xmlns:p14="http://schemas.microsoft.com/office/powerpoint/2010/main" xmlns:p15="http://schemas.microsoft.com/office/powerpoint/2012/main" xmlns:mc="http://schemas.openxmlformats.org/markup-compatibility/2006">
+  <p:cSld>
+    <p:spTree>
+      <p:nvGrpSpPr>
+        <p:cNvPr id="1" name=""/>
+        <p:cNvGrpSpPr/>
+        <p:nvPr/>
+      </p:nvGrpSpPr>
+      <p:grpSpPr>
+        <a:xfrm>
+          <a:off x="0" y="0"/>
+          <a:ext cx="0" cy="0"/>
+          <a:chOff x="0" y="0"/>
+          <a:chExt cx="0" cy="0"/>
+        </a:xfrm>
+      </p:grpSpPr>
+      <p:sp>
+        <p:nvSpPr>
+          <p:cNvPr id="105" name="PlaceHolder 1"/>
+          <p:cNvSpPr>
+            <a:spLocks noGrp="1"/>
+          </p:cNvSpPr>
+          <p:nvPr>
+            <p:ph type="sldImg"/>
+          </p:nvPr>
+        </p:nvSpPr>
+        <p:spPr>
+          <a:xfrm>
+            <a:off x="1440" y="0"/>
+            <a:ext cx="360" cy="720"/>
+          </a:xfrm>
+          <a:prstGeom prst="rect">
+            <a:avLst/>
+          </a:prstGeom>
+          <a:ln w="0">
+            <a:noFill/>
+          </a:ln>
+        </p:spPr>
+      </p:sp>
+      <p:sp>
+        <p:nvSpPr>
+          <p:cNvPr id="106" name="PlaceHolder 2"/>
+          <p:cNvSpPr>
+            <a:spLocks noGrp="1"/>
+          </p:cNvSpPr>
+          <p:nvPr>
+            <p:ph type="body"/>
+          </p:nvPr>
+        </p:nvSpPr>
+        <p:spPr>
+          <a:xfrm>
+            <a:off x="777240" y="4777560"/>
+            <a:ext cx="6217560" cy="4525920"/>
+          </a:xfrm>
+          <a:prstGeom prst="rect">
+            <a:avLst/>
+          </a:prstGeom>
+          <a:noFill/>
+          <a:ln w="0">
+            <a:noFill/>
+          </a:ln>
+        </p:spPr>
+        <p:txBody>
+          <a:bodyPr lIns="0" tIns="0" rIns="0" bIns="0" anchor="t">
+            <a:noAutofit/>
+          </a:bodyPr>
+          <a:p>
+            <a:pPr indent="0" algn="l">
+              <a:buNone/>
+            </a:pPr>
+            <a:r>
+              <a:rPr lang="en-US" sz="2000" b="0" u="none" strike="noStrike">
+                <a:solidFill>
+                  <a:srgbClr val="000000"/>
+                </a:solidFill>
+                <a:effectLst/>
+                <a:uFillTx/>
+                <a:latin typeface="Arial"/>
+                <a:hlinkClick r:id="rId1"/>
+              </a:rPr>
+              <a:t>https://aws.amazon.com/blogs/apn/rapidly-build-a-generative-ai-landing-zone-on-aws/</a:t>
             </a:r>
             <a:r>
               <a:rPr lang="en-US" sz="2000" b="0" u="none" strike="noStrike">
@@ -664,7 +1535,7 @@
       </p:grpSpPr>
       <p:sp>
         <p:nvSpPr>
-          <p:cNvPr id="61" name="PlaceHolder 1"/>
+          <p:cNvPr id="77" name="PlaceHolder 1"/>
           <p:cNvSpPr>
             <a:spLocks noGrp="1"/>
           </p:cNvSpPr>
@@ -675,7 +1546,7 @@
         <p:spPr>
           <a:xfrm>
             <a:off x="1440" y="0"/>
-            <a:ext cx="0" cy="0"/>
+            <a:ext cx="360" cy="720"/>
           </a:xfrm>
           <a:prstGeom prst="rect">
             <a:avLst/>
@@ -687,7 +1558,7 @@
       </p:sp>
       <p:sp>
         <p:nvSpPr>
-          <p:cNvPr id="62" name="PlaceHolder 2"/>
+          <p:cNvPr id="78" name="PlaceHolder 2"/>
           <p:cNvSpPr>
             <a:spLocks noGrp="1"/>
           </p:cNvSpPr>
@@ -698,7 +1569,7 @@
         <p:spPr>
           <a:xfrm>
             <a:off x="777240" y="4777560"/>
-            <a:ext cx="6216480" cy="4524840"/>
+            <a:ext cx="6217560" cy="4525920"/>
           </a:xfrm>
           <a:prstGeom prst="rect">
             <a:avLst/>
@@ -714,13 +1585,7 @@
           </a:bodyPr>
           <a:p>
             <a:pPr indent="0" algn="l">
-              <a:lnSpc>
-                <a:spcPct val="100000"/>
-              </a:lnSpc>
-              <a:buNone/>
-              <a:tabLst>
-                <a:tab pos="0" algn="l"/>
-              </a:tabLst>
+              <a:buNone/>
             </a:pPr>
             <a:r>
               <a:rPr lang="en-US" sz="2000" b="0" u="none" strike="noStrike">
@@ -732,7 +1597,117 @@
                 <a:latin typeface="Arial"/>
                 <a:hlinkClick r:id="rId1"/>
               </a:rPr>
-              <a:t>https://github.com/arunpshankar/LLM-Text-to-SQL-Architectures</a:t>
+              <a:t>https://aws.amazon.com/blogs/security/hardening-the-rag-chatbot-architecture-powered-by-amazon-bedrock-blueprint-for-secure-design-and-anti-pattern-migration/</a:t>
+            </a:r>
+            <a:r>
+              <a:rPr lang="en-US" sz="2000" b="0" u="none" strike="noStrike">
+                <a:solidFill>
+                  <a:srgbClr val="000000"/>
+                </a:solidFill>
+                <a:effectLst/>
+                <a:uFillTx/>
+                <a:latin typeface="Arial"/>
+              </a:rPr>
+              <a:t> </a:t>
+            </a:r>
+            <a:endParaRPr lang="en-US" sz="2000" b="0" u="none" strike="noStrike">
+              <a:solidFill>
+                <a:srgbClr val="000000"/>
+              </a:solidFill>
+              <a:effectLst/>
+              <a:uFillTx/>
+              <a:latin typeface="Arial"/>
+            </a:endParaRPr>
+          </a:p>
+        </p:txBody>
+      </p:sp>
+    </p:spTree>
+  </p:cSld>
+</p:notes>
+</file>
+
+<file path=ppt/notesSlides/notesSlide4.xml><?xml version="1.0" encoding="utf-8"?>
+<p:notes xmlns:a="http://schemas.openxmlformats.org/drawingml/2006/main" xmlns:p="http://schemas.openxmlformats.org/presentationml/2006/main" xmlns:r="http://schemas.openxmlformats.org/officeDocument/2006/relationships" xmlns:p14="http://schemas.microsoft.com/office/powerpoint/2010/main" xmlns:p15="http://schemas.microsoft.com/office/powerpoint/2012/main" xmlns:mc="http://schemas.openxmlformats.org/markup-compatibility/2006">
+  <p:cSld>
+    <p:spTree>
+      <p:nvGrpSpPr>
+        <p:cNvPr id="1" name=""/>
+        <p:cNvGrpSpPr/>
+        <p:nvPr/>
+      </p:nvGrpSpPr>
+      <p:grpSpPr>
+        <a:xfrm>
+          <a:off x="0" y="0"/>
+          <a:ext cx="0" cy="0"/>
+          <a:chOff x="0" y="0"/>
+          <a:chExt cx="0" cy="0"/>
+        </a:xfrm>
+      </p:grpSpPr>
+      <p:sp>
+        <p:nvSpPr>
+          <p:cNvPr id="79" name="PlaceHolder 1"/>
+          <p:cNvSpPr>
+            <a:spLocks noGrp="1"/>
+          </p:cNvSpPr>
+          <p:nvPr>
+            <p:ph type="sldImg"/>
+          </p:nvPr>
+        </p:nvSpPr>
+        <p:spPr>
+          <a:xfrm>
+            <a:off x="1440" y="0"/>
+            <a:ext cx="360" cy="720"/>
+          </a:xfrm>
+          <a:prstGeom prst="rect">
+            <a:avLst/>
+          </a:prstGeom>
+          <a:ln w="0">
+            <a:noFill/>
+          </a:ln>
+        </p:spPr>
+      </p:sp>
+      <p:sp>
+        <p:nvSpPr>
+          <p:cNvPr id="80" name="PlaceHolder 2"/>
+          <p:cNvSpPr>
+            <a:spLocks noGrp="1"/>
+          </p:cNvSpPr>
+          <p:nvPr>
+            <p:ph type="body"/>
+          </p:nvPr>
+        </p:nvSpPr>
+        <p:spPr>
+          <a:xfrm>
+            <a:off x="777240" y="4777560"/>
+            <a:ext cx="6217560" cy="4525920"/>
+          </a:xfrm>
+          <a:prstGeom prst="rect">
+            <a:avLst/>
+          </a:prstGeom>
+          <a:noFill/>
+          <a:ln w="0">
+            <a:noFill/>
+          </a:ln>
+        </p:spPr>
+        <p:txBody>
+          <a:bodyPr lIns="0" tIns="0" rIns="0" bIns="0" anchor="t">
+            <a:noAutofit/>
+          </a:bodyPr>
+          <a:p>
+            <a:pPr indent="0" algn="l">
+              <a:buNone/>
+            </a:pPr>
+            <a:r>
+              <a:rPr lang="en-US" sz="2000" b="0" u="none" strike="noStrike">
+                <a:solidFill>
+                  <a:srgbClr val="000000"/>
+                </a:solidFill>
+                <a:effectLst/>
+                <a:uFillTx/>
+                <a:latin typeface="Arial"/>
+                <a:hlinkClick r:id="rId1"/>
+              </a:rPr>
+              <a:t>https://docs.aws.amazon.com/solutions/similarity-search-based-retrieval-augmented-generation-rag-on-aws/</a:t>
             </a:r>
             <a:r>
               <a:rPr lang="en-US" sz="2000" b="0" u="none" strike="noStrike">
@@ -780,7 +1755,7 @@
       </p:grpSpPr>
       <p:sp>
         <p:nvSpPr>
-          <p:cNvPr id="63" name="PlaceHolder 1"/>
+          <p:cNvPr id="81" name="PlaceHolder 1"/>
           <p:cNvSpPr>
             <a:spLocks noGrp="1"/>
           </p:cNvSpPr>
@@ -790,8 +1765,8 @@
         </p:nvSpPr>
         <p:spPr>
           <a:xfrm>
-            <a:off x="1080" y="-360"/>
-            <a:ext cx="360" cy="360"/>
+            <a:off x="1440" y="0"/>
+            <a:ext cx="360" cy="720"/>
           </a:xfrm>
           <a:prstGeom prst="rect">
             <a:avLst/>
@@ -803,7 +1778,7 @@
       </p:sp>
       <p:sp>
         <p:nvSpPr>
-          <p:cNvPr id="64" name="PlaceHolder 2"/>
+          <p:cNvPr id="82" name="PlaceHolder 2"/>
           <p:cNvSpPr>
             <a:spLocks noGrp="1"/>
           </p:cNvSpPr>
@@ -814,7 +1789,7 @@
         <p:spPr>
           <a:xfrm>
             <a:off x="777240" y="4777560"/>
-            <a:ext cx="6216480" cy="4524840"/>
+            <a:ext cx="6217560" cy="4525920"/>
           </a:xfrm>
           <a:prstGeom prst="rect">
             <a:avLst/>
@@ -830,6 +1805,116 @@
           </a:bodyPr>
           <a:p>
             <a:pPr indent="0" algn="l">
+              <a:buNone/>
+            </a:pPr>
+            <a:r>
+              <a:rPr lang="en-US" sz="2000" b="0" u="none" strike="noStrike">
+                <a:solidFill>
+                  <a:srgbClr val="000000"/>
+                </a:solidFill>
+                <a:effectLst/>
+                <a:uFillTx/>
+                <a:latin typeface="Arial"/>
+                <a:hlinkClick r:id="rId1"/>
+              </a:rPr>
+              <a:t>https://aws-samples.github.io/aws-genai-llm-chatbot/about/architecture.html</a:t>
+            </a:r>
+            <a:r>
+              <a:rPr lang="en-US" sz="2000" b="0" u="none" strike="noStrike">
+                <a:solidFill>
+                  <a:srgbClr val="000000"/>
+                </a:solidFill>
+                <a:effectLst/>
+                <a:uFillTx/>
+                <a:latin typeface="Arial"/>
+              </a:rPr>
+              <a:t> </a:t>
+            </a:r>
+            <a:endParaRPr lang="en-US" sz="2000" b="0" u="none" strike="noStrike">
+              <a:solidFill>
+                <a:srgbClr val="000000"/>
+              </a:solidFill>
+              <a:effectLst/>
+              <a:uFillTx/>
+              <a:latin typeface="Arial"/>
+            </a:endParaRPr>
+          </a:p>
+        </p:txBody>
+      </p:sp>
+    </p:spTree>
+  </p:cSld>
+</p:notes>
+</file>
+
+<file path=ppt/notesSlides/notesSlide6.xml><?xml version="1.0" encoding="utf-8"?>
+<p:notes xmlns:a="http://schemas.openxmlformats.org/drawingml/2006/main" xmlns:p="http://schemas.openxmlformats.org/presentationml/2006/main" xmlns:r="http://schemas.openxmlformats.org/officeDocument/2006/relationships" xmlns:p14="http://schemas.microsoft.com/office/powerpoint/2010/main" xmlns:p15="http://schemas.microsoft.com/office/powerpoint/2012/main" xmlns:mc="http://schemas.openxmlformats.org/markup-compatibility/2006">
+  <p:cSld>
+    <p:spTree>
+      <p:nvGrpSpPr>
+        <p:cNvPr id="1" name=""/>
+        <p:cNvGrpSpPr/>
+        <p:nvPr/>
+      </p:nvGrpSpPr>
+      <p:grpSpPr>
+        <a:xfrm>
+          <a:off x="0" y="0"/>
+          <a:ext cx="0" cy="0"/>
+          <a:chOff x="0" y="0"/>
+          <a:chExt cx="0" cy="0"/>
+        </a:xfrm>
+      </p:grpSpPr>
+      <p:sp>
+        <p:nvSpPr>
+          <p:cNvPr id="83" name="PlaceHolder 1"/>
+          <p:cNvSpPr>
+            <a:spLocks noGrp="1"/>
+          </p:cNvSpPr>
+          <p:nvPr>
+            <p:ph type="sldImg"/>
+          </p:nvPr>
+        </p:nvSpPr>
+        <p:spPr>
+          <a:xfrm>
+            <a:off x="533520" y="764280"/>
+            <a:ext cx="6703560" cy="3770280"/>
+          </a:xfrm>
+          <a:prstGeom prst="rect">
+            <a:avLst/>
+          </a:prstGeom>
+          <a:ln w="0">
+            <a:noFill/>
+          </a:ln>
+        </p:spPr>
+      </p:sp>
+      <p:sp>
+        <p:nvSpPr>
+          <p:cNvPr id="84" name="PlaceHolder 2"/>
+          <p:cNvSpPr>
+            <a:spLocks noGrp="1"/>
+          </p:cNvSpPr>
+          <p:nvPr>
+            <p:ph type="body"/>
+          </p:nvPr>
+        </p:nvSpPr>
+        <p:spPr>
+          <a:xfrm>
+            <a:off x="777240" y="4777560"/>
+            <a:ext cx="6216480" cy="4524840"/>
+          </a:xfrm>
+          <a:prstGeom prst="rect">
+            <a:avLst/>
+          </a:prstGeom>
+          <a:noFill/>
+          <a:ln w="0">
+            <a:noFill/>
+          </a:ln>
+        </p:spPr>
+        <p:txBody>
+          <a:bodyPr lIns="0" tIns="0" rIns="0" bIns="0" anchor="t">
+            <a:noAutofit/>
+          </a:bodyPr>
+          <a:p>
+            <a:pPr indent="0" algn="l">
               <a:lnSpc>
                 <a:spcPct val="100000"/>
               </a:lnSpc>
@@ -848,7 +1933,7 @@
                 <a:latin typeface="Arial"/>
                 <a:hlinkClick r:id="rId1"/>
               </a:rPr>
-              <a:t>https://aws.amazon.com/blogs/machine-learning/build-your-gen-ai-based-text-to-sql-application-using-rag-powered-by-amazon-bedrock-claude-3-sonnet-and-amazon-titan-for-embedding/</a:t>
+              <a:t>https://medium.com/@vi.ha.engr/bridging-natural-language-and-databases-best-practices-for-llm-generated-sql-fcba0449d4e5</a:t>
             </a:r>
             <a:r>
               <a:rPr lang="en-US" sz="2000" b="0" u="none" strike="noStrike">
@@ -896,7 +1981,7 @@
       </p:grpSpPr>
       <p:sp>
         <p:nvSpPr>
-          <p:cNvPr id="65" name="PlaceHolder 1"/>
+          <p:cNvPr id="85" name="PlaceHolder 1"/>
           <p:cNvSpPr>
             <a:spLocks noGrp="1"/>
           </p:cNvSpPr>
@@ -906,8 +1991,8 @@
         </p:nvSpPr>
         <p:spPr>
           <a:xfrm>
-            <a:off x="1440" y="0"/>
-            <a:ext cx="0" cy="0"/>
+            <a:off x="1080" y="-360"/>
+            <a:ext cx="360" cy="360"/>
           </a:xfrm>
           <a:prstGeom prst="rect">
             <a:avLst/>
@@ -919,7 +2004,123 @@
       </p:sp>
       <p:sp>
         <p:nvSpPr>
-          <p:cNvPr id="66" name="PlaceHolder 2"/>
+          <p:cNvPr id="86" name="PlaceHolder 2"/>
+          <p:cNvSpPr>
+            <a:spLocks noGrp="1"/>
+          </p:cNvSpPr>
+          <p:nvPr>
+            <p:ph type="body"/>
+          </p:nvPr>
+        </p:nvSpPr>
+        <p:spPr>
+          <a:xfrm>
+            <a:off x="777240" y="4777560"/>
+            <a:ext cx="6216480" cy="4524840"/>
+          </a:xfrm>
+          <a:prstGeom prst="rect">
+            <a:avLst/>
+          </a:prstGeom>
+          <a:noFill/>
+          <a:ln w="0">
+            <a:noFill/>
+          </a:ln>
+        </p:spPr>
+        <p:txBody>
+          <a:bodyPr lIns="0" tIns="0" rIns="0" bIns="0" anchor="t">
+            <a:noAutofit/>
+          </a:bodyPr>
+          <a:p>
+            <a:pPr indent="0" algn="l">
+              <a:lnSpc>
+                <a:spcPct val="100000"/>
+              </a:lnSpc>
+              <a:buNone/>
+              <a:tabLst>
+                <a:tab pos="0" algn="l"/>
+              </a:tabLst>
+            </a:pPr>
+            <a:r>
+              <a:rPr lang="en-US" sz="2000" b="0" u="none" strike="noStrike">
+                <a:solidFill>
+                  <a:srgbClr val="000000"/>
+                </a:solidFill>
+                <a:effectLst/>
+                <a:uFillTx/>
+                <a:latin typeface="Arial"/>
+                <a:hlinkClick r:id="rId1"/>
+              </a:rPr>
+              <a:t>https://aws.amazon.com/blogs/machine-learning/build-your-gen-ai-based-text-to-sql-application-using-rag-powered-by-amazon-bedrock-claude-3-sonnet-and-amazon-titan-for-embedding/</a:t>
+            </a:r>
+            <a:r>
+              <a:rPr lang="en-US" sz="2000" b="0" u="none" strike="noStrike">
+                <a:solidFill>
+                  <a:srgbClr val="000000"/>
+                </a:solidFill>
+                <a:effectLst/>
+                <a:uFillTx/>
+                <a:latin typeface="Arial"/>
+              </a:rPr>
+              <a:t> </a:t>
+            </a:r>
+            <a:endParaRPr lang="en-US" sz="2000" b="0" u="none" strike="noStrike">
+              <a:solidFill>
+                <a:srgbClr val="000000"/>
+              </a:solidFill>
+              <a:effectLst/>
+              <a:uFillTx/>
+              <a:latin typeface="Arial"/>
+            </a:endParaRPr>
+          </a:p>
+        </p:txBody>
+      </p:sp>
+    </p:spTree>
+  </p:cSld>
+</p:notes>
+</file>
+
+<file path=ppt/notesSlides/notesSlide8.xml><?xml version="1.0" encoding="utf-8"?>
+<p:notes xmlns:a="http://schemas.openxmlformats.org/drawingml/2006/main" xmlns:p="http://schemas.openxmlformats.org/presentationml/2006/main" xmlns:r="http://schemas.openxmlformats.org/officeDocument/2006/relationships" xmlns:p14="http://schemas.microsoft.com/office/powerpoint/2010/main" xmlns:p15="http://schemas.microsoft.com/office/powerpoint/2012/main" xmlns:mc="http://schemas.openxmlformats.org/markup-compatibility/2006">
+  <p:cSld>
+    <p:spTree>
+      <p:nvGrpSpPr>
+        <p:cNvPr id="1" name=""/>
+        <p:cNvGrpSpPr/>
+        <p:nvPr/>
+      </p:nvGrpSpPr>
+      <p:grpSpPr>
+        <a:xfrm>
+          <a:off x="0" y="0"/>
+          <a:ext cx="0" cy="0"/>
+          <a:chOff x="0" y="0"/>
+          <a:chExt cx="0" cy="0"/>
+        </a:xfrm>
+      </p:grpSpPr>
+      <p:sp>
+        <p:nvSpPr>
+          <p:cNvPr id="87" name="PlaceHolder 1"/>
+          <p:cNvSpPr>
+            <a:spLocks noGrp="1"/>
+          </p:cNvSpPr>
+          <p:nvPr>
+            <p:ph type="sldImg"/>
+          </p:nvPr>
+        </p:nvSpPr>
+        <p:spPr>
+          <a:xfrm>
+            <a:off x="1440" y="0"/>
+            <a:ext cx="0" cy="0"/>
+          </a:xfrm>
+          <a:prstGeom prst="rect">
+            <a:avLst/>
+          </a:prstGeom>
+          <a:ln w="0">
+            <a:noFill/>
+          </a:ln>
+        </p:spPr>
+      </p:sp>
+      <p:sp>
+        <p:nvSpPr>
+          <p:cNvPr id="88" name="PlaceHolder 2"/>
           <p:cNvSpPr>
             <a:spLocks noGrp="1"/>
           </p:cNvSpPr>
@@ -1222,7 +2423,7 @@
                 <a:tab pos="0" algn="l"/>
               </a:tabLst>
             </a:pPr>
-            <a:fld id="{849D6F15-3063-4D01-AD4F-817C5F007BFC}" type="slidenum">
+            <a:fld id="{82A4F235-1A84-431B-9AFE-DE57C265E426}" type="slidenum">
               <a:rPr lang="en-US" sz="1400" b="0" u="none" strike="noStrike">
                 <a:solidFill>
                   <a:srgbClr val="000000"/>
@@ -1556,7 +2757,7 @@
                 <a:tab pos="0" algn="l"/>
               </a:tabLst>
             </a:pPr>
-            <a:fld id="{37B23713-1888-4725-AF29-DA5C144E2C08}" type="slidenum">
+            <a:fld id="{E56E9B68-EAD2-4BDB-A478-859FB91752F4}" type="slidenum">
               <a:rPr lang="en-US" sz="1400" b="0" u="none" strike="noStrike">
                 <a:solidFill>
                   <a:srgbClr val="000000"/>
@@ -2750,7 +3951,7 @@
                 <a:tab pos="0" algn="l"/>
               </a:tabLst>
             </a:pPr>
-            <a:fld id="{9C316E66-EB4A-4B53-8F17-E83D6E010F6E}" type="slidenum">
+            <a:fld id="{9CBDD4FE-81B5-4031-B0B1-629339FAF25E}" type="slidenum">
               <a:rPr lang="en-US" sz="1400" b="0" u="none" strike="noStrike">
                 <a:solidFill>
                   <a:srgbClr val="000000"/>
@@ -3084,7 +4285,7 @@
                 <a:tab pos="0" algn="l"/>
               </a:tabLst>
             </a:pPr>
-            <a:fld id="{0CE0BC24-BE9A-464C-A330-C9C001300DD4}" type="slidenum">
+            <a:fld id="{584EAA71-7668-4B56-A55B-E4D725E9E393}" type="slidenum">
               <a:rPr lang="en-US" sz="1400" b="0" u="none" strike="noStrike">
                 <a:solidFill>
                   <a:srgbClr val="000000"/>
@@ -3848,7 +5049,7 @@
                 <a:tab pos="0" algn="l"/>
               </a:tabLst>
             </a:pPr>
-            <a:fld id="{1BEC5948-5AB5-4C47-9F3C-CBD9BC429B30}" type="slidenum">
+            <a:fld id="{5C47E021-CA3B-47C7-8DD3-2303A5D4C26C}" type="slidenum">
               <a:rPr lang="en-US" sz="1400" b="0" u="none" strike="noStrike">
                 <a:solidFill>
                   <a:srgbClr val="000000"/>
@@ -4612,7 +5813,7 @@
                 <a:tab pos="0" algn="l"/>
               </a:tabLst>
             </a:pPr>
-            <a:fld id="{8FC95C93-4287-4C1F-998F-D3C06D579CBB}" type="slidenum">
+            <a:fld id="{A4ADCD89-1097-41E3-869A-7A4F48783468}" type="slidenum">
               <a:rPr lang="en-US" sz="1400" b="0" u="none" strike="noStrike">
                 <a:solidFill>
                   <a:srgbClr val="000000"/>
@@ -5148,6 +6349,770 @@
 </file>
 
 <file path=ppt/slideLayouts/slideLayout7.xml><?xml version="1.0" encoding="utf-8"?>
+<p:sldLayout xmlns:a="http://schemas.openxmlformats.org/drawingml/2006/main" xmlns:p="http://schemas.openxmlformats.org/presentationml/2006/main" xmlns:r="http://schemas.openxmlformats.org/officeDocument/2006/relationships" xmlns:p14="http://schemas.microsoft.com/office/powerpoint/2010/main" xmlns:p15="http://schemas.microsoft.com/office/powerpoint/2012/main" xmlns:mc="http://schemas.openxmlformats.org/markup-compatibility/2006" type="tx" preserve="1">
+  <p:cSld name="Default 6">
+    <p:spTree>
+      <p:nvGrpSpPr>
+        <p:cNvPr id="1" name=""/>
+        <p:cNvGrpSpPr/>
+        <p:nvPr/>
+      </p:nvGrpSpPr>
+      <p:grpSpPr>
+        <a:xfrm>
+          <a:off x="0" y="0"/>
+          <a:ext cx="0" cy="0"/>
+          <a:chOff x="0" y="0"/>
+          <a:chExt cx="0" cy="0"/>
+        </a:xfrm>
+      </p:grpSpPr>
+      <p:sp>
+        <p:nvSpPr>
+          <p:cNvPr id="36" name="PlaceHolder 1"/>
+          <p:cNvSpPr>
+            <a:spLocks noGrp="1"/>
+          </p:cNvSpPr>
+          <p:nvPr>
+            <p:ph type="title"/>
+          </p:nvPr>
+        </p:nvSpPr>
+        <p:spPr>
+          <a:xfrm>
+            <a:off x="504000" y="363600"/>
+            <a:ext cx="9070200" cy="670680"/>
+          </a:xfrm>
+          <a:prstGeom prst="rect">
+            <a:avLst/>
+          </a:prstGeom>
+          <a:noFill/>
+          <a:ln w="0">
+            <a:noFill/>
+          </a:ln>
+        </p:spPr>
+        <p:txBody>
+          <a:bodyPr lIns="0" tIns="0" rIns="0" bIns="0" anchor="ctr">
+            <a:spAutoFit/>
+          </a:bodyPr>
+          <a:lstStyle>
+            <a:lvl1pPr indent="0" algn="l">
+              <a:lnSpc>
+                <a:spcPct val="100000"/>
+              </a:lnSpc>
+              <a:buNone/>
+              <a:tabLst>
+                <a:tab pos="0" algn="l"/>
+              </a:tabLst>
+              <a:defRPr lang="en-US" sz="4400" b="0" u="none" strike="noStrike">
+                <a:solidFill>
+                  <a:srgbClr val="000000"/>
+                </a:solidFill>
+                <a:effectLst/>
+                <a:uFillTx/>
+                <a:latin typeface="Arial"/>
+              </a:defRPr>
+            </a:lvl1pPr>
+          </a:lstStyle>
+          <a:p>
+            <a:pPr indent="0" algn="l">
+              <a:lnSpc>
+                <a:spcPct val="100000"/>
+              </a:lnSpc>
+              <a:buNone/>
+              <a:tabLst>
+                <a:tab pos="0" algn="l"/>
+              </a:tabLst>
+            </a:pPr>
+            <a:r>
+              <a:rPr lang="en-US" sz="4400" b="0" u="none" strike="noStrike">
+                <a:solidFill>
+                  <a:srgbClr val="000000"/>
+                </a:solidFill>
+                <a:effectLst/>
+                <a:uFillTx/>
+                <a:latin typeface="Arial"/>
+              </a:rPr>
+              <a:t>Click to edit the title text format</a:t>
+            </a:r>
+            <a:endParaRPr lang="en-US" sz="4400" b="0" u="none" strike="noStrike">
+              <a:solidFill>
+                <a:srgbClr val="000000"/>
+              </a:solidFill>
+              <a:effectLst/>
+              <a:uFillTx/>
+              <a:latin typeface="Arial"/>
+            </a:endParaRPr>
+          </a:p>
+        </p:txBody>
+      </p:sp>
+      <p:sp>
+        <p:nvSpPr>
+          <p:cNvPr id="37" name="PlaceHolder 2"/>
+          <p:cNvSpPr>
+            <a:spLocks noGrp="1"/>
+          </p:cNvSpPr>
+          <p:nvPr>
+            <p:ph type="ftr" idx="22"/>
+          </p:nvPr>
+        </p:nvSpPr>
+        <p:spPr>
+          <a:xfrm>
+            <a:off x="3447360" y="5165280"/>
+            <a:ext cx="3193560" cy="389160"/>
+          </a:xfrm>
+          <a:prstGeom prst="rect">
+            <a:avLst/>
+          </a:prstGeom>
+          <a:noFill/>
+          <a:ln w="0">
+            <a:noFill/>
+          </a:ln>
+        </p:spPr>
+        <p:txBody>
+          <a:bodyPr lIns="0" tIns="0" rIns="0" bIns="0" anchor="t">
+            <a:noAutofit/>
+          </a:bodyPr>
+          <a:lstStyle>
+            <a:lvl1pPr indent="0" algn="ctr">
+              <a:lnSpc>
+                <a:spcPct val="100000"/>
+              </a:lnSpc>
+              <a:buNone/>
+              <a:tabLst>
+                <a:tab pos="0" algn="l"/>
+              </a:tabLst>
+              <a:defRPr lang="en-US" sz="1400" b="0" u="none" strike="noStrike">
+                <a:solidFill>
+                  <a:srgbClr val="000000"/>
+                </a:solidFill>
+                <a:effectLst/>
+                <a:uFillTx/>
+                <a:latin typeface="Times New Roman"/>
+              </a:defRPr>
+            </a:lvl1pPr>
+          </a:lstStyle>
+          <a:p>
+            <a:pPr indent="0" algn="ctr">
+              <a:lnSpc>
+                <a:spcPct val="100000"/>
+              </a:lnSpc>
+              <a:buNone/>
+              <a:tabLst>
+                <a:tab pos="0" algn="l"/>
+              </a:tabLst>
+            </a:pPr>
+            <a:r>
+              <a:rPr lang="en-US" sz="1400" b="0" u="none" strike="noStrike">
+                <a:solidFill>
+                  <a:srgbClr val="000000"/>
+                </a:solidFill>
+                <a:effectLst/>
+                <a:uFillTx/>
+                <a:latin typeface="Times New Roman"/>
+              </a:rPr>
+              <a:t>&lt;footer&gt;</a:t>
+            </a:r>
+            <a:endParaRPr lang="en-US" sz="1400" b="0" u="none" strike="noStrike">
+              <a:solidFill>
+                <a:srgbClr val="000000"/>
+              </a:solidFill>
+              <a:effectLst/>
+              <a:uFillTx/>
+              <a:latin typeface="Times New Roman"/>
+            </a:endParaRPr>
+          </a:p>
+        </p:txBody>
+      </p:sp>
+      <p:sp>
+        <p:nvSpPr>
+          <p:cNvPr id="38" name="PlaceHolder 3"/>
+          <p:cNvSpPr>
+            <a:spLocks noGrp="1"/>
+          </p:cNvSpPr>
+          <p:nvPr>
+            <p:ph type="sldNum" idx="23"/>
+          </p:nvPr>
+        </p:nvSpPr>
+        <p:spPr>
+          <a:xfrm>
+            <a:off x="7227360" y="5165280"/>
+            <a:ext cx="2346840" cy="389160"/>
+          </a:xfrm>
+          <a:prstGeom prst="rect">
+            <a:avLst/>
+          </a:prstGeom>
+          <a:noFill/>
+          <a:ln w="0">
+            <a:noFill/>
+          </a:ln>
+        </p:spPr>
+        <p:txBody>
+          <a:bodyPr lIns="0" tIns="0" rIns="0" bIns="0" anchor="t">
+            <a:noAutofit/>
+          </a:bodyPr>
+          <a:lstStyle>
+            <a:lvl1pPr indent="0" algn="r">
+              <a:lnSpc>
+                <a:spcPct val="100000"/>
+              </a:lnSpc>
+              <a:buNone/>
+              <a:tabLst>
+                <a:tab pos="0" algn="l"/>
+              </a:tabLst>
+              <a:defRPr lang="en-US" sz="1400" b="0" u="none" strike="noStrike">
+                <a:solidFill>
+                  <a:srgbClr val="000000"/>
+                </a:solidFill>
+                <a:effectLst/>
+                <a:uFillTx/>
+                <a:latin typeface="Times New Roman"/>
+              </a:defRPr>
+            </a:lvl1pPr>
+          </a:lstStyle>
+          <a:p>
+            <a:pPr indent="0" algn="r">
+              <a:lnSpc>
+                <a:spcPct val="100000"/>
+              </a:lnSpc>
+              <a:buNone/>
+              <a:tabLst>
+                <a:tab pos="0" algn="l"/>
+              </a:tabLst>
+            </a:pPr>
+            <a:fld id="{52B69A14-7BE1-4713-9C14-AE6C412BC0FD}" type="slidenum">
+              <a:rPr lang="en-US" sz="1400" b="0" u="none" strike="noStrike">
+                <a:solidFill>
+                  <a:srgbClr val="000000"/>
+                </a:solidFill>
+                <a:effectLst/>
+                <a:uFillTx/>
+                <a:latin typeface="Times New Roman"/>
+              </a:rPr>
+              <a:t>&lt;number&gt;</a:t>
+            </a:fld>
+            <a:endParaRPr lang="en-US" sz="1400" b="0" u="none" strike="noStrike">
+              <a:solidFill>
+                <a:srgbClr val="000000"/>
+              </a:solidFill>
+              <a:effectLst/>
+              <a:uFillTx/>
+              <a:latin typeface="Times New Roman"/>
+            </a:endParaRPr>
+          </a:p>
+        </p:txBody>
+      </p:sp>
+      <p:sp>
+        <p:nvSpPr>
+          <p:cNvPr id="39" name="PlaceHolder 4"/>
+          <p:cNvSpPr>
+            <a:spLocks noGrp="1"/>
+          </p:cNvSpPr>
+          <p:nvPr>
+            <p:ph type="dt" idx="24"/>
+          </p:nvPr>
+        </p:nvSpPr>
+        <p:spPr>
+          <a:xfrm>
+            <a:off x="504000" y="5165280"/>
+            <a:ext cx="2346840" cy="389160"/>
+          </a:xfrm>
+          <a:prstGeom prst="rect">
+            <a:avLst/>
+          </a:prstGeom>
+          <a:noFill/>
+          <a:ln w="0">
+            <a:noFill/>
+          </a:ln>
+        </p:spPr>
+        <p:txBody>
+          <a:bodyPr lIns="0" tIns="0" rIns="0" bIns="0" anchor="t">
+            <a:noAutofit/>
+          </a:bodyPr>
+          <a:lstStyle>
+            <a:lvl1pPr indent="0" algn="l">
+              <a:lnSpc>
+                <a:spcPct val="100000"/>
+              </a:lnSpc>
+              <a:buNone/>
+              <a:tabLst>
+                <a:tab pos="0" algn="l"/>
+              </a:tabLst>
+              <a:defRPr lang="en-US" sz="1400" b="0" u="none" strike="noStrike">
+                <a:solidFill>
+                  <a:srgbClr val="000000"/>
+                </a:solidFill>
+                <a:effectLst/>
+                <a:uFillTx/>
+                <a:latin typeface="Times New Roman"/>
+              </a:defRPr>
+            </a:lvl1pPr>
+          </a:lstStyle>
+          <a:p>
+            <a:pPr indent="0" algn="l">
+              <a:lnSpc>
+                <a:spcPct val="100000"/>
+              </a:lnSpc>
+              <a:buNone/>
+              <a:tabLst>
+                <a:tab pos="0" algn="l"/>
+              </a:tabLst>
+            </a:pPr>
+            <a:r>
+              <a:rPr lang="en-US" sz="1400" b="0" u="none" strike="noStrike">
+                <a:solidFill>
+                  <a:srgbClr val="000000"/>
+                </a:solidFill>
+                <a:effectLst/>
+                <a:uFillTx/>
+                <a:latin typeface="Times New Roman"/>
+              </a:rPr>
+              <a:t>&lt;date/time&gt;</a:t>
+            </a:r>
+            <a:endParaRPr lang="en-US" sz="1400" b="0" u="none" strike="noStrike">
+              <a:solidFill>
+                <a:srgbClr val="000000"/>
+              </a:solidFill>
+              <a:effectLst/>
+              <a:uFillTx/>
+              <a:latin typeface="Times New Roman"/>
+            </a:endParaRPr>
+          </a:p>
+        </p:txBody>
+      </p:sp>
+      <p:sp>
+        <p:nvSpPr>
+          <p:cNvPr id="40" name="PlaceHolder 5"/>
+          <p:cNvSpPr>
+            <a:spLocks noGrp="1"/>
+          </p:cNvSpPr>
+          <p:nvPr>
+            <p:ph type="body"/>
+          </p:nvPr>
+        </p:nvSpPr>
+        <p:spPr>
+          <a:xfrm>
+            <a:off x="504000" y="1326600"/>
+            <a:ext cx="9070920" cy="3287520"/>
+          </a:xfrm>
+          <a:prstGeom prst="rect">
+            <a:avLst/>
+          </a:prstGeom>
+          <a:noFill/>
+          <a:ln w="0">
+            <a:noFill/>
+          </a:ln>
+        </p:spPr>
+        <p:txBody>
+          <a:bodyPr lIns="0" tIns="0" rIns="0" bIns="0" anchor="t">
+            <a:normAutofit/>
+          </a:bodyPr>
+          <a:lstStyle>
+            <a:lvl1pPr algn="l">
+              <a:lnSpc>
+                <a:spcPct val="100000"/>
+              </a:lnSpc>
+              <a:spcBef>
+                <a:spcPts val="1417"/>
+              </a:spcBef>
+              <a:buClr>
+                <a:srgbClr val="000000"/>
+              </a:buClr>
+              <a:buSzPct val="45000"/>
+              <a:buFont typeface="Wingdings" charset="2"/>
+              <a:buChar char=""/>
+              <a:defRPr lang="en-US" sz="3200" b="0" u="none" strike="noStrike">
+                <a:solidFill>
+                  <a:srgbClr val="000000"/>
+                </a:solidFill>
+                <a:effectLst/>
+                <a:uFillTx/>
+                <a:latin typeface="Arial"/>
+              </a:defRPr>
+            </a:lvl1pPr>
+            <a:lvl2pPr lvl="1" algn="l">
+              <a:lnSpc>
+                <a:spcPct val="100000"/>
+              </a:lnSpc>
+              <a:spcBef>
+                <a:spcPts val="1134"/>
+              </a:spcBef>
+              <a:buClr>
+                <a:srgbClr val="000000"/>
+              </a:buClr>
+              <a:buSzPct val="75000"/>
+              <a:buFont typeface="Symbol" charset="2"/>
+              <a:buChar char=""/>
+              <a:defRPr lang="en-US" sz="2800" b="0" u="none" strike="noStrike">
+                <a:solidFill>
+                  <a:srgbClr val="000000"/>
+                </a:solidFill>
+                <a:effectLst/>
+                <a:uFillTx/>
+                <a:latin typeface="Arial"/>
+              </a:defRPr>
+            </a:lvl2pPr>
+            <a:lvl3pPr lvl="2" algn="l">
+              <a:lnSpc>
+                <a:spcPct val="100000"/>
+              </a:lnSpc>
+              <a:spcBef>
+                <a:spcPts val="850"/>
+              </a:spcBef>
+              <a:buClr>
+                <a:srgbClr val="000000"/>
+              </a:buClr>
+              <a:buSzPct val="45000"/>
+              <a:buFont typeface="Wingdings" charset="2"/>
+              <a:buChar char=""/>
+              <a:defRPr lang="en-US" sz="2400" b="0" u="none" strike="noStrike">
+                <a:solidFill>
+                  <a:srgbClr val="000000"/>
+                </a:solidFill>
+                <a:effectLst/>
+                <a:uFillTx/>
+                <a:latin typeface="Arial"/>
+              </a:defRPr>
+            </a:lvl3pPr>
+            <a:lvl4pPr lvl="3" algn="l">
+              <a:lnSpc>
+                <a:spcPct val="100000"/>
+              </a:lnSpc>
+              <a:spcBef>
+                <a:spcPts val="567"/>
+              </a:spcBef>
+              <a:buClr>
+                <a:srgbClr val="000000"/>
+              </a:buClr>
+              <a:buSzPct val="75000"/>
+              <a:buFont typeface="Symbol" charset="2"/>
+              <a:buChar char=""/>
+              <a:defRPr lang="en-US" sz="2000" b="0" u="none" strike="noStrike">
+                <a:solidFill>
+                  <a:srgbClr val="000000"/>
+                </a:solidFill>
+                <a:effectLst/>
+                <a:uFillTx/>
+                <a:latin typeface="Arial"/>
+              </a:defRPr>
+            </a:lvl4pPr>
+            <a:lvl5pPr lvl="4" algn="l">
+              <a:lnSpc>
+                <a:spcPct val="100000"/>
+              </a:lnSpc>
+              <a:spcBef>
+                <a:spcPts val="283"/>
+              </a:spcBef>
+              <a:buClr>
+                <a:srgbClr val="000000"/>
+              </a:buClr>
+              <a:buSzPct val="45000"/>
+              <a:buFont typeface="Wingdings" charset="2"/>
+              <a:buChar char=""/>
+              <a:defRPr lang="en-US" sz="2000" b="0" u="none" strike="noStrike">
+                <a:solidFill>
+                  <a:srgbClr val="000000"/>
+                </a:solidFill>
+                <a:effectLst/>
+                <a:uFillTx/>
+                <a:latin typeface="Arial"/>
+              </a:defRPr>
+            </a:lvl5pPr>
+            <a:lvl6pPr lvl="5" algn="l">
+              <a:lnSpc>
+                <a:spcPct val="100000"/>
+              </a:lnSpc>
+              <a:spcBef>
+                <a:spcPts val="283"/>
+              </a:spcBef>
+              <a:buClr>
+                <a:srgbClr val="000000"/>
+              </a:buClr>
+              <a:buSzPct val="45000"/>
+              <a:buFont typeface="Wingdings" charset="2"/>
+              <a:buChar char=""/>
+              <a:defRPr lang="en-US" sz="2000" b="0" u="none" strike="noStrike">
+                <a:solidFill>
+                  <a:srgbClr val="000000"/>
+                </a:solidFill>
+                <a:effectLst/>
+                <a:uFillTx/>
+                <a:latin typeface="Arial"/>
+              </a:defRPr>
+            </a:lvl6pPr>
+            <a:lvl7pPr lvl="6" algn="l">
+              <a:lnSpc>
+                <a:spcPct val="100000"/>
+              </a:lnSpc>
+              <a:spcBef>
+                <a:spcPts val="283"/>
+              </a:spcBef>
+              <a:buClr>
+                <a:srgbClr val="000000"/>
+              </a:buClr>
+              <a:buSzPct val="45000"/>
+              <a:buFont typeface="Wingdings" charset="2"/>
+              <a:buChar char=""/>
+              <a:defRPr lang="en-US" sz="2000" b="0" u="none" strike="noStrike">
+                <a:solidFill>
+                  <a:srgbClr val="000000"/>
+                </a:solidFill>
+                <a:effectLst/>
+                <a:uFillTx/>
+                <a:latin typeface="Arial"/>
+              </a:defRPr>
+            </a:lvl7pPr>
+          </a:lstStyle>
+          <a:p>
+            <a:pPr marL="432000" indent="-324000" algn="l">
+              <a:lnSpc>
+                <a:spcPct val="100000"/>
+              </a:lnSpc>
+              <a:spcBef>
+                <a:spcPts val="1417"/>
+              </a:spcBef>
+              <a:buClr>
+                <a:srgbClr val="000000"/>
+              </a:buClr>
+              <a:buSzPct val="45000"/>
+              <a:buFont typeface="Wingdings" charset="2"/>
+              <a:buChar char=""/>
+            </a:pPr>
+            <a:r>
+              <a:rPr lang="en-US" sz="3200" b="0" u="none" strike="noStrike">
+                <a:solidFill>
+                  <a:srgbClr val="000000"/>
+                </a:solidFill>
+                <a:effectLst/>
+                <a:uFillTx/>
+                <a:latin typeface="Arial"/>
+              </a:rPr>
+              <a:t>Click to edit the outline text format</a:t>
+            </a:r>
+            <a:endParaRPr lang="en-US" sz="3200" b="0" u="none" strike="noStrike">
+              <a:solidFill>
+                <a:srgbClr val="000000"/>
+              </a:solidFill>
+              <a:effectLst/>
+              <a:uFillTx/>
+              <a:latin typeface="Arial"/>
+            </a:endParaRPr>
+          </a:p>
+          <a:p>
+            <a:pPr marL="864000" lvl="1" indent="-324000" algn="l">
+              <a:lnSpc>
+                <a:spcPct val="100000"/>
+              </a:lnSpc>
+              <a:spcBef>
+                <a:spcPts val="1134"/>
+              </a:spcBef>
+              <a:buClr>
+                <a:srgbClr val="000000"/>
+              </a:buClr>
+              <a:buSzPct val="75000"/>
+              <a:buFont typeface="Symbol" charset="2"/>
+              <a:buChar char=""/>
+            </a:pPr>
+            <a:r>
+              <a:rPr lang="en-US" sz="2800" b="0" u="none" strike="noStrike">
+                <a:solidFill>
+                  <a:srgbClr val="000000"/>
+                </a:solidFill>
+                <a:effectLst/>
+                <a:uFillTx/>
+                <a:latin typeface="Arial"/>
+              </a:rPr>
+              <a:t>Second Outline Level</a:t>
+            </a:r>
+            <a:endParaRPr lang="en-US" sz="2800" b="0" u="none" strike="noStrike">
+              <a:solidFill>
+                <a:srgbClr val="000000"/>
+              </a:solidFill>
+              <a:effectLst/>
+              <a:uFillTx/>
+              <a:latin typeface="Arial"/>
+            </a:endParaRPr>
+          </a:p>
+          <a:p>
+            <a:pPr marL="1296000" lvl="2" indent="-288000" algn="l">
+              <a:lnSpc>
+                <a:spcPct val="100000"/>
+              </a:lnSpc>
+              <a:spcBef>
+                <a:spcPts val="850"/>
+              </a:spcBef>
+              <a:buClr>
+                <a:srgbClr val="000000"/>
+              </a:buClr>
+              <a:buSzPct val="45000"/>
+              <a:buFont typeface="Wingdings" charset="2"/>
+              <a:buChar char=""/>
+            </a:pPr>
+            <a:r>
+              <a:rPr lang="en-US" sz="2400" b="0" u="none" strike="noStrike">
+                <a:solidFill>
+                  <a:srgbClr val="000000"/>
+                </a:solidFill>
+                <a:effectLst/>
+                <a:uFillTx/>
+                <a:latin typeface="Arial"/>
+              </a:rPr>
+              <a:t>Third Outline Level</a:t>
+            </a:r>
+            <a:endParaRPr lang="en-US" sz="2400" b="0" u="none" strike="noStrike">
+              <a:solidFill>
+                <a:srgbClr val="000000"/>
+              </a:solidFill>
+              <a:effectLst/>
+              <a:uFillTx/>
+              <a:latin typeface="Arial"/>
+            </a:endParaRPr>
+          </a:p>
+          <a:p>
+            <a:pPr marL="1728000" lvl="3" indent="-216000" algn="l">
+              <a:lnSpc>
+                <a:spcPct val="100000"/>
+              </a:lnSpc>
+              <a:spcBef>
+                <a:spcPts val="567"/>
+              </a:spcBef>
+              <a:buClr>
+                <a:srgbClr val="000000"/>
+              </a:buClr>
+              <a:buSzPct val="75000"/>
+              <a:buFont typeface="Symbol" charset="2"/>
+              <a:buChar char=""/>
+            </a:pPr>
+            <a:r>
+              <a:rPr lang="en-US" sz="2000" b="0" u="none" strike="noStrike">
+                <a:solidFill>
+                  <a:srgbClr val="000000"/>
+                </a:solidFill>
+                <a:effectLst/>
+                <a:uFillTx/>
+                <a:latin typeface="Arial"/>
+              </a:rPr>
+              <a:t>Fourth Outline Level</a:t>
+            </a:r>
+            <a:endParaRPr lang="en-US" sz="2000" b="0" u="none" strike="noStrike">
+              <a:solidFill>
+                <a:srgbClr val="000000"/>
+              </a:solidFill>
+              <a:effectLst/>
+              <a:uFillTx/>
+              <a:latin typeface="Arial"/>
+            </a:endParaRPr>
+          </a:p>
+          <a:p>
+            <a:pPr marL="2160000" lvl="4" indent="-216000" algn="l">
+              <a:lnSpc>
+                <a:spcPct val="100000"/>
+              </a:lnSpc>
+              <a:spcBef>
+                <a:spcPts val="283"/>
+              </a:spcBef>
+              <a:buClr>
+                <a:srgbClr val="000000"/>
+              </a:buClr>
+              <a:buSzPct val="45000"/>
+              <a:buFont typeface="Wingdings" charset="2"/>
+              <a:buChar char=""/>
+            </a:pPr>
+            <a:r>
+              <a:rPr lang="en-US" sz="2000" b="0" u="none" strike="noStrike">
+                <a:solidFill>
+                  <a:srgbClr val="000000"/>
+                </a:solidFill>
+                <a:effectLst/>
+                <a:uFillTx/>
+                <a:latin typeface="Arial"/>
+              </a:rPr>
+              <a:t>Fifth Outline Level</a:t>
+            </a:r>
+            <a:endParaRPr lang="en-US" sz="2000" b="0" u="none" strike="noStrike">
+              <a:solidFill>
+                <a:srgbClr val="000000"/>
+              </a:solidFill>
+              <a:effectLst/>
+              <a:uFillTx/>
+              <a:latin typeface="Arial"/>
+            </a:endParaRPr>
+          </a:p>
+          <a:p>
+            <a:pPr marL="2592000" lvl="5" indent="-216000" algn="l">
+              <a:lnSpc>
+                <a:spcPct val="100000"/>
+              </a:lnSpc>
+              <a:spcBef>
+                <a:spcPts val="283"/>
+              </a:spcBef>
+              <a:buClr>
+                <a:srgbClr val="000000"/>
+              </a:buClr>
+              <a:buSzPct val="45000"/>
+              <a:buFont typeface="Wingdings" charset="2"/>
+              <a:buChar char=""/>
+            </a:pPr>
+            <a:r>
+              <a:rPr lang="en-US" sz="2000" b="0" u="none" strike="noStrike">
+                <a:solidFill>
+                  <a:srgbClr val="000000"/>
+                </a:solidFill>
+                <a:effectLst/>
+                <a:uFillTx/>
+                <a:latin typeface="Arial"/>
+              </a:rPr>
+              <a:t>Sixth Outline Level</a:t>
+            </a:r>
+            <a:endParaRPr lang="en-US" sz="2000" b="0" u="none" strike="noStrike">
+              <a:solidFill>
+                <a:srgbClr val="000000"/>
+              </a:solidFill>
+              <a:effectLst/>
+              <a:uFillTx/>
+              <a:latin typeface="Arial"/>
+            </a:endParaRPr>
+          </a:p>
+          <a:p>
+            <a:pPr marL="3024000" lvl="6" indent="-216000" algn="l">
+              <a:lnSpc>
+                <a:spcPct val="100000"/>
+              </a:lnSpc>
+              <a:spcBef>
+                <a:spcPts val="283"/>
+              </a:spcBef>
+              <a:buClr>
+                <a:srgbClr val="000000"/>
+              </a:buClr>
+              <a:buSzPct val="45000"/>
+              <a:buFont typeface="Wingdings" charset="2"/>
+              <a:buChar char=""/>
+            </a:pPr>
+            <a:r>
+              <a:rPr lang="en-US" sz="2000" b="0" u="none" strike="noStrike">
+                <a:solidFill>
+                  <a:srgbClr val="000000"/>
+                </a:solidFill>
+                <a:effectLst/>
+                <a:uFillTx/>
+                <a:latin typeface="Arial"/>
+              </a:rPr>
+              <a:t>Seventh Outline Level</a:t>
+            </a:r>
+            <a:endParaRPr lang="en-US" sz="2000" b="0" u="none" strike="noStrike">
+              <a:solidFill>
+                <a:srgbClr val="000000"/>
+              </a:solidFill>
+              <a:effectLst/>
+              <a:uFillTx/>
+              <a:latin typeface="Arial"/>
+            </a:endParaRPr>
+          </a:p>
+        </p:txBody>
+      </p:sp>
+    </p:spTree>
+  </p:cSld>
+</p:sldLayout>
+</file>
+
+<file path=ppt/slideLayouts/slideLayout8.xml><?xml version="1.0" encoding="utf-8"?>
 <p:sldLayout xmlns:a="http://schemas.openxmlformats.org/drawingml/2006/main" xmlns:p="http://schemas.openxmlformats.org/presentationml/2006/main" xmlns:r="http://schemas.openxmlformats.org/officeDocument/2006/relationships" xmlns:p14="http://schemas.microsoft.com/office/powerpoint/2010/main" xmlns:p15="http://schemas.microsoft.com/office/powerpoint/2012/main" xmlns:mc="http://schemas.openxmlformats.org/markup-compatibility/2006" type="title" preserve="1">
   <p:cSld name="Default 6">
     <p:spTree>
@@ -5376,7 +7341,7 @@
                 <a:tab pos="0" algn="l"/>
               </a:tabLst>
             </a:pPr>
-            <a:fld id="{A9E0C999-BC72-44DF-8805-5C9A599DDE71}" type="slidenum">
+            <a:fld id="{0CF14964-BF22-4419-BC66-C9E44FF1CB85}" type="slidenum">
               <a:rPr lang="en-US" sz="1400" b="0" u="none" strike="noStrike">
                 <a:solidFill>
                   <a:srgbClr val="000000"/>
@@ -5939,6 +7904,7 @@
     <p:sldLayoutId id="2147483653" r:id="rId6"/>
     <p:sldLayoutId id="2147483654" r:id="rId7"/>
     <p:sldLayoutId id="2147483655" r:id="rId8"/>
+    <p:sldLayoutId id="2147483656" r:id="rId9"/>
   </p:sldLayoutIdLst>
 </p:sldMaster>
 </file>
@@ -5962,7 +7928,7 @@
       </p:grpSpPr>
       <p:sp>
         <p:nvSpPr>
-          <p:cNvPr id="42" name="PlaceHolder 1"/>
+          <p:cNvPr id="47" name="PlaceHolder 1"/>
           <p:cNvSpPr>
             <a:spLocks noGrp="1"/>
           </p:cNvSpPr>
@@ -6082,18 +8048,18 @@
       </p:grpSpPr>
       <p:sp>
         <p:nvSpPr>
-          <p:cNvPr id="57" name="PlaceHolder 1"/>
+          <p:cNvPr id="61" name="PlaceHolder 1"/>
           <p:cNvSpPr>
             <a:spLocks noGrp="1"/>
           </p:cNvSpPr>
           <p:nvPr>
-            <p:ph type="subTitle"/>
+            <p:ph type="title"/>
           </p:nvPr>
         </p:nvSpPr>
         <p:spPr>
           <a:xfrm>
-            <a:off x="504000" y="1325160"/>
-            <a:ext cx="9070200" cy="3289680"/>
+            <a:off x="504000" y="224640"/>
+            <a:ext cx="9070920" cy="947880"/>
           </a:xfrm>
           <a:prstGeom prst="rect">
             <a:avLst/>
@@ -6112,9 +8078,6 @@
               <a:lnSpc>
                 <a:spcPct val="100000"/>
               </a:lnSpc>
-              <a:spcBef>
-                <a:spcPts val="1417"/>
-              </a:spcBef>
               <a:buNone/>
               <a:tabLst>
                 <a:tab pos="0" algn="l"/>
@@ -6129,7 +8092,7 @@
                 <a:uFillTx/>
                 <a:latin typeface="Arial"/>
               </a:rPr>
-              <a:t>Enterprise-level</a:t>
+              <a:t>RAG Pipeline</a:t>
             </a:r>
             <a:endParaRPr lang="en-US" sz="4400" b="0" u="none" strike="noStrike">
               <a:solidFill>
@@ -6142,6 +8105,30 @@
           </a:p>
         </p:txBody>
       </p:sp>
+      <p:pic>
+        <p:nvPicPr>
+          <p:cNvPr id="62" name=""/>
+          <p:cNvPicPr/>
+          <p:nvPr/>
+        </p:nvPicPr>
+        <p:blipFill>
+          <a:blip r:embed="rId1"/>
+          <a:stretch/>
+        </p:blipFill>
+        <p:spPr>
+          <a:xfrm>
+            <a:off x="363960" y="1513080"/>
+            <a:ext cx="9430920" cy="3715560"/>
+          </a:xfrm>
+          <a:prstGeom prst="rect">
+            <a:avLst/>
+          </a:prstGeom>
+          <a:noFill/>
+          <a:ln w="0">
+            <a:noFill/>
+          </a:ln>
+        </p:spPr>
+      </p:pic>
     </p:spTree>
   </p:cSld>
   <mc:AlternateContent>
@@ -6172,9 +8159,101 @@
           <a:chExt cx="0" cy="0"/>
         </a:xfrm>
       </p:grpSpPr>
+      <p:sp>
+        <p:nvSpPr>
+          <p:cNvPr id="63" name="PlaceHolder 1"/>
+          <p:cNvSpPr>
+            <a:spLocks noGrp="1"/>
+          </p:cNvSpPr>
+          <p:nvPr>
+            <p:ph type="subTitle"/>
+          </p:nvPr>
+        </p:nvSpPr>
+        <p:spPr>
+          <a:xfrm>
+            <a:off x="504000" y="1325160"/>
+            <a:ext cx="9070200" cy="3289680"/>
+          </a:xfrm>
+          <a:prstGeom prst="rect">
+            <a:avLst/>
+          </a:prstGeom>
+          <a:noFill/>
+          <a:ln w="0">
+            <a:noFill/>
+          </a:ln>
+        </p:spPr>
+        <p:txBody>
+          <a:bodyPr lIns="0" tIns="0" rIns="0" bIns="0" anchor="ctr">
+            <a:spAutoFit/>
+          </a:bodyPr>
+          <a:p>
+            <a:pPr indent="0" algn="ctr">
+              <a:lnSpc>
+                <a:spcPct val="100000"/>
+              </a:lnSpc>
+              <a:spcBef>
+                <a:spcPts val="1417"/>
+              </a:spcBef>
+              <a:buNone/>
+              <a:tabLst>
+                <a:tab pos="0" algn="l"/>
+              </a:tabLst>
+            </a:pPr>
+            <a:r>
+              <a:rPr lang="en-US" sz="4400" b="0" u="none" strike="noStrike">
+                <a:solidFill>
+                  <a:srgbClr val="000000"/>
+                </a:solidFill>
+                <a:effectLst/>
+                <a:uFillTx/>
+                <a:latin typeface="Arial"/>
+              </a:rPr>
+              <a:t>Enterprise-level</a:t>
+            </a:r>
+            <a:endParaRPr lang="en-US" sz="4400" b="0" u="none" strike="noStrike">
+              <a:solidFill>
+                <a:srgbClr val="000000"/>
+              </a:solidFill>
+              <a:effectLst/>
+              <a:uFillTx/>
+              <a:latin typeface="Arial"/>
+            </a:endParaRPr>
+          </a:p>
+        </p:txBody>
+      </p:sp>
+    </p:spTree>
+  </p:cSld>
+  <mc:AlternateContent>
+    <mc:Choice Requires="p14">
+      <p:transition spd="slow" p14:dur="2000"/>
+    </mc:Choice>
+    <mc:Fallback>
+      <p:transition spd="slow"/>
+    </mc:Fallback>
+  </mc:AlternateContent>
+</p:sld>
+</file>
+
+<file path=ppt/slides/slide12.xml><?xml version="1.0" encoding="utf-8"?>
+<p:sld xmlns:a="http://schemas.openxmlformats.org/drawingml/2006/main" xmlns:p="http://schemas.openxmlformats.org/presentationml/2006/main" xmlns:r="http://schemas.openxmlformats.org/officeDocument/2006/relationships" xmlns:p14="http://schemas.microsoft.com/office/powerpoint/2010/main" xmlns:p15="http://schemas.microsoft.com/office/powerpoint/2012/main" xmlns:mc="http://schemas.openxmlformats.org/markup-compatibility/2006">
+  <p:cSld>
+    <p:spTree>
+      <p:nvGrpSpPr>
+        <p:cNvPr id="1" name=""/>
+        <p:cNvGrpSpPr/>
+        <p:nvPr/>
+      </p:nvGrpSpPr>
+      <p:grpSpPr>
+        <a:xfrm>
+          <a:off x="0" y="0"/>
+          <a:ext cx="0" cy="0"/>
+          <a:chOff x="0" y="0"/>
+          <a:chExt cx="0" cy="0"/>
+        </a:xfrm>
+      </p:grpSpPr>
       <p:pic>
         <p:nvPicPr>
-          <p:cNvPr id="58" name=""/>
+          <p:cNvPr id="64" name=""/>
           <p:cNvPicPr/>
           <p:nvPr/>
         </p:nvPicPr>
@@ -6196,6 +8275,588 @@
           </a:ln>
         </p:spPr>
       </p:pic>
+    </p:spTree>
+  </p:cSld>
+  <mc:AlternateContent>
+    <mc:Choice Requires="p14">
+      <p:transition spd="slow" p14:dur="2000"/>
+    </mc:Choice>
+    <mc:Fallback>
+      <p:transition spd="slow"/>
+    </mc:Fallback>
+  </mc:AlternateContent>
+</p:sld>
+</file>
+
+<file path=ppt/slides/slide13.xml><?xml version="1.0" encoding="utf-8"?>
+<p:sld xmlns:a="http://schemas.openxmlformats.org/drawingml/2006/main" xmlns:p="http://schemas.openxmlformats.org/presentationml/2006/main" xmlns:r="http://schemas.openxmlformats.org/officeDocument/2006/relationships" xmlns:p14="http://schemas.microsoft.com/office/powerpoint/2010/main" xmlns:p15="http://schemas.microsoft.com/office/powerpoint/2012/main" xmlns:mc="http://schemas.openxmlformats.org/markup-compatibility/2006">
+  <p:cSld>
+    <p:spTree>
+      <p:nvGrpSpPr>
+        <p:cNvPr id="1" name=""/>
+        <p:cNvGrpSpPr/>
+        <p:nvPr/>
+      </p:nvGrpSpPr>
+      <p:grpSpPr>
+        <a:xfrm>
+          <a:off x="0" y="0"/>
+          <a:ext cx="0" cy="0"/>
+          <a:chOff x="0" y="0"/>
+          <a:chExt cx="0" cy="0"/>
+        </a:xfrm>
+      </p:grpSpPr>
+      <p:sp>
+        <p:nvSpPr>
+          <p:cNvPr id="65" name="PlaceHolder 1"/>
+          <p:cNvSpPr>
+            <a:spLocks noGrp="1"/>
+          </p:cNvSpPr>
+          <p:nvPr>
+            <p:ph type="title"/>
+          </p:nvPr>
+        </p:nvSpPr>
+        <p:spPr>
+          <a:xfrm>
+            <a:off x="504000" y="363600"/>
+            <a:ext cx="9070200" cy="670680"/>
+          </a:xfrm>
+          <a:prstGeom prst="rect">
+            <a:avLst/>
+          </a:prstGeom>
+          <a:noFill/>
+          <a:ln w="0">
+            <a:noFill/>
+          </a:ln>
+        </p:spPr>
+        <p:txBody>
+          <a:bodyPr lIns="0" tIns="0" rIns="0" bIns="0" anchor="ctr">
+            <a:spAutoFit/>
+          </a:bodyPr>
+          <a:p>
+            <a:pPr indent="0" algn="l">
+              <a:buNone/>
+              <a:tabLst>
+                <a:tab pos="0" algn="l"/>
+              </a:tabLst>
+            </a:pPr>
+            <a:endParaRPr lang="en-US" sz="4400" b="0" u="none" strike="noStrike">
+              <a:solidFill>
+                <a:srgbClr val="000000"/>
+              </a:solidFill>
+              <a:effectLst/>
+              <a:uFillTx/>
+              <a:latin typeface="Arial"/>
+            </a:endParaRPr>
+          </a:p>
+        </p:txBody>
+      </p:sp>
+      <p:pic>
+        <p:nvPicPr>
+          <p:cNvPr id="66" name=""/>
+          <p:cNvPicPr/>
+          <p:nvPr/>
+        </p:nvPicPr>
+        <p:blipFill>
+          <a:blip r:embed="rId1"/>
+          <a:stretch/>
+        </p:blipFill>
+        <p:spPr>
+          <a:xfrm>
+            <a:off x="1371600" y="9000"/>
+            <a:ext cx="7378920" cy="5670360"/>
+          </a:xfrm>
+          <a:prstGeom prst="rect">
+            <a:avLst/>
+          </a:prstGeom>
+          <a:noFill/>
+          <a:ln w="0">
+            <a:noFill/>
+          </a:ln>
+        </p:spPr>
+      </p:pic>
+    </p:spTree>
+  </p:cSld>
+  <mc:AlternateContent>
+    <mc:Choice Requires="p14">
+      <p:transition spd="slow" p14:dur="2000"/>
+    </mc:Choice>
+    <mc:Fallback>
+      <p:transition spd="slow"/>
+    </mc:Fallback>
+  </mc:AlternateContent>
+</p:sld>
+</file>
+
+<file path=ppt/slides/slide14.xml><?xml version="1.0" encoding="utf-8"?>
+<p:sld xmlns:a="http://schemas.openxmlformats.org/drawingml/2006/main" xmlns:p="http://schemas.openxmlformats.org/presentationml/2006/main" xmlns:r="http://schemas.openxmlformats.org/officeDocument/2006/relationships" xmlns:p14="http://schemas.microsoft.com/office/powerpoint/2010/main" xmlns:p15="http://schemas.microsoft.com/office/powerpoint/2012/main" xmlns:mc="http://schemas.openxmlformats.org/markup-compatibility/2006">
+  <p:cSld>
+    <p:spTree>
+      <p:nvGrpSpPr>
+        <p:cNvPr id="1" name=""/>
+        <p:cNvGrpSpPr/>
+        <p:nvPr/>
+      </p:nvGrpSpPr>
+      <p:grpSpPr>
+        <a:xfrm>
+          <a:off x="0" y="0"/>
+          <a:ext cx="0" cy="0"/>
+          <a:chOff x="0" y="0"/>
+          <a:chExt cx="0" cy="0"/>
+        </a:xfrm>
+      </p:grpSpPr>
+      <p:sp>
+        <p:nvSpPr>
+          <p:cNvPr id="67" name="PlaceHolder 1"/>
+          <p:cNvSpPr>
+            <a:spLocks noGrp="1"/>
+          </p:cNvSpPr>
+          <p:nvPr>
+            <p:ph type="subTitle"/>
+          </p:nvPr>
+        </p:nvSpPr>
+        <p:spPr>
+          <a:xfrm>
+            <a:off x="504000" y="1325160"/>
+            <a:ext cx="9070200" cy="3289680"/>
+          </a:xfrm>
+          <a:prstGeom prst="rect">
+            <a:avLst/>
+          </a:prstGeom>
+          <a:noFill/>
+          <a:ln w="0">
+            <a:noFill/>
+          </a:ln>
+        </p:spPr>
+        <p:txBody>
+          <a:bodyPr lIns="0" tIns="0" rIns="0" bIns="0" anchor="ctr">
+            <a:spAutoFit/>
+          </a:bodyPr>
+          <a:p>
+            <a:pPr indent="0" algn="ctr">
+              <a:lnSpc>
+                <a:spcPct val="100000"/>
+              </a:lnSpc>
+              <a:spcBef>
+                <a:spcPts val="1417"/>
+              </a:spcBef>
+              <a:buNone/>
+              <a:tabLst>
+                <a:tab pos="0" algn="l"/>
+              </a:tabLst>
+            </a:pPr>
+            <a:r>
+              <a:rPr lang="en-US" sz="4400" b="0" u="none" strike="noStrike">
+                <a:solidFill>
+                  <a:srgbClr val="000000"/>
+                </a:solidFill>
+                <a:effectLst/>
+                <a:uFillTx/>
+                <a:latin typeface="Arial"/>
+              </a:rPr>
+              <a:t>Traditional ML</a:t>
+            </a:r>
+            <a:endParaRPr lang="en-US" sz="4400" b="0" u="none" strike="noStrike">
+              <a:solidFill>
+                <a:srgbClr val="000000"/>
+              </a:solidFill>
+              <a:effectLst/>
+              <a:uFillTx/>
+              <a:latin typeface="Arial"/>
+            </a:endParaRPr>
+          </a:p>
+        </p:txBody>
+      </p:sp>
+    </p:spTree>
+  </p:cSld>
+  <mc:AlternateContent>
+    <mc:Choice Requires="p14">
+      <p:transition spd="slow" p14:dur="2000"/>
+    </mc:Choice>
+    <mc:Fallback>
+      <p:transition spd="slow"/>
+    </mc:Fallback>
+  </mc:AlternateContent>
+</p:sld>
+</file>
+
+<file path=ppt/slides/slide15.xml><?xml version="1.0" encoding="utf-8"?>
+<p:sld xmlns:a="http://schemas.openxmlformats.org/drawingml/2006/main" xmlns:p="http://schemas.openxmlformats.org/presentationml/2006/main" xmlns:r="http://schemas.openxmlformats.org/officeDocument/2006/relationships" xmlns:p14="http://schemas.microsoft.com/office/powerpoint/2010/main" xmlns:p15="http://schemas.microsoft.com/office/powerpoint/2012/main" xmlns:mc="http://schemas.openxmlformats.org/markup-compatibility/2006">
+  <p:cSld>
+    <p:spTree>
+      <p:nvGrpSpPr>
+        <p:cNvPr id="1" name=""/>
+        <p:cNvGrpSpPr/>
+        <p:nvPr/>
+      </p:nvGrpSpPr>
+      <p:grpSpPr>
+        <a:xfrm>
+          <a:off x="0" y="0"/>
+          <a:ext cx="0" cy="0"/>
+          <a:chOff x="0" y="0"/>
+          <a:chExt cx="0" cy="0"/>
+        </a:xfrm>
+      </p:grpSpPr>
+      <p:pic>
+        <p:nvPicPr>
+          <p:cNvPr id="68" name=""/>
+          <p:cNvPicPr/>
+          <p:nvPr/>
+        </p:nvPicPr>
+        <p:blipFill>
+          <a:blip r:embed="rId1"/>
+          <a:stretch/>
+        </p:blipFill>
+        <p:spPr>
+          <a:xfrm>
+            <a:off x="0" y="34560"/>
+            <a:ext cx="10080720" cy="5600160"/>
+          </a:xfrm>
+          <a:prstGeom prst="rect">
+            <a:avLst/>
+          </a:prstGeom>
+          <a:noFill/>
+          <a:ln w="0">
+            <a:noFill/>
+          </a:ln>
+        </p:spPr>
+      </p:pic>
+    </p:spTree>
+  </p:cSld>
+  <mc:AlternateContent>
+    <mc:Choice Requires="p14">
+      <p:transition spd="slow" p14:dur="2000"/>
+    </mc:Choice>
+    <mc:Fallback>
+      <p:transition spd="slow"/>
+    </mc:Fallback>
+  </mc:AlternateContent>
+</p:sld>
+</file>
+
+<file path=ppt/slides/slide16.xml><?xml version="1.0" encoding="utf-8"?>
+<p:sld xmlns:a="http://schemas.openxmlformats.org/drawingml/2006/main" xmlns:p="http://schemas.openxmlformats.org/presentationml/2006/main" xmlns:r="http://schemas.openxmlformats.org/officeDocument/2006/relationships" xmlns:p14="http://schemas.microsoft.com/office/powerpoint/2010/main" xmlns:p15="http://schemas.microsoft.com/office/powerpoint/2012/main" xmlns:mc="http://schemas.openxmlformats.org/markup-compatibility/2006">
+  <p:cSld>
+    <p:spTree>
+      <p:nvGrpSpPr>
+        <p:cNvPr id="1" name=""/>
+        <p:cNvGrpSpPr/>
+        <p:nvPr/>
+      </p:nvGrpSpPr>
+      <p:grpSpPr>
+        <a:xfrm>
+          <a:off x="0" y="0"/>
+          <a:ext cx="0" cy="0"/>
+          <a:chOff x="0" y="0"/>
+          <a:chExt cx="0" cy="0"/>
+        </a:xfrm>
+      </p:grpSpPr>
+      <p:pic>
+        <p:nvPicPr>
+          <p:cNvPr id="69" name=""/>
+          <p:cNvPicPr/>
+          <p:nvPr/>
+        </p:nvPicPr>
+        <p:blipFill>
+          <a:blip r:embed="rId1"/>
+          <a:stretch/>
+        </p:blipFill>
+        <p:spPr>
+          <a:xfrm>
+            <a:off x="0" y="56520"/>
+            <a:ext cx="9972000" cy="5670360"/>
+          </a:xfrm>
+          <a:prstGeom prst="rect">
+            <a:avLst/>
+          </a:prstGeom>
+          <a:noFill/>
+          <a:ln w="0">
+            <a:noFill/>
+          </a:ln>
+        </p:spPr>
+      </p:pic>
+    </p:spTree>
+  </p:cSld>
+  <mc:AlternateContent>
+    <mc:Choice Requires="p14">
+      <p:transition spd="slow" p14:dur="2000"/>
+    </mc:Choice>
+    <mc:Fallback>
+      <p:transition spd="slow"/>
+    </mc:Fallback>
+  </mc:AlternateContent>
+</p:sld>
+</file>
+
+<file path=ppt/slides/slide17.xml><?xml version="1.0" encoding="utf-8"?>
+<p:sld xmlns:a="http://schemas.openxmlformats.org/drawingml/2006/main" xmlns:p="http://schemas.openxmlformats.org/presentationml/2006/main" xmlns:r="http://schemas.openxmlformats.org/officeDocument/2006/relationships" xmlns:p14="http://schemas.microsoft.com/office/powerpoint/2010/main" xmlns:p15="http://schemas.microsoft.com/office/powerpoint/2012/main" xmlns:mc="http://schemas.openxmlformats.org/markup-compatibility/2006">
+  <p:cSld>
+    <p:spTree>
+      <p:nvGrpSpPr>
+        <p:cNvPr id="1" name=""/>
+        <p:cNvGrpSpPr/>
+        <p:nvPr/>
+      </p:nvGrpSpPr>
+      <p:grpSpPr>
+        <a:xfrm>
+          <a:off x="0" y="0"/>
+          <a:ext cx="0" cy="0"/>
+          <a:chOff x="0" y="0"/>
+          <a:chExt cx="0" cy="0"/>
+        </a:xfrm>
+      </p:grpSpPr>
+      <p:sp>
+        <p:nvSpPr>
+          <p:cNvPr id="70" name="PlaceHolder 1"/>
+          <p:cNvSpPr>
+            <a:spLocks noGrp="1"/>
+          </p:cNvSpPr>
+          <p:nvPr>
+            <p:ph type="subTitle"/>
+          </p:nvPr>
+        </p:nvSpPr>
+        <p:spPr>
+          <a:xfrm>
+            <a:off x="504000" y="1325160"/>
+            <a:ext cx="9070200" cy="3289680"/>
+          </a:xfrm>
+          <a:prstGeom prst="rect">
+            <a:avLst/>
+          </a:prstGeom>
+          <a:noFill/>
+          <a:ln w="0">
+            <a:noFill/>
+          </a:ln>
+        </p:spPr>
+        <p:txBody>
+          <a:bodyPr lIns="0" tIns="0" rIns="0" bIns="0" anchor="ctr">
+            <a:spAutoFit/>
+          </a:bodyPr>
+          <a:p>
+            <a:pPr indent="0" algn="ctr">
+              <a:lnSpc>
+                <a:spcPct val="100000"/>
+              </a:lnSpc>
+              <a:spcBef>
+                <a:spcPts val="1417"/>
+              </a:spcBef>
+              <a:buNone/>
+              <a:tabLst>
+                <a:tab pos="0" algn="l"/>
+              </a:tabLst>
+            </a:pPr>
+            <a:r>
+              <a:rPr lang="en-US" sz="4400" b="0" u="none" strike="noStrike">
+                <a:solidFill>
+                  <a:srgbClr val="000000"/>
+                </a:solidFill>
+                <a:effectLst/>
+                <a:uFillTx/>
+                <a:latin typeface="Arial"/>
+              </a:rPr>
+              <a:t>MLOps</a:t>
+            </a:r>
+            <a:endParaRPr lang="en-US" sz="4400" b="0" u="none" strike="noStrike">
+              <a:solidFill>
+                <a:srgbClr val="000000"/>
+              </a:solidFill>
+              <a:effectLst/>
+              <a:uFillTx/>
+              <a:latin typeface="Arial"/>
+            </a:endParaRPr>
+          </a:p>
+        </p:txBody>
+      </p:sp>
+    </p:spTree>
+  </p:cSld>
+  <mc:AlternateContent>
+    <mc:Choice Requires="p14">
+      <p:transition spd="slow" p14:dur="2000"/>
+    </mc:Choice>
+    <mc:Fallback>
+      <p:transition spd="slow"/>
+    </mc:Fallback>
+  </mc:AlternateContent>
+</p:sld>
+</file>
+
+<file path=ppt/slides/slide18.xml><?xml version="1.0" encoding="utf-8"?>
+<p:sld xmlns:a="http://schemas.openxmlformats.org/drawingml/2006/main" xmlns:p="http://schemas.openxmlformats.org/presentationml/2006/main" xmlns:r="http://schemas.openxmlformats.org/officeDocument/2006/relationships" xmlns:p14="http://schemas.microsoft.com/office/powerpoint/2010/main" xmlns:p15="http://schemas.microsoft.com/office/powerpoint/2012/main" xmlns:mc="http://schemas.openxmlformats.org/markup-compatibility/2006">
+  <p:cSld>
+    <p:spTree>
+      <p:nvGrpSpPr>
+        <p:cNvPr id="1" name=""/>
+        <p:cNvGrpSpPr/>
+        <p:nvPr/>
+      </p:nvGrpSpPr>
+      <p:grpSpPr>
+        <a:xfrm>
+          <a:off x="0" y="0"/>
+          <a:ext cx="0" cy="0"/>
+          <a:chOff x="0" y="0"/>
+          <a:chExt cx="0" cy="0"/>
+        </a:xfrm>
+      </p:grpSpPr>
+      <p:sp>
+        <p:nvSpPr>
+          <p:cNvPr id="71" name="PlaceHolder 1"/>
+          <p:cNvSpPr>
+            <a:spLocks noGrp="1"/>
+          </p:cNvSpPr>
+          <p:nvPr>
+            <p:ph type="title"/>
+          </p:nvPr>
+        </p:nvSpPr>
+        <p:spPr>
+          <a:xfrm>
+            <a:off x="504000" y="363600"/>
+            <a:ext cx="9070200" cy="670680"/>
+          </a:xfrm>
+          <a:prstGeom prst="rect">
+            <a:avLst/>
+          </a:prstGeom>
+          <a:noFill/>
+          <a:ln w="0">
+            <a:noFill/>
+          </a:ln>
+        </p:spPr>
+        <p:txBody>
+          <a:bodyPr lIns="0" tIns="0" rIns="0" bIns="0" anchor="ctr">
+            <a:spAutoFit/>
+          </a:bodyPr>
+          <a:p>
+            <a:pPr indent="0" algn="l">
+              <a:buNone/>
+              <a:tabLst>
+                <a:tab pos="0" algn="l"/>
+              </a:tabLst>
+            </a:pPr>
+            <a:endParaRPr lang="en-US" sz="4400" b="0" u="none" strike="noStrike">
+              <a:solidFill>
+                <a:srgbClr val="000000"/>
+              </a:solidFill>
+              <a:effectLst/>
+              <a:uFillTx/>
+              <a:latin typeface="Arial"/>
+            </a:endParaRPr>
+          </a:p>
+        </p:txBody>
+      </p:sp>
+      <p:pic>
+        <p:nvPicPr>
+          <p:cNvPr id="72" name=""/>
+          <p:cNvPicPr/>
+          <p:nvPr/>
+        </p:nvPicPr>
+        <p:blipFill>
+          <a:blip r:embed="rId1"/>
+          <a:stretch/>
+        </p:blipFill>
+        <p:spPr>
+          <a:xfrm>
+            <a:off x="452880" y="9000"/>
+            <a:ext cx="9216360" cy="5670360"/>
+          </a:xfrm>
+          <a:prstGeom prst="rect">
+            <a:avLst/>
+          </a:prstGeom>
+          <a:noFill/>
+          <a:ln w="0">
+            <a:noFill/>
+          </a:ln>
+        </p:spPr>
+      </p:pic>
+    </p:spTree>
+  </p:cSld>
+  <mc:AlternateContent>
+    <mc:Choice Requires="p14">
+      <p:transition spd="slow" p14:dur="2000"/>
+    </mc:Choice>
+    <mc:Fallback>
+      <p:transition spd="slow"/>
+    </mc:Fallback>
+  </mc:AlternateContent>
+</p:sld>
+</file>
+
+<file path=ppt/slides/slide19.xml><?xml version="1.0" encoding="utf-8"?>
+<p:sld xmlns:a="http://schemas.openxmlformats.org/drawingml/2006/main" xmlns:p="http://schemas.openxmlformats.org/presentationml/2006/main" xmlns:r="http://schemas.openxmlformats.org/officeDocument/2006/relationships" xmlns:p14="http://schemas.microsoft.com/office/powerpoint/2010/main" xmlns:p15="http://schemas.microsoft.com/office/powerpoint/2012/main" xmlns:mc="http://schemas.openxmlformats.org/markup-compatibility/2006">
+  <p:cSld>
+    <p:spTree>
+      <p:nvGrpSpPr>
+        <p:cNvPr id="1" name=""/>
+        <p:cNvGrpSpPr/>
+        <p:nvPr/>
+      </p:nvGrpSpPr>
+      <p:grpSpPr>
+        <a:xfrm>
+          <a:off x="0" y="0"/>
+          <a:ext cx="0" cy="0"/>
+          <a:chOff x="0" y="0"/>
+          <a:chExt cx="0" cy="0"/>
+        </a:xfrm>
+      </p:grpSpPr>
+      <p:sp>
+        <p:nvSpPr>
+          <p:cNvPr id="73" name="PlaceHolder 1"/>
+          <p:cNvSpPr>
+            <a:spLocks noGrp="1"/>
+          </p:cNvSpPr>
+          <p:nvPr>
+            <p:ph type="subTitle"/>
+          </p:nvPr>
+        </p:nvSpPr>
+        <p:spPr>
+          <a:xfrm>
+            <a:off x="504000" y="1325160"/>
+            <a:ext cx="9070200" cy="3289680"/>
+          </a:xfrm>
+          <a:prstGeom prst="rect">
+            <a:avLst/>
+          </a:prstGeom>
+          <a:noFill/>
+          <a:ln w="0">
+            <a:noFill/>
+          </a:ln>
+        </p:spPr>
+        <p:txBody>
+          <a:bodyPr lIns="0" tIns="0" rIns="0" bIns="0" anchor="ctr">
+            <a:spAutoFit/>
+          </a:bodyPr>
+          <a:p>
+            <a:pPr indent="0" algn="ctr">
+              <a:lnSpc>
+                <a:spcPct val="100000"/>
+              </a:lnSpc>
+              <a:spcBef>
+                <a:spcPts val="1417"/>
+              </a:spcBef>
+              <a:buNone/>
+              <a:tabLst>
+                <a:tab pos="0" algn="l"/>
+              </a:tabLst>
+            </a:pPr>
+            <a:r>
+              <a:rPr lang="en-US" sz="4400" b="0" u="none" strike="noStrike">
+                <a:solidFill>
+                  <a:srgbClr val="000000"/>
+                </a:solidFill>
+                <a:effectLst/>
+                <a:uFillTx/>
+                <a:latin typeface="Arial"/>
+              </a:rPr>
+              <a:t>Landing Zone</a:t>
+            </a:r>
+            <a:endParaRPr lang="en-US" sz="4400" b="0" u="none" strike="noStrike">
+              <a:solidFill>
+                <a:srgbClr val="000000"/>
+              </a:solidFill>
+              <a:effectLst/>
+              <a:uFillTx/>
+              <a:latin typeface="Arial"/>
+            </a:endParaRPr>
+          </a:p>
+        </p:txBody>
+      </p:sp>
     </p:spTree>
   </p:cSld>
   <mc:AlternateContent>
@@ -6228,7 +8889,7 @@
       </p:grpSpPr>
       <p:sp>
         <p:nvSpPr>
-          <p:cNvPr id="43" name="PlaceHolder 1"/>
+          <p:cNvPr id="48" name="PlaceHolder 1"/>
           <p:cNvSpPr>
             <a:spLocks noGrp="1"/>
           </p:cNvSpPr>
@@ -6275,7 +8936,7 @@
                 <a:uFillTx/>
                 <a:latin typeface="Arial"/>
               </a:rPr>
-              <a:t>Text-to-SQL</a:t>
+              <a:t>RAG</a:t>
             </a:r>
             <a:endParaRPr lang="en-US" sz="4400" b="0" u="none" strike="noStrike">
               <a:solidFill>
@@ -6288,6 +8949,60 @@
           </a:p>
         </p:txBody>
       </p:sp>
+    </p:spTree>
+  </p:cSld>
+  <mc:AlternateContent>
+    <mc:Choice Requires="p14">
+      <p:transition spd="slow" p14:dur="2000"/>
+    </mc:Choice>
+    <mc:Fallback>
+      <p:transition spd="slow"/>
+    </mc:Fallback>
+  </mc:AlternateContent>
+</p:sld>
+</file>
+
+<file path=ppt/slides/slide20.xml><?xml version="1.0" encoding="utf-8"?>
+<p:sld xmlns:a="http://schemas.openxmlformats.org/drawingml/2006/main" xmlns:p="http://schemas.openxmlformats.org/presentationml/2006/main" xmlns:r="http://schemas.openxmlformats.org/officeDocument/2006/relationships" xmlns:p14="http://schemas.microsoft.com/office/powerpoint/2010/main" xmlns:p15="http://schemas.microsoft.com/office/powerpoint/2012/main" xmlns:mc="http://schemas.openxmlformats.org/markup-compatibility/2006">
+  <p:cSld>
+    <p:spTree>
+      <p:nvGrpSpPr>
+        <p:cNvPr id="1" name=""/>
+        <p:cNvGrpSpPr/>
+        <p:nvPr/>
+      </p:nvGrpSpPr>
+      <p:grpSpPr>
+        <a:xfrm>
+          <a:off x="0" y="0"/>
+          <a:ext cx="0" cy="0"/>
+          <a:chOff x="0" y="0"/>
+          <a:chExt cx="0" cy="0"/>
+        </a:xfrm>
+      </p:grpSpPr>
+      <p:pic>
+        <p:nvPicPr>
+          <p:cNvPr id="74" name=""/>
+          <p:cNvPicPr/>
+          <p:nvPr/>
+        </p:nvPicPr>
+        <p:blipFill>
+          <a:blip r:embed="rId1"/>
+          <a:stretch/>
+        </p:blipFill>
+        <p:spPr>
+          <a:xfrm>
+            <a:off x="2225880" y="9000"/>
+            <a:ext cx="5670360" cy="5670360"/>
+          </a:xfrm>
+          <a:prstGeom prst="rect">
+            <a:avLst/>
+          </a:prstGeom>
+          <a:noFill/>
+          <a:ln w="0">
+            <a:noFill/>
+          </a:ln>
+        </p:spPr>
+      </p:pic>
     </p:spTree>
   </p:cSld>
   <mc:AlternateContent>
@@ -6320,7 +9035,7 @@
       </p:grpSpPr>
       <p:sp>
         <p:nvSpPr>
-          <p:cNvPr id="44" name="PlaceHolder 1"/>
+          <p:cNvPr id="49" name="PlaceHolder 1"/>
           <p:cNvSpPr>
             <a:spLocks noGrp="1"/>
           </p:cNvSpPr>
@@ -6330,8 +9045,8 @@
         </p:nvSpPr>
         <p:spPr>
           <a:xfrm>
-            <a:off x="504000" y="362520"/>
-            <a:ext cx="9070200" cy="671760"/>
+            <a:off x="504000" y="363600"/>
+            <a:ext cx="9070200" cy="670680"/>
           </a:xfrm>
           <a:prstGeom prst="rect">
             <a:avLst/>
@@ -6351,11 +9066,8 @@
                 <a:spcPct val="100000"/>
               </a:lnSpc>
               <a:spcBef>
-                <a:spcPts val="1191"/>
-              </a:spcBef>
-              <a:spcAft>
-                <a:spcPts val="992"/>
-              </a:spcAft>
+                <a:spcPts val="1417"/>
+              </a:spcBef>
               <a:buNone/>
               <a:tabLst>
                 <a:tab pos="0" algn="l"/>
@@ -6370,7 +9082,7 @@
                 <a:uFillTx/>
                 <a:latin typeface="Arial"/>
               </a:rPr>
-              <a:t>Intent Detection / Entity Recognition</a:t>
+              <a:t>Baseline</a:t>
             </a:r>
             <a:endParaRPr lang="en-US" sz="4400" b="0" u="none" strike="noStrike">
               <a:solidFill>
@@ -6385,7 +9097,7 @@
       </p:sp>
       <p:pic>
         <p:nvPicPr>
-          <p:cNvPr id="45" name=""/>
+          <p:cNvPr id="50" name=""/>
           <p:cNvPicPr/>
           <p:nvPr/>
         </p:nvPicPr>
@@ -6395,8 +9107,8 @@
         </p:blipFill>
         <p:spPr>
           <a:xfrm>
-            <a:off x="1935360" y="1257120"/>
-            <a:ext cx="6222600" cy="4055400"/>
+            <a:off x="1644840" y="1247400"/>
+            <a:ext cx="6785640" cy="4184640"/>
           </a:xfrm>
           <a:prstGeom prst="rect">
             <a:avLst/>
@@ -6439,7 +9151,7 @@
       </p:grpSpPr>
       <p:sp>
         <p:nvSpPr>
-          <p:cNvPr id="46" name="PlaceHolder 1"/>
+          <p:cNvPr id="51" name="PlaceHolder 1"/>
           <p:cNvSpPr>
             <a:spLocks noGrp="1"/>
           </p:cNvSpPr>
@@ -6449,8 +9161,8 @@
         </p:nvSpPr>
         <p:spPr>
           <a:xfrm>
-            <a:off x="504000" y="362520"/>
-            <a:ext cx="9070200" cy="671760"/>
+            <a:off x="504000" y="363600"/>
+            <a:ext cx="9070200" cy="670680"/>
           </a:xfrm>
           <a:prstGeom prst="rect">
             <a:avLst/>
@@ -6465,32 +9177,12 @@
             <a:spAutoFit/>
           </a:bodyPr>
           <a:p>
-            <a:pPr indent="0" algn="ctr">
-              <a:lnSpc>
-                <a:spcPct val="100000"/>
-              </a:lnSpc>
-              <a:spcBef>
-                <a:spcPts val="1191"/>
-              </a:spcBef>
-              <a:spcAft>
-                <a:spcPts val="992"/>
-              </a:spcAft>
+            <a:pPr indent="0" algn="l">
               <a:buNone/>
               <a:tabLst>
                 <a:tab pos="0" algn="l"/>
               </a:tabLst>
             </a:pPr>
-            <a:r>
-              <a:rPr lang="en-US" sz="4400" b="0" u="none" strike="noStrike">
-                <a:solidFill>
-                  <a:srgbClr val="000000"/>
-                </a:solidFill>
-                <a:effectLst/>
-                <a:uFillTx/>
-                <a:latin typeface="Arial"/>
-              </a:rPr>
-              <a:t>LLM with RAG</a:t>
-            </a:r>
             <a:endParaRPr lang="en-US" sz="4400" b="0" u="none" strike="noStrike">
               <a:solidFill>
                 <a:srgbClr val="000000"/>
@@ -6504,7 +9196,7 @@
       </p:sp>
       <p:pic>
         <p:nvPicPr>
-          <p:cNvPr id="47" name=""/>
+          <p:cNvPr id="52" name=""/>
           <p:cNvPicPr/>
           <p:nvPr/>
         </p:nvPicPr>
@@ -6514,8 +9206,8 @@
         </p:blipFill>
         <p:spPr>
           <a:xfrm>
-            <a:off x="1868760" y="1172160"/>
-            <a:ext cx="6417360" cy="4319640"/>
+            <a:off x="20880" y="9360"/>
+            <a:ext cx="10080360" cy="5670000"/>
           </a:xfrm>
           <a:prstGeom prst="rect">
             <a:avLst/>
@@ -6558,7 +9250,7 @@
       </p:grpSpPr>
       <p:sp>
         <p:nvSpPr>
-          <p:cNvPr id="48" name="PlaceHolder 1"/>
+          <p:cNvPr id="53" name="PlaceHolder 1"/>
           <p:cNvSpPr>
             <a:spLocks noGrp="1"/>
           </p:cNvSpPr>
@@ -6568,8 +9260,8 @@
         </p:nvSpPr>
         <p:spPr>
           <a:xfrm>
-            <a:off x="504000" y="362520"/>
-            <a:ext cx="9070200" cy="671760"/>
+            <a:off x="504000" y="363600"/>
+            <a:ext cx="9070200" cy="670680"/>
           </a:xfrm>
           <a:prstGeom prst="rect">
             <a:avLst/>
@@ -6584,26 +9276,12 @@
             <a:spAutoFit/>
           </a:bodyPr>
           <a:p>
-            <a:pPr indent="0" algn="ctr">
-              <a:lnSpc>
-                <a:spcPct val="100000"/>
-              </a:lnSpc>
+            <a:pPr indent="0" algn="l">
               <a:buNone/>
               <a:tabLst>
                 <a:tab pos="0" algn="l"/>
               </a:tabLst>
             </a:pPr>
-            <a:r>
-              <a:rPr lang="en-US" sz="4400" b="0" u="none" strike="noStrike">
-                <a:solidFill>
-                  <a:srgbClr val="000000"/>
-                </a:solidFill>
-                <a:effectLst/>
-                <a:uFillTx/>
-                <a:latin typeface="Arial"/>
-              </a:rPr>
-              <a:t>LLM with RAG (AWS Bedrock)</a:t>
-            </a:r>
             <a:endParaRPr lang="en-US" sz="4400" b="0" u="none" strike="noStrike">
               <a:solidFill>
                 <a:srgbClr val="000000"/>
@@ -6617,7 +9295,7 @@
       </p:sp>
       <p:pic>
         <p:nvPicPr>
-          <p:cNvPr id="49" name=""/>
+          <p:cNvPr id="54" name=""/>
           <p:cNvPicPr/>
           <p:nvPr/>
         </p:nvPicPr>
@@ -6627,8 +9305,8 @@
         </p:blipFill>
         <p:spPr>
           <a:xfrm>
-            <a:off x="561600" y="1791720"/>
-            <a:ext cx="9006840" cy="3013560"/>
+            <a:off x="61920" y="101160"/>
+            <a:ext cx="9998640" cy="5486040"/>
           </a:xfrm>
           <a:prstGeom prst="rect">
             <a:avLst/>
@@ -6671,18 +9349,18 @@
       </p:grpSpPr>
       <p:sp>
         <p:nvSpPr>
-          <p:cNvPr id="50" name="PlaceHolder 1"/>
+          <p:cNvPr id="55" name="PlaceHolder 1"/>
           <p:cNvSpPr>
             <a:spLocks noGrp="1"/>
           </p:cNvSpPr>
           <p:nvPr>
-            <p:ph type="title"/>
+            <p:ph type="subTitle"/>
           </p:nvPr>
         </p:nvSpPr>
         <p:spPr>
           <a:xfrm>
-            <a:off x="504000" y="362520"/>
-            <a:ext cx="9070200" cy="671760"/>
+            <a:off x="504000" y="1325160"/>
+            <a:ext cx="9070200" cy="3289680"/>
           </a:xfrm>
           <a:prstGeom prst="rect">
             <a:avLst/>
@@ -6702,11 +9380,8 @@
                 <a:spcPct val="100000"/>
               </a:lnSpc>
               <a:spcBef>
-                <a:spcPts val="1191"/>
-              </a:spcBef>
-              <a:spcAft>
-                <a:spcPts val="992"/>
-              </a:spcAft>
+                <a:spcPts val="1417"/>
+              </a:spcBef>
               <a:buNone/>
               <a:tabLst>
                 <a:tab pos="0" algn="l"/>
@@ -6721,7 +9396,7 @@
                 <a:uFillTx/>
                 <a:latin typeface="Arial"/>
               </a:rPr>
-              <a:t>Using SQL Agents (via LangChain)</a:t>
+              <a:t>LLM Text-to-SQL</a:t>
             </a:r>
             <a:endParaRPr lang="en-US" sz="4400" b="0" u="none" strike="noStrike">
               <a:solidFill>
@@ -6734,30 +9409,6 @@
           </a:p>
         </p:txBody>
       </p:sp>
-      <p:pic>
-        <p:nvPicPr>
-          <p:cNvPr id="51" name=""/>
-          <p:cNvPicPr/>
-          <p:nvPr/>
-        </p:nvPicPr>
-        <p:blipFill>
-          <a:blip r:embed="rId1"/>
-          <a:stretch/>
-        </p:blipFill>
-        <p:spPr>
-          <a:xfrm>
-            <a:off x="1816920" y="1213920"/>
-            <a:ext cx="6464880" cy="4207320"/>
-          </a:xfrm>
-          <a:prstGeom prst="rect">
-            <a:avLst/>
-          </a:prstGeom>
-          <a:noFill/>
-          <a:ln w="0">
-            <a:noFill/>
-          </a:ln>
-        </p:spPr>
-      </p:pic>
     </p:spTree>
   </p:cSld>
   <mc:AlternateContent>
@@ -6790,7 +9441,7 @@
       </p:grpSpPr>
       <p:sp>
         <p:nvSpPr>
-          <p:cNvPr id="52" name="PlaceHolder 1"/>
+          <p:cNvPr id="56" name="PlaceHolder 1"/>
           <p:cNvSpPr>
             <a:spLocks noGrp="1"/>
           </p:cNvSpPr>
@@ -6834,7 +9485,7 @@
                 <a:uFillTx/>
                 <a:latin typeface="Arial"/>
               </a:rPr>
-              <a:t>Agentic Text-to-SQL</a:t>
+              <a:t>LLM with RAG (AWS Bedrock)</a:t>
             </a:r>
             <a:endParaRPr lang="en-US" sz="4400" b="0" u="none" strike="noStrike">
               <a:solidFill>
@@ -6849,7 +9500,7 @@
       </p:sp>
       <p:pic>
         <p:nvPicPr>
-          <p:cNvPr id="53" name=""/>
+          <p:cNvPr id="57" name=""/>
           <p:cNvPicPr/>
           <p:nvPr/>
         </p:nvPicPr>
@@ -6859,8 +9510,8 @@
         </p:blipFill>
         <p:spPr>
           <a:xfrm>
-            <a:off x="974880" y="1502640"/>
-            <a:ext cx="7923240" cy="3520800"/>
+            <a:off x="561600" y="1791720"/>
+            <a:ext cx="9006840" cy="3013560"/>
           </a:xfrm>
           <a:prstGeom prst="rect">
             <a:avLst/>
@@ -6903,18 +9554,18 @@
       </p:grpSpPr>
       <p:sp>
         <p:nvSpPr>
-          <p:cNvPr id="54" name="PlaceHolder 1"/>
+          <p:cNvPr id="58" name="PlaceHolder 1"/>
           <p:cNvSpPr>
             <a:spLocks noGrp="1"/>
           </p:cNvSpPr>
           <p:nvPr>
-            <p:ph type="subTitle"/>
+            <p:ph type="title"/>
           </p:nvPr>
         </p:nvSpPr>
         <p:spPr>
           <a:xfrm>
-            <a:off x="504000" y="1325160"/>
-            <a:ext cx="9070200" cy="3289680"/>
+            <a:off x="504000" y="362520"/>
+            <a:ext cx="9070200" cy="671760"/>
           </a:xfrm>
           <a:prstGeom prst="rect">
             <a:avLst/>
@@ -6933,9 +9584,6 @@
               <a:lnSpc>
                 <a:spcPct val="100000"/>
               </a:lnSpc>
-              <a:spcBef>
-                <a:spcPts val="1417"/>
-              </a:spcBef>
               <a:buNone/>
               <a:tabLst>
                 <a:tab pos="0" algn="l"/>
@@ -6950,7 +9598,7 @@
                 <a:uFillTx/>
                 <a:latin typeface="Arial"/>
               </a:rPr>
-              <a:t>RAG</a:t>
+              <a:t>Agentic Text-to-SQL</a:t>
             </a:r>
             <a:endParaRPr lang="en-US" sz="4400" b="0" u="none" strike="noStrike">
               <a:solidFill>
@@ -6963,6 +9611,30 @@
           </a:p>
         </p:txBody>
       </p:sp>
+      <p:pic>
+        <p:nvPicPr>
+          <p:cNvPr id="59" name=""/>
+          <p:cNvPicPr/>
+          <p:nvPr/>
+        </p:nvPicPr>
+        <p:blipFill>
+          <a:blip r:embed="rId1"/>
+          <a:stretch/>
+        </p:blipFill>
+        <p:spPr>
+          <a:xfrm>
+            <a:off x="974880" y="1502640"/>
+            <a:ext cx="7923240" cy="3520800"/>
+          </a:xfrm>
+          <a:prstGeom prst="rect">
+            <a:avLst/>
+          </a:prstGeom>
+          <a:noFill/>
+          <a:ln w="0">
+            <a:noFill/>
+          </a:ln>
+        </p:spPr>
+      </p:pic>
     </p:spTree>
   </p:cSld>
   <mc:AlternateContent>
@@ -6995,18 +9667,18 @@
       </p:grpSpPr>
       <p:sp>
         <p:nvSpPr>
-          <p:cNvPr id="55" name="PlaceHolder 1"/>
+          <p:cNvPr id="60" name="PlaceHolder 1"/>
           <p:cNvSpPr>
             <a:spLocks noGrp="1"/>
           </p:cNvSpPr>
           <p:nvPr>
-            <p:ph type="title"/>
+            <p:ph type="subTitle"/>
           </p:nvPr>
         </p:nvSpPr>
         <p:spPr>
           <a:xfrm>
-            <a:off x="504000" y="224640"/>
-            <a:ext cx="9070920" cy="947880"/>
+            <a:off x="504000" y="1325160"/>
+            <a:ext cx="9070200" cy="3289680"/>
           </a:xfrm>
           <a:prstGeom prst="rect">
             <a:avLst/>
@@ -7025,6 +9697,9 @@
               <a:lnSpc>
                 <a:spcPct val="100000"/>
               </a:lnSpc>
+              <a:spcBef>
+                <a:spcPts val="1417"/>
+              </a:spcBef>
               <a:buNone/>
               <a:tabLst>
                 <a:tab pos="0" algn="l"/>
@@ -7039,7 +9714,7 @@
                 <a:uFillTx/>
                 <a:latin typeface="Arial"/>
               </a:rPr>
-              <a:t>RAG Pipeline</a:t>
+              <a:t>RAG</a:t>
             </a:r>
             <a:endParaRPr lang="en-US" sz="4400" b="0" u="none" strike="noStrike">
               <a:solidFill>
@@ -7052,30 +9727,6 @@
           </a:p>
         </p:txBody>
       </p:sp>
-      <p:pic>
-        <p:nvPicPr>
-          <p:cNvPr id="56" name=""/>
-          <p:cNvPicPr/>
-          <p:nvPr/>
-        </p:nvPicPr>
-        <p:blipFill>
-          <a:blip r:embed="rId1"/>
-          <a:stretch/>
-        </p:blipFill>
-        <p:spPr>
-          <a:xfrm>
-            <a:off x="363960" y="1513080"/>
-            <a:ext cx="9430920" cy="3715560"/>
-          </a:xfrm>
-          <a:prstGeom prst="rect">
-            <a:avLst/>
-          </a:prstGeom>
-          <a:noFill/>
-          <a:ln w="0">
-            <a:noFill/>
-          </a:ln>
-        </p:spPr>
-      </p:pic>
     </p:spTree>
   </p:cSld>
   <mc:AlternateContent>

--- a/AI_Arch.pptx
+++ b/AI_Arch.pptx
@@ -383,7 +383,7 @@
             <a:pPr indent="0" algn="r">
               <a:buNone/>
             </a:pPr>
-            <a:fld id="{9650BAA3-CF61-4A59-9F9C-41A7C0934852}" type="slidenum">
+            <a:fld id="{9C7E07AE-C9E4-486A-BDE5-17CD7EB4D801}" type="slidenum">
               <a:rPr lang="en-US" sz="1400" b="0" u="none" strike="noStrike">
                 <a:solidFill>
                   <a:srgbClr val="000000"/>
@@ -441,7 +441,7 @@
         <p:spPr>
           <a:xfrm>
             <a:off x="533520" y="764280"/>
-            <a:ext cx="6703560" cy="3770280"/>
+            <a:ext cx="6703200" cy="3769920"/>
           </a:xfrm>
           <a:prstGeom prst="rect">
             <a:avLst/>
@@ -464,7 +464,7 @@
         <p:spPr>
           <a:xfrm>
             <a:off x="777240" y="4777560"/>
-            <a:ext cx="6216480" cy="4524840"/>
+            <a:ext cx="6216120" cy="4524480"/>
           </a:xfrm>
           <a:prstGeom prst="rect">
             <a:avLst/>
@@ -568,7 +568,7 @@
         <p:spPr>
           <a:xfrm>
             <a:off x="1440" y="0"/>
-            <a:ext cx="360" cy="720"/>
+            <a:ext cx="0" cy="360"/>
           </a:xfrm>
           <a:prstGeom prst="rect">
             <a:avLst/>
@@ -591,7 +591,7 @@
         <p:spPr>
           <a:xfrm>
             <a:off x="777240" y="4777560"/>
-            <a:ext cx="6217560" cy="4525920"/>
+            <a:ext cx="6217200" cy="4525560"/>
           </a:xfrm>
           <a:prstGeom prst="rect">
             <a:avLst/>
@@ -607,7 +607,13 @@
           </a:bodyPr>
           <a:p>
             <a:pPr indent="0" algn="l">
-              <a:buNone/>
+              <a:lnSpc>
+                <a:spcPct val="100000"/>
+              </a:lnSpc>
+              <a:buNone/>
+              <a:tabLst>
+                <a:tab pos="0" algn="l"/>
+              </a:tabLst>
             </a:pPr>
             <a:r>
               <a:rPr lang="en-US" sz="2000" b="0" u="none" strike="noStrike">
@@ -678,7 +684,7 @@
         <p:spPr>
           <a:xfrm>
             <a:off x="533520" y="764280"/>
-            <a:ext cx="6703560" cy="3770280"/>
+            <a:ext cx="6703200" cy="3769920"/>
           </a:xfrm>
           <a:prstGeom prst="rect">
             <a:avLst/>
@@ -701,7 +707,7 @@
         <p:spPr>
           <a:xfrm>
             <a:off x="777240" y="4777560"/>
-            <a:ext cx="6216480" cy="4524840"/>
+            <a:ext cx="6216120" cy="4524480"/>
           </a:xfrm>
           <a:prstGeom prst="rect">
             <a:avLst/>
@@ -782,7 +788,7 @@
         <p:spPr>
           <a:xfrm>
             <a:off x="1440" y="0"/>
-            <a:ext cx="360" cy="720"/>
+            <a:ext cx="0" cy="360"/>
           </a:xfrm>
           <a:prstGeom prst="rect">
             <a:avLst/>
@@ -805,7 +811,7 @@
         <p:spPr>
           <a:xfrm>
             <a:off x="777240" y="4777560"/>
-            <a:ext cx="6217560" cy="4525920"/>
+            <a:ext cx="6217200" cy="4525560"/>
           </a:xfrm>
           <a:prstGeom prst="rect">
             <a:avLst/>
@@ -821,7 +827,13 @@
           </a:bodyPr>
           <a:p>
             <a:pPr indent="0" algn="l">
-              <a:buNone/>
+              <a:lnSpc>
+                <a:spcPct val="100000"/>
+              </a:lnSpc>
+              <a:buNone/>
+              <a:tabLst>
+                <a:tab pos="0" algn="l"/>
+              </a:tabLst>
             </a:pPr>
             <a:r>
               <a:rPr lang="en-US" sz="2000" b="0" u="none" strike="noStrike">
@@ -892,7 +904,7 @@
         <p:spPr>
           <a:xfrm>
             <a:off x="1440" y="0"/>
-            <a:ext cx="360" cy="720"/>
+            <a:ext cx="0" cy="360"/>
           </a:xfrm>
           <a:prstGeom prst="rect">
             <a:avLst/>
@@ -915,7 +927,7 @@
         <p:spPr>
           <a:xfrm>
             <a:off x="777240" y="4777560"/>
-            <a:ext cx="6217560" cy="4525920"/>
+            <a:ext cx="6217200" cy="4525560"/>
           </a:xfrm>
           <a:prstGeom prst="rect">
             <a:avLst/>
@@ -931,7 +943,13 @@
           </a:bodyPr>
           <a:p>
             <a:pPr indent="0" algn="l">
-              <a:buNone/>
+              <a:lnSpc>
+                <a:spcPct val="100000"/>
+              </a:lnSpc>
+              <a:buNone/>
+              <a:tabLst>
+                <a:tab pos="0" algn="l"/>
+              </a:tabLst>
             </a:pPr>
             <a:r>
               <a:rPr lang="en-US" sz="2000" b="0" u="none" strike="noStrike">
@@ -1002,7 +1020,7 @@
         <p:spPr>
           <a:xfrm>
             <a:off x="533520" y="764280"/>
-            <a:ext cx="6703560" cy="3770280"/>
+            <a:ext cx="6703200" cy="3769920"/>
           </a:xfrm>
           <a:prstGeom prst="rect">
             <a:avLst/>
@@ -1025,7 +1043,7 @@
         <p:spPr>
           <a:xfrm>
             <a:off x="777240" y="4777560"/>
-            <a:ext cx="6216480" cy="4524840"/>
+            <a:ext cx="6216120" cy="4524480"/>
           </a:xfrm>
           <a:prstGeom prst="rect">
             <a:avLst/>
@@ -1106,7 +1124,7 @@
         <p:spPr>
           <a:xfrm>
             <a:off x="1440" y="0"/>
-            <a:ext cx="360" cy="720"/>
+            <a:ext cx="0" cy="360"/>
           </a:xfrm>
           <a:prstGeom prst="rect">
             <a:avLst/>
@@ -1129,7 +1147,7 @@
         <p:spPr>
           <a:xfrm>
             <a:off x="777240" y="4777560"/>
-            <a:ext cx="6217560" cy="4525920"/>
+            <a:ext cx="6217200" cy="4525560"/>
           </a:xfrm>
           <a:prstGeom prst="rect">
             <a:avLst/>
@@ -1145,7 +1163,13 @@
           </a:bodyPr>
           <a:p>
             <a:pPr indent="0" algn="l">
-              <a:buNone/>
+              <a:lnSpc>
+                <a:spcPct val="100000"/>
+              </a:lnSpc>
+              <a:buNone/>
+              <a:tabLst>
+                <a:tab pos="0" algn="l"/>
+              </a:tabLst>
             </a:pPr>
             <a:r>
               <a:rPr lang="en-US" sz="2000" b="0" u="none" strike="noStrike">
@@ -1216,7 +1240,7 @@
         <p:spPr>
           <a:xfrm>
             <a:off x="533520" y="764280"/>
-            <a:ext cx="6703560" cy="3770280"/>
+            <a:ext cx="6703200" cy="3769920"/>
           </a:xfrm>
           <a:prstGeom prst="rect">
             <a:avLst/>
@@ -1239,7 +1263,7 @@
         <p:spPr>
           <a:xfrm>
             <a:off x="777240" y="4777560"/>
-            <a:ext cx="6216480" cy="4524840"/>
+            <a:ext cx="6216120" cy="4524480"/>
           </a:xfrm>
           <a:prstGeom prst="rect">
             <a:avLst/>
@@ -1320,7 +1344,7 @@
         <p:spPr>
           <a:xfrm>
             <a:off x="533520" y="764280"/>
-            <a:ext cx="6703560" cy="3770280"/>
+            <a:ext cx="6703200" cy="3769920"/>
           </a:xfrm>
           <a:prstGeom prst="rect">
             <a:avLst/>
@@ -1343,7 +1367,7 @@
         <p:spPr>
           <a:xfrm>
             <a:off x="777240" y="4777560"/>
-            <a:ext cx="6216480" cy="4524840"/>
+            <a:ext cx="6216120" cy="4524480"/>
           </a:xfrm>
           <a:prstGeom prst="rect">
             <a:avLst/>
@@ -1436,7 +1460,7 @@
         <p:spPr>
           <a:xfrm>
             <a:off x="1440" y="0"/>
-            <a:ext cx="360" cy="720"/>
+            <a:ext cx="0" cy="360"/>
           </a:xfrm>
           <a:prstGeom prst="rect">
             <a:avLst/>
@@ -1459,7 +1483,7 @@
         <p:spPr>
           <a:xfrm>
             <a:off x="777240" y="4777560"/>
-            <a:ext cx="6217560" cy="4525920"/>
+            <a:ext cx="6217200" cy="4525560"/>
           </a:xfrm>
           <a:prstGeom prst="rect">
             <a:avLst/>
@@ -1475,7 +1499,13 @@
           </a:bodyPr>
           <a:p>
             <a:pPr indent="0" algn="l">
-              <a:buNone/>
+              <a:lnSpc>
+                <a:spcPct val="100000"/>
+              </a:lnSpc>
+              <a:buNone/>
+              <a:tabLst>
+                <a:tab pos="0" algn="l"/>
+              </a:tabLst>
             </a:pPr>
             <a:r>
               <a:rPr lang="en-US" sz="2000" b="0" u="none" strike="noStrike">
@@ -1546,7 +1576,7 @@
         <p:spPr>
           <a:xfrm>
             <a:off x="1440" y="0"/>
-            <a:ext cx="360" cy="720"/>
+            <a:ext cx="0" cy="360"/>
           </a:xfrm>
           <a:prstGeom prst="rect">
             <a:avLst/>
@@ -1569,7 +1599,7 @@
         <p:spPr>
           <a:xfrm>
             <a:off x="777240" y="4777560"/>
-            <a:ext cx="6217560" cy="4525920"/>
+            <a:ext cx="6217200" cy="4525560"/>
           </a:xfrm>
           <a:prstGeom prst="rect">
             <a:avLst/>
@@ -1585,7 +1615,13 @@
           </a:bodyPr>
           <a:p>
             <a:pPr indent="0" algn="l">
-              <a:buNone/>
+              <a:lnSpc>
+                <a:spcPct val="100000"/>
+              </a:lnSpc>
+              <a:buNone/>
+              <a:tabLst>
+                <a:tab pos="0" algn="l"/>
+              </a:tabLst>
             </a:pPr>
             <a:r>
               <a:rPr lang="en-US" sz="2000" b="0" u="none" strike="noStrike">
@@ -1656,7 +1692,7 @@
         <p:spPr>
           <a:xfrm>
             <a:off x="1440" y="0"/>
-            <a:ext cx="360" cy="720"/>
+            <a:ext cx="0" cy="360"/>
           </a:xfrm>
           <a:prstGeom prst="rect">
             <a:avLst/>
@@ -1679,7 +1715,7 @@
         <p:spPr>
           <a:xfrm>
             <a:off x="777240" y="4777560"/>
-            <a:ext cx="6217560" cy="4525920"/>
+            <a:ext cx="6217200" cy="4525560"/>
           </a:xfrm>
           <a:prstGeom prst="rect">
             <a:avLst/>
@@ -1695,7 +1731,13 @@
           </a:bodyPr>
           <a:p>
             <a:pPr indent="0" algn="l">
-              <a:buNone/>
+              <a:lnSpc>
+                <a:spcPct val="100000"/>
+              </a:lnSpc>
+              <a:buNone/>
+              <a:tabLst>
+                <a:tab pos="0" algn="l"/>
+              </a:tabLst>
             </a:pPr>
             <a:r>
               <a:rPr lang="en-US" sz="2000" b="0" u="none" strike="noStrike">
@@ -1766,7 +1808,7 @@
         <p:spPr>
           <a:xfrm>
             <a:off x="1440" y="0"/>
-            <a:ext cx="360" cy="720"/>
+            <a:ext cx="0" cy="360"/>
           </a:xfrm>
           <a:prstGeom prst="rect">
             <a:avLst/>
@@ -1789,7 +1831,7 @@
         <p:spPr>
           <a:xfrm>
             <a:off x="777240" y="4777560"/>
-            <a:ext cx="6217560" cy="4525920"/>
+            <a:ext cx="6217200" cy="4525560"/>
           </a:xfrm>
           <a:prstGeom prst="rect">
             <a:avLst/>
@@ -1805,7 +1847,13 @@
           </a:bodyPr>
           <a:p>
             <a:pPr indent="0" algn="l">
-              <a:buNone/>
+              <a:lnSpc>
+                <a:spcPct val="100000"/>
+              </a:lnSpc>
+              <a:buNone/>
+              <a:tabLst>
+                <a:tab pos="0" algn="l"/>
+              </a:tabLst>
             </a:pPr>
             <a:r>
               <a:rPr lang="en-US" sz="2000" b="0" u="none" strike="noStrike">
@@ -1876,7 +1924,7 @@
         <p:spPr>
           <a:xfrm>
             <a:off x="533520" y="764280"/>
-            <a:ext cx="6703560" cy="3770280"/>
+            <a:ext cx="6703200" cy="3769920"/>
           </a:xfrm>
           <a:prstGeom prst="rect">
             <a:avLst/>
@@ -1899,7 +1947,7 @@
         <p:spPr>
           <a:xfrm>
             <a:off x="777240" y="4777560"/>
-            <a:ext cx="6216480" cy="4524840"/>
+            <a:ext cx="6216120" cy="4524480"/>
           </a:xfrm>
           <a:prstGeom prst="rect">
             <a:avLst/>
@@ -1992,7 +2040,7 @@
         <p:spPr>
           <a:xfrm>
             <a:off x="1080" y="-360"/>
-            <a:ext cx="360" cy="360"/>
+            <a:ext cx="0" cy="0"/>
           </a:xfrm>
           <a:prstGeom prst="rect">
             <a:avLst/>
@@ -2015,7 +2063,7 @@
         <p:spPr>
           <a:xfrm>
             <a:off x="777240" y="4777560"/>
-            <a:ext cx="6216480" cy="4524840"/>
+            <a:ext cx="6216120" cy="4524480"/>
           </a:xfrm>
           <a:prstGeom prst="rect">
             <a:avLst/>
@@ -2131,7 +2179,7 @@
         <p:spPr>
           <a:xfrm>
             <a:off x="777240" y="4777560"/>
-            <a:ext cx="6216480" cy="4524840"/>
+            <a:ext cx="6216120" cy="4524480"/>
           </a:xfrm>
           <a:prstGeom prst="rect">
             <a:avLst/>
@@ -2224,7 +2272,7 @@
         <p:spPr>
           <a:xfrm>
             <a:off x="504000" y="363600"/>
-            <a:ext cx="9070200" cy="670680"/>
+            <a:ext cx="9069840" cy="670680"/>
           </a:xfrm>
           <a:prstGeom prst="rect">
             <a:avLst/>
@@ -2302,7 +2350,7 @@
         <p:spPr>
           <a:xfrm>
             <a:off x="3447360" y="5165280"/>
-            <a:ext cx="3193560" cy="389160"/>
+            <a:ext cx="3193200" cy="388800"/>
           </a:xfrm>
           <a:prstGeom prst="rect">
             <a:avLst/>
@@ -2380,7 +2428,7 @@
         <p:spPr>
           <a:xfrm>
             <a:off x="7227360" y="5165280"/>
-            <a:ext cx="2346840" cy="389160"/>
+            <a:ext cx="2346480" cy="388800"/>
           </a:xfrm>
           <a:prstGeom prst="rect">
             <a:avLst/>
@@ -2423,7 +2471,7 @@
                 <a:tab pos="0" algn="l"/>
               </a:tabLst>
             </a:pPr>
-            <a:fld id="{82A4F235-1A84-431B-9AFE-DE57C265E426}" type="slidenum">
+            <a:fld id="{AC46B5B9-7FFD-46DD-AA05-DD5A5875D555}" type="slidenum">
               <a:rPr lang="en-US" sz="1400" b="0" u="none" strike="noStrike">
                 <a:solidFill>
                   <a:srgbClr val="000000"/>
@@ -2458,7 +2506,7 @@
         <p:spPr>
           <a:xfrm>
             <a:off x="504000" y="5165280"/>
-            <a:ext cx="2346840" cy="389160"/>
+            <a:ext cx="2346480" cy="388800"/>
           </a:xfrm>
           <a:prstGeom prst="rect">
             <a:avLst/>
@@ -2558,7 +2606,7 @@
         <p:spPr>
           <a:xfrm>
             <a:off x="504000" y="363600"/>
-            <a:ext cx="9070200" cy="670680"/>
+            <a:ext cx="9069840" cy="670680"/>
           </a:xfrm>
           <a:prstGeom prst="rect">
             <a:avLst/>
@@ -2636,7 +2684,7 @@
         <p:spPr>
           <a:xfrm>
             <a:off x="3447360" y="5165280"/>
-            <a:ext cx="3193560" cy="389160"/>
+            <a:ext cx="3193200" cy="388800"/>
           </a:xfrm>
           <a:prstGeom prst="rect">
             <a:avLst/>
@@ -2714,7 +2762,7 @@
         <p:spPr>
           <a:xfrm>
             <a:off x="7227360" y="5165280"/>
-            <a:ext cx="2346840" cy="389160"/>
+            <a:ext cx="2346480" cy="388800"/>
           </a:xfrm>
           <a:prstGeom prst="rect">
             <a:avLst/>
@@ -2757,7 +2805,7 @@
                 <a:tab pos="0" algn="l"/>
               </a:tabLst>
             </a:pPr>
-            <a:fld id="{E56E9B68-EAD2-4BDB-A478-859FB91752F4}" type="slidenum">
+            <a:fld id="{A7FDA057-C04A-4F6C-B6F0-68C76F6F2082}" type="slidenum">
               <a:rPr lang="en-US" sz="1400" b="0" u="none" strike="noStrike">
                 <a:solidFill>
                   <a:srgbClr val="000000"/>
@@ -2792,7 +2840,7 @@
         <p:spPr>
           <a:xfrm>
             <a:off x="504000" y="5165280"/>
-            <a:ext cx="2346840" cy="389160"/>
+            <a:ext cx="2346480" cy="388800"/>
           </a:xfrm>
           <a:prstGeom prst="rect">
             <a:avLst/>
@@ -2870,7 +2918,7 @@
         <p:spPr>
           <a:xfrm>
             <a:off x="504000" y="1326600"/>
-            <a:ext cx="9071640" cy="3288240"/>
+            <a:ext cx="9071280" cy="3287880"/>
           </a:xfrm>
           <a:prstGeom prst="rect">
             <a:avLst/>
@@ -3322,7 +3370,7 @@
         <p:spPr>
           <a:xfrm>
             <a:off x="504000" y="363600"/>
-            <a:ext cx="9070200" cy="670680"/>
+            <a:ext cx="9069840" cy="670680"/>
           </a:xfrm>
           <a:prstGeom prst="rect">
             <a:avLst/>
@@ -3400,7 +3448,7 @@
         <p:spPr>
           <a:xfrm>
             <a:off x="504000" y="1326600"/>
-            <a:ext cx="9070200" cy="3286800"/>
+            <a:ext cx="9069840" cy="3286440"/>
           </a:xfrm>
           <a:prstGeom prst="rect">
             <a:avLst/>
@@ -3830,7 +3878,7 @@
         <p:spPr>
           <a:xfrm>
             <a:off x="3447360" y="5165280"/>
-            <a:ext cx="3193560" cy="389160"/>
+            <a:ext cx="3193200" cy="388800"/>
           </a:xfrm>
           <a:prstGeom prst="rect">
             <a:avLst/>
@@ -3908,7 +3956,7 @@
         <p:spPr>
           <a:xfrm>
             <a:off x="7227360" y="5165280"/>
-            <a:ext cx="2346840" cy="389160"/>
+            <a:ext cx="2346480" cy="388800"/>
           </a:xfrm>
           <a:prstGeom prst="rect">
             <a:avLst/>
@@ -3951,7 +3999,7 @@
                 <a:tab pos="0" algn="l"/>
               </a:tabLst>
             </a:pPr>
-            <a:fld id="{9CBDD4FE-81B5-4031-B0B1-629339FAF25E}" type="slidenum">
+            <a:fld id="{3D0FD620-E33D-4AE4-889F-2CACB4CB1150}" type="slidenum">
               <a:rPr lang="en-US" sz="1400" b="0" u="none" strike="noStrike">
                 <a:solidFill>
                   <a:srgbClr val="000000"/>
@@ -3986,7 +4034,7 @@
         <p:spPr>
           <a:xfrm>
             <a:off x="504000" y="5165280"/>
-            <a:ext cx="2346840" cy="389160"/>
+            <a:ext cx="2346480" cy="388800"/>
           </a:xfrm>
           <a:prstGeom prst="rect">
             <a:avLst/>
@@ -4086,7 +4134,7 @@
         <p:spPr>
           <a:xfrm>
             <a:off x="504000" y="363600"/>
-            <a:ext cx="9070200" cy="670680"/>
+            <a:ext cx="9069840" cy="670680"/>
           </a:xfrm>
           <a:prstGeom prst="rect">
             <a:avLst/>
@@ -4164,7 +4212,7 @@
         <p:spPr>
           <a:xfrm>
             <a:off x="3447360" y="5165280"/>
-            <a:ext cx="3193560" cy="389160"/>
+            <a:ext cx="3193200" cy="388800"/>
           </a:xfrm>
           <a:prstGeom prst="rect">
             <a:avLst/>
@@ -4242,7 +4290,7 @@
         <p:spPr>
           <a:xfrm>
             <a:off x="7227360" y="5165280"/>
-            <a:ext cx="2346840" cy="389160"/>
+            <a:ext cx="2346480" cy="388800"/>
           </a:xfrm>
           <a:prstGeom prst="rect">
             <a:avLst/>
@@ -4285,7 +4333,7 @@
                 <a:tab pos="0" algn="l"/>
               </a:tabLst>
             </a:pPr>
-            <a:fld id="{584EAA71-7668-4B56-A55B-E4D725E9E393}" type="slidenum">
+            <a:fld id="{2B6A302A-494A-4A90-866C-56C4C53771BF}" type="slidenum">
               <a:rPr lang="en-US" sz="1400" b="0" u="none" strike="noStrike">
                 <a:solidFill>
                   <a:srgbClr val="000000"/>
@@ -4320,7 +4368,7 @@
         <p:spPr>
           <a:xfrm>
             <a:off x="504000" y="5165280"/>
-            <a:ext cx="2346840" cy="389160"/>
+            <a:ext cx="2346480" cy="388800"/>
           </a:xfrm>
           <a:prstGeom prst="rect">
             <a:avLst/>
@@ -4398,7 +4446,7 @@
         <p:spPr>
           <a:xfrm>
             <a:off x="504000" y="1326600"/>
-            <a:ext cx="9070920" cy="3287520"/>
+            <a:ext cx="9070560" cy="3287160"/>
           </a:xfrm>
           <a:prstGeom prst="rect">
             <a:avLst/>
@@ -4850,7 +4898,7 @@
         <p:spPr>
           <a:xfrm>
             <a:off x="504000" y="363600"/>
-            <a:ext cx="9070200" cy="670680"/>
+            <a:ext cx="9069840" cy="670680"/>
           </a:xfrm>
           <a:prstGeom prst="rect">
             <a:avLst/>
@@ -4928,7 +4976,7 @@
         <p:spPr>
           <a:xfrm>
             <a:off x="3447360" y="5165280"/>
-            <a:ext cx="3193560" cy="389160"/>
+            <a:ext cx="3193200" cy="388800"/>
           </a:xfrm>
           <a:prstGeom prst="rect">
             <a:avLst/>
@@ -5006,7 +5054,7 @@
         <p:spPr>
           <a:xfrm>
             <a:off x="7227360" y="5165280"/>
-            <a:ext cx="2346840" cy="389160"/>
+            <a:ext cx="2346480" cy="388800"/>
           </a:xfrm>
           <a:prstGeom prst="rect">
             <a:avLst/>
@@ -5049,7 +5097,7 @@
                 <a:tab pos="0" algn="l"/>
               </a:tabLst>
             </a:pPr>
-            <a:fld id="{5C47E021-CA3B-47C7-8DD3-2303A5D4C26C}" type="slidenum">
+            <a:fld id="{445AFA1F-7FA8-4967-86ED-534795872CFA}" type="slidenum">
               <a:rPr lang="en-US" sz="1400" b="0" u="none" strike="noStrike">
                 <a:solidFill>
                   <a:srgbClr val="000000"/>
@@ -5084,7 +5132,7 @@
         <p:spPr>
           <a:xfrm>
             <a:off x="504000" y="5165280"/>
-            <a:ext cx="2346840" cy="389160"/>
+            <a:ext cx="2346480" cy="388800"/>
           </a:xfrm>
           <a:prstGeom prst="rect">
             <a:avLst/>
@@ -5162,7 +5210,7 @@
         <p:spPr>
           <a:xfrm>
             <a:off x="504000" y="1326600"/>
-            <a:ext cx="9070920" cy="3287520"/>
+            <a:ext cx="9070560" cy="3287160"/>
           </a:xfrm>
           <a:prstGeom prst="rect">
             <a:avLst/>
@@ -5614,7 +5662,7 @@
         <p:spPr>
           <a:xfrm>
             <a:off x="504000" y="363600"/>
-            <a:ext cx="9070200" cy="670680"/>
+            <a:ext cx="9069840" cy="670680"/>
           </a:xfrm>
           <a:prstGeom prst="rect">
             <a:avLst/>
@@ -5692,7 +5740,7 @@
         <p:spPr>
           <a:xfrm>
             <a:off x="3447360" y="5165280"/>
-            <a:ext cx="3193560" cy="389160"/>
+            <a:ext cx="3193200" cy="388800"/>
           </a:xfrm>
           <a:prstGeom prst="rect">
             <a:avLst/>
@@ -5770,7 +5818,7 @@
         <p:spPr>
           <a:xfrm>
             <a:off x="7227360" y="5165280"/>
-            <a:ext cx="2346840" cy="389160"/>
+            <a:ext cx="2346480" cy="388800"/>
           </a:xfrm>
           <a:prstGeom prst="rect">
             <a:avLst/>
@@ -5813,7 +5861,7 @@
                 <a:tab pos="0" algn="l"/>
               </a:tabLst>
             </a:pPr>
-            <a:fld id="{A4ADCD89-1097-41E3-869A-7A4F48783468}" type="slidenum">
+            <a:fld id="{3338A5C1-5D79-4D6D-B760-1665D90F5BCF}" type="slidenum">
               <a:rPr lang="en-US" sz="1400" b="0" u="none" strike="noStrike">
                 <a:solidFill>
                   <a:srgbClr val="000000"/>
@@ -5848,7 +5896,7 @@
         <p:spPr>
           <a:xfrm>
             <a:off x="504000" y="5165280"/>
-            <a:ext cx="2346840" cy="389160"/>
+            <a:ext cx="2346480" cy="388800"/>
           </a:xfrm>
           <a:prstGeom prst="rect">
             <a:avLst/>
@@ -5926,7 +5974,7 @@
         <p:spPr>
           <a:xfrm>
             <a:off x="504000" y="1326600"/>
-            <a:ext cx="9070920" cy="3287520"/>
+            <a:ext cx="9070560" cy="3287160"/>
           </a:xfrm>
           <a:prstGeom prst="rect">
             <a:avLst/>
@@ -6367,7 +6415,7 @@
       </p:grpSpPr>
       <p:sp>
         <p:nvSpPr>
-          <p:cNvPr id="36" name="PlaceHolder 1"/>
+          <p:cNvPr id="31" name="PlaceHolder 1"/>
           <p:cNvSpPr>
             <a:spLocks noGrp="1"/>
           </p:cNvSpPr>
@@ -6378,7 +6426,7 @@
         <p:spPr>
           <a:xfrm>
             <a:off x="504000" y="363600"/>
-            <a:ext cx="9070200" cy="670680"/>
+            <a:ext cx="9069840" cy="670680"/>
           </a:xfrm>
           <a:prstGeom prst="rect">
             <a:avLst/>
@@ -6445,18 +6493,18 @@
       </p:sp>
       <p:sp>
         <p:nvSpPr>
-          <p:cNvPr id="37" name="PlaceHolder 2"/>
+          <p:cNvPr id="32" name="PlaceHolder 2"/>
           <p:cNvSpPr>
             <a:spLocks noGrp="1"/>
           </p:cNvSpPr>
           <p:nvPr>
-            <p:ph type="ftr" idx="22"/>
+            <p:ph type="ftr" idx="19"/>
           </p:nvPr>
         </p:nvSpPr>
         <p:spPr>
           <a:xfrm>
             <a:off x="3447360" y="5165280"/>
-            <a:ext cx="3193560" cy="389160"/>
+            <a:ext cx="3193200" cy="388800"/>
           </a:xfrm>
           <a:prstGeom prst="rect">
             <a:avLst/>
@@ -6523,18 +6571,18 @@
       </p:sp>
       <p:sp>
         <p:nvSpPr>
-          <p:cNvPr id="38" name="PlaceHolder 3"/>
+          <p:cNvPr id="33" name="PlaceHolder 3"/>
           <p:cNvSpPr>
             <a:spLocks noGrp="1"/>
           </p:cNvSpPr>
           <p:nvPr>
-            <p:ph type="sldNum" idx="23"/>
+            <p:ph type="sldNum" idx="20"/>
           </p:nvPr>
         </p:nvSpPr>
         <p:spPr>
           <a:xfrm>
             <a:off x="7227360" y="5165280"/>
-            <a:ext cx="2346840" cy="389160"/>
+            <a:ext cx="2346480" cy="388800"/>
           </a:xfrm>
           <a:prstGeom prst="rect">
             <a:avLst/>
@@ -6577,7 +6625,7 @@
                 <a:tab pos="0" algn="l"/>
               </a:tabLst>
             </a:pPr>
-            <a:fld id="{52B69A14-7BE1-4713-9C14-AE6C412BC0FD}" type="slidenum">
+            <a:fld id="{C2C1BDC6-1D46-478C-A435-16322D8EDACE}" type="slidenum">
               <a:rPr lang="en-US" sz="1400" b="0" u="none" strike="noStrike">
                 <a:solidFill>
                   <a:srgbClr val="000000"/>
@@ -6601,18 +6649,18 @@
       </p:sp>
       <p:sp>
         <p:nvSpPr>
-          <p:cNvPr id="39" name="PlaceHolder 4"/>
+          <p:cNvPr id="34" name="PlaceHolder 4"/>
           <p:cNvSpPr>
             <a:spLocks noGrp="1"/>
           </p:cNvSpPr>
           <p:nvPr>
-            <p:ph type="dt" idx="24"/>
+            <p:ph type="dt" idx="21"/>
           </p:nvPr>
         </p:nvSpPr>
         <p:spPr>
           <a:xfrm>
             <a:off x="504000" y="5165280"/>
-            <a:ext cx="2346840" cy="389160"/>
+            <a:ext cx="2346480" cy="388800"/>
           </a:xfrm>
           <a:prstGeom prst="rect">
             <a:avLst/>
@@ -6679,7 +6727,7 @@
       </p:sp>
       <p:sp>
         <p:nvSpPr>
-          <p:cNvPr id="40" name="PlaceHolder 5"/>
+          <p:cNvPr id="35" name="PlaceHolder 5"/>
           <p:cNvSpPr>
             <a:spLocks noGrp="1"/>
           </p:cNvSpPr>
@@ -6690,7 +6738,7 @@
         <p:spPr>
           <a:xfrm>
             <a:off x="504000" y="1326600"/>
-            <a:ext cx="9070920" cy="3287520"/>
+            <a:ext cx="9070560" cy="3287160"/>
           </a:xfrm>
           <a:prstGeom prst="rect">
             <a:avLst/>
@@ -7114,7 +7162,7 @@
 
 <file path=ppt/slideLayouts/slideLayout8.xml><?xml version="1.0" encoding="utf-8"?>
 <p:sldLayout xmlns:a="http://schemas.openxmlformats.org/drawingml/2006/main" xmlns:p="http://schemas.openxmlformats.org/presentationml/2006/main" xmlns:r="http://schemas.openxmlformats.org/officeDocument/2006/relationships" xmlns:p14="http://schemas.microsoft.com/office/powerpoint/2010/main" xmlns:p15="http://schemas.microsoft.com/office/powerpoint/2012/main" xmlns:mc="http://schemas.openxmlformats.org/markup-compatibility/2006" type="title" preserve="1">
-  <p:cSld name="Default 6">
+  <p:cSld name="Default 7">
     <p:spTree>
       <p:nvGrpSpPr>
         <p:cNvPr id="1" name=""/>
@@ -7131,7 +7179,7 @@
       </p:grpSpPr>
       <p:sp>
         <p:nvSpPr>
-          <p:cNvPr id="31" name="PlaceHolder 1"/>
+          <p:cNvPr id="36" name="PlaceHolder 1"/>
           <p:cNvSpPr>
             <a:spLocks noGrp="1"/>
           </p:cNvSpPr>
@@ -7142,7 +7190,7 @@
         <p:spPr>
           <a:xfrm>
             <a:off x="504000" y="363600"/>
-            <a:ext cx="9070200" cy="670680"/>
+            <a:ext cx="9069840" cy="670680"/>
           </a:xfrm>
           <a:prstGeom prst="rect">
             <a:avLst/>
@@ -7209,18 +7257,18 @@
       </p:sp>
       <p:sp>
         <p:nvSpPr>
-          <p:cNvPr id="32" name="PlaceHolder 2"/>
+          <p:cNvPr id="37" name="PlaceHolder 2"/>
           <p:cNvSpPr>
             <a:spLocks noGrp="1"/>
           </p:cNvSpPr>
           <p:nvPr>
-            <p:ph type="ftr" idx="19"/>
+            <p:ph type="ftr" idx="22"/>
           </p:nvPr>
         </p:nvSpPr>
         <p:spPr>
           <a:xfrm>
             <a:off x="3447360" y="5165280"/>
-            <a:ext cx="3193560" cy="389160"/>
+            <a:ext cx="3193200" cy="388800"/>
           </a:xfrm>
           <a:prstGeom prst="rect">
             <a:avLst/>
@@ -7287,18 +7335,18 @@
       </p:sp>
       <p:sp>
         <p:nvSpPr>
-          <p:cNvPr id="33" name="PlaceHolder 3"/>
+          <p:cNvPr id="38" name="PlaceHolder 3"/>
           <p:cNvSpPr>
             <a:spLocks noGrp="1"/>
           </p:cNvSpPr>
           <p:nvPr>
-            <p:ph type="sldNum" idx="20"/>
+            <p:ph type="sldNum" idx="23"/>
           </p:nvPr>
         </p:nvSpPr>
         <p:spPr>
           <a:xfrm>
             <a:off x="7227360" y="5165280"/>
-            <a:ext cx="2346840" cy="389160"/>
+            <a:ext cx="2346480" cy="388800"/>
           </a:xfrm>
           <a:prstGeom prst="rect">
             <a:avLst/>
@@ -7341,7 +7389,7 @@
                 <a:tab pos="0" algn="l"/>
               </a:tabLst>
             </a:pPr>
-            <a:fld id="{0CF14964-BF22-4419-BC66-C9E44FF1CB85}" type="slidenum">
+            <a:fld id="{FB4C0608-B36D-4785-A5A9-1B03DDF09AB3}" type="slidenum">
               <a:rPr lang="en-US" sz="1400" b="0" u="none" strike="noStrike">
                 <a:solidFill>
                   <a:srgbClr val="000000"/>
@@ -7365,18 +7413,18 @@
       </p:sp>
       <p:sp>
         <p:nvSpPr>
-          <p:cNvPr id="34" name="PlaceHolder 4"/>
+          <p:cNvPr id="39" name="PlaceHolder 4"/>
           <p:cNvSpPr>
             <a:spLocks noGrp="1"/>
           </p:cNvSpPr>
           <p:nvPr>
-            <p:ph type="dt" idx="21"/>
+            <p:ph type="dt" idx="24"/>
           </p:nvPr>
         </p:nvSpPr>
         <p:spPr>
           <a:xfrm>
             <a:off x="504000" y="5165280"/>
-            <a:ext cx="2346840" cy="389160"/>
+            <a:ext cx="2346480" cy="388800"/>
           </a:xfrm>
           <a:prstGeom prst="rect">
             <a:avLst/>
@@ -7443,7 +7491,7 @@
       </p:sp>
       <p:sp>
         <p:nvSpPr>
-          <p:cNvPr id="35" name="PlaceHolder 5"/>
+          <p:cNvPr id="40" name="PlaceHolder 5"/>
           <p:cNvSpPr>
             <a:spLocks noGrp="1"/>
           </p:cNvSpPr>
@@ -7454,7 +7502,7 @@
         <p:spPr>
           <a:xfrm>
             <a:off x="504000" y="1326600"/>
-            <a:ext cx="9070920" cy="3287520"/>
+            <a:ext cx="9070560" cy="3287160"/>
           </a:xfrm>
           <a:prstGeom prst="rect">
             <a:avLst/>
@@ -7938,8 +7986,8 @@
         </p:nvSpPr>
         <p:spPr>
           <a:xfrm>
-            <a:off x="504000" y="1325160"/>
-            <a:ext cx="9070200" cy="3289680"/>
+            <a:off x="504000" y="1324800"/>
+            <a:ext cx="9069840" cy="3290040"/>
           </a:xfrm>
           <a:prstGeom prst="rect">
             <a:avLst/>
@@ -8058,8 +8106,8 @@
         </p:nvSpPr>
         <p:spPr>
           <a:xfrm>
-            <a:off x="504000" y="224640"/>
-            <a:ext cx="9070920" cy="947880"/>
+            <a:off x="504000" y="224280"/>
+            <a:ext cx="9070560" cy="948240"/>
           </a:xfrm>
           <a:prstGeom prst="rect">
             <a:avLst/>
@@ -8118,7 +8166,7 @@
         <p:spPr>
           <a:xfrm>
             <a:off x="363960" y="1513080"/>
-            <a:ext cx="9430920" cy="3715560"/>
+            <a:ext cx="9430560" cy="3715200"/>
           </a:xfrm>
           <a:prstGeom prst="rect">
             <a:avLst/>
@@ -8171,8 +8219,8 @@
         </p:nvSpPr>
         <p:spPr>
           <a:xfrm>
-            <a:off x="504000" y="1325160"/>
-            <a:ext cx="9070200" cy="3289680"/>
+            <a:off x="504000" y="1324800"/>
+            <a:ext cx="9069840" cy="3290040"/>
           </a:xfrm>
           <a:prstGeom prst="rect">
             <a:avLst/>
@@ -8264,7 +8312,7 @@
         <p:spPr>
           <a:xfrm>
             <a:off x="1770120" y="441000"/>
-            <a:ext cx="6990480" cy="4888800"/>
+            <a:ext cx="6990120" cy="4888440"/>
           </a:xfrm>
           <a:prstGeom prst="rect">
             <a:avLst/>
@@ -8317,8 +8365,8 @@
         </p:nvSpPr>
         <p:spPr>
           <a:xfrm>
-            <a:off x="504000" y="363600"/>
-            <a:ext cx="9070200" cy="670680"/>
+            <a:off x="504000" y="363240"/>
+            <a:ext cx="9069840" cy="671040"/>
           </a:xfrm>
           <a:prstGeom prst="rect">
             <a:avLst/>
@@ -8363,7 +8411,7 @@
         <p:spPr>
           <a:xfrm>
             <a:off x="1371600" y="9000"/>
-            <a:ext cx="7378920" cy="5670360"/>
+            <a:ext cx="7378560" cy="5670000"/>
           </a:xfrm>
           <a:prstGeom prst="rect">
             <a:avLst/>
@@ -8416,8 +8464,8 @@
         </p:nvSpPr>
         <p:spPr>
           <a:xfrm>
-            <a:off x="504000" y="1325160"/>
-            <a:ext cx="9070200" cy="3289680"/>
+            <a:off x="504000" y="1324800"/>
+            <a:ext cx="9069840" cy="3290040"/>
           </a:xfrm>
           <a:prstGeom prst="rect">
             <a:avLst/>
@@ -8509,7 +8557,7 @@
         <p:spPr>
           <a:xfrm>
             <a:off x="0" y="34560"/>
-            <a:ext cx="10080720" cy="5600160"/>
+            <a:ext cx="10080360" cy="5599800"/>
           </a:xfrm>
           <a:prstGeom prst="rect">
             <a:avLst/>
@@ -8563,7 +8611,7 @@
         <p:spPr>
           <a:xfrm>
             <a:off x="0" y="56520"/>
-            <a:ext cx="9972000" cy="5670360"/>
+            <a:ext cx="9971640" cy="5670000"/>
           </a:xfrm>
           <a:prstGeom prst="rect">
             <a:avLst/>
@@ -8616,8 +8664,8 @@
         </p:nvSpPr>
         <p:spPr>
           <a:xfrm>
-            <a:off x="504000" y="1325160"/>
-            <a:ext cx="9070200" cy="3289680"/>
+            <a:off x="504000" y="1324800"/>
+            <a:ext cx="9069840" cy="3290040"/>
           </a:xfrm>
           <a:prstGeom prst="rect">
             <a:avLst/>
@@ -8708,8 +8756,8 @@
         </p:nvSpPr>
         <p:spPr>
           <a:xfrm>
-            <a:off x="504000" y="363600"/>
-            <a:ext cx="9070200" cy="670680"/>
+            <a:off x="504000" y="363240"/>
+            <a:ext cx="9069840" cy="671040"/>
           </a:xfrm>
           <a:prstGeom prst="rect">
             <a:avLst/>
@@ -8754,7 +8802,7 @@
         <p:spPr>
           <a:xfrm>
             <a:off x="452880" y="9000"/>
-            <a:ext cx="9216360" cy="5670360"/>
+            <a:ext cx="9216000" cy="5670000"/>
           </a:xfrm>
           <a:prstGeom prst="rect">
             <a:avLst/>
@@ -8807,8 +8855,8 @@
         </p:nvSpPr>
         <p:spPr>
           <a:xfrm>
-            <a:off x="504000" y="1325160"/>
-            <a:ext cx="9070200" cy="3289680"/>
+            <a:off x="504000" y="1324800"/>
+            <a:ext cx="9069840" cy="3290040"/>
           </a:xfrm>
           <a:prstGeom prst="rect">
             <a:avLst/>
@@ -8899,8 +8947,8 @@
         </p:nvSpPr>
         <p:spPr>
           <a:xfrm>
-            <a:off x="504000" y="1325160"/>
-            <a:ext cx="9070200" cy="3289680"/>
+            <a:off x="504000" y="1324800"/>
+            <a:ext cx="9069840" cy="3290040"/>
           </a:xfrm>
           <a:prstGeom prst="rect">
             <a:avLst/>
@@ -8992,7 +9040,7 @@
         <p:spPr>
           <a:xfrm>
             <a:off x="2225880" y="9000"/>
-            <a:ext cx="5670360" cy="5670360"/>
+            <a:ext cx="5670000" cy="5670000"/>
           </a:xfrm>
           <a:prstGeom prst="rect">
             <a:avLst/>
@@ -9045,8 +9093,8 @@
         </p:nvSpPr>
         <p:spPr>
           <a:xfrm>
-            <a:off x="504000" y="363600"/>
-            <a:ext cx="9070200" cy="670680"/>
+            <a:off x="504000" y="363240"/>
+            <a:ext cx="9069840" cy="671040"/>
           </a:xfrm>
           <a:prstGeom prst="rect">
             <a:avLst/>
@@ -9108,7 +9156,7 @@
         <p:spPr>
           <a:xfrm>
             <a:off x="1644840" y="1247400"/>
-            <a:ext cx="6785640" cy="4184640"/>
+            <a:ext cx="6785280" cy="4184280"/>
           </a:xfrm>
           <a:prstGeom prst="rect">
             <a:avLst/>
@@ -9161,8 +9209,8 @@
         </p:nvSpPr>
         <p:spPr>
           <a:xfrm>
-            <a:off x="504000" y="363600"/>
-            <a:ext cx="9070200" cy="670680"/>
+            <a:off x="504000" y="363240"/>
+            <a:ext cx="9069840" cy="671040"/>
           </a:xfrm>
           <a:prstGeom prst="rect">
             <a:avLst/>
@@ -9207,7 +9255,7 @@
         <p:spPr>
           <a:xfrm>
             <a:off x="20880" y="9360"/>
-            <a:ext cx="10080360" cy="5670000"/>
+            <a:ext cx="10080000" cy="5669640"/>
           </a:xfrm>
           <a:prstGeom prst="rect">
             <a:avLst/>
@@ -9260,8 +9308,8 @@
         </p:nvSpPr>
         <p:spPr>
           <a:xfrm>
-            <a:off x="504000" y="363600"/>
-            <a:ext cx="9070200" cy="670680"/>
+            <a:off x="504000" y="363240"/>
+            <a:ext cx="9069840" cy="671040"/>
           </a:xfrm>
           <a:prstGeom prst="rect">
             <a:avLst/>
@@ -9306,7 +9354,7 @@
         <p:spPr>
           <a:xfrm>
             <a:off x="61920" y="101160"/>
-            <a:ext cx="9998640" cy="5486040"/>
+            <a:ext cx="9998280" cy="5485680"/>
           </a:xfrm>
           <a:prstGeom prst="rect">
             <a:avLst/>
@@ -9359,8 +9407,8 @@
         </p:nvSpPr>
         <p:spPr>
           <a:xfrm>
-            <a:off x="504000" y="1325160"/>
-            <a:ext cx="9070200" cy="3289680"/>
+            <a:off x="504000" y="1324800"/>
+            <a:ext cx="9069840" cy="3290040"/>
           </a:xfrm>
           <a:prstGeom prst="rect">
             <a:avLst/>
@@ -9451,8 +9499,8 @@
         </p:nvSpPr>
         <p:spPr>
           <a:xfrm>
-            <a:off x="504000" y="362520"/>
-            <a:ext cx="9070200" cy="671760"/>
+            <a:off x="504000" y="362160"/>
+            <a:ext cx="9069840" cy="672120"/>
           </a:xfrm>
           <a:prstGeom prst="rect">
             <a:avLst/>
@@ -9511,7 +9559,7 @@
         <p:spPr>
           <a:xfrm>
             <a:off x="561600" y="1791720"/>
-            <a:ext cx="9006840" cy="3013560"/>
+            <a:ext cx="9006480" cy="3013200"/>
           </a:xfrm>
           <a:prstGeom prst="rect">
             <a:avLst/>
@@ -9564,8 +9612,8 @@
         </p:nvSpPr>
         <p:spPr>
           <a:xfrm>
-            <a:off x="504000" y="362520"/>
-            <a:ext cx="9070200" cy="671760"/>
+            <a:off x="504000" y="362160"/>
+            <a:ext cx="9069840" cy="672120"/>
           </a:xfrm>
           <a:prstGeom prst="rect">
             <a:avLst/>
@@ -9624,7 +9672,7 @@
         <p:spPr>
           <a:xfrm>
             <a:off x="974880" y="1502640"/>
-            <a:ext cx="7923240" cy="3520800"/>
+            <a:ext cx="7922880" cy="3520440"/>
           </a:xfrm>
           <a:prstGeom prst="rect">
             <a:avLst/>
@@ -9677,8 +9725,8 @@
         </p:nvSpPr>
         <p:spPr>
           <a:xfrm>
-            <a:off x="504000" y="1325160"/>
-            <a:ext cx="9070200" cy="3289680"/>
+            <a:off x="504000" y="1324800"/>
+            <a:ext cx="9069840" cy="3290040"/>
           </a:xfrm>
           <a:prstGeom prst="rect">
             <a:avLst/>
@@ -9846,7 +9894,7 @@
 </a:theme>
 </file>
 
-<file path=ppt/theme/theme8.xml><?xml version="1.0" encoding="utf-8"?>
+<file path=ppt/theme/theme9.xml><?xml version="1.0" encoding="utf-8"?>
 <a:theme xmlns:a="http://schemas.openxmlformats.org/drawingml/2006/main" xmlns:r="http://schemas.openxmlformats.org/officeDocument/2006/relationships" name="Office Theme">
   <a:themeElements>
     <a:clrScheme name="LibreOffice">
